--- a/docs/바로씻_빌링결제경로.pptx
+++ b/docs/바로씻_빌링결제경로.pptx
@@ -6,6 +6,8 @@
   </p:sldMasterIdLst>
   <p:sldIdLst>
     <p:sldId id="256" r:id="rId2"/>
+    <p:sldId id="266" r:id="rId12"/>
+    <p:sldId id="265" r:id="rId11"/>
     <p:sldId id="257" r:id="rId3"/>
     <p:sldId id="258" r:id="rId4"/>
     <p:sldId id="259" r:id="rId5"/>
@@ -14,8 +16,6 @@
     <p:sldId id="262" r:id="rId8"/>
     <p:sldId id="263" r:id="rId9"/>
     <p:sldId id="264" r:id="rId10"/>
-    <p:sldId id="265" r:id="rId11"/>
-    <p:sldId id="266" r:id="rId12"/>
   </p:sldIdLst>
   <p:notesMasterIdLst>
     <p:notesMasterId r:id="rId13"/>
@@ -1841,6 +1841,26 @@
             </a:r>
             <a:endParaRPr lang="en-US" sz="1600" dirty="0"/>
           </a:p>
+          <a:p>
+            <a:pPr indent="0" marL="0">
+              <a:lnSpc>
+                <a:spcPct val="150000"/>
+              </a:lnSpc>
+              <a:buNone/>
+            </a:pPr>
+            <a:r>
+              <a:rPr lang="en-US" sz="1200" dirty="0">
+                <a:solidFill>
+                  <a:srgbClr val="CBD9D0"/>
+                </a:solidFill>
+                <a:latin typeface="맑은 고딕" pitchFamily="34" charset="0"/>
+                <a:ea typeface="맑은 고딕" pitchFamily="34" charset="-122"/>
+                <a:cs typeface="맑은 고딕" pitchFamily="34" charset="-120"/>
+              </a:rPr>
+              <a:t>사업자등록번호      512-88-00059</a:t>
+            </a:r>
+            <a:endParaRPr lang="en-US" sz="1200" dirty="0"/>
+          </a:p>
         </p:txBody>
       </p:sp>
       <p:sp>
@@ -1945,6 +1965,46 @@
                 <a:cs typeface="맑은 고딕" pitchFamily="34" charset="-120"/>
               </a:rPr>
               <a:t>결제수단                 빌링결제 (신용카드 정기결제)</a:t>
+            </a:r>
+            <a:endParaRPr lang="en-US" sz="1200" dirty="0"/>
+          </a:p>
+          <a:p>
+            <a:pPr indent="0" marL="0">
+              <a:lnSpc>
+                <a:spcPct val="150000"/>
+              </a:lnSpc>
+              <a:buNone/>
+            </a:pPr>
+            <a:r>
+              <a:rPr lang="en-US" sz="1200" dirty="0">
+                <a:solidFill>
+                  <a:srgbClr val="CBD9D0"/>
+                </a:solidFill>
+                <a:latin typeface="맑은 고딕" pitchFamily="34" charset="0"/>
+                <a:ea typeface="맑은 고딕" pitchFamily="34" charset="-122"/>
+                <a:cs typeface="맑은 고딕" pitchFamily="34" charset="-120"/>
+              </a:rPr>
+              <a:t>테스트계정 ID          reviewer@barosit.com</a:t>
+            </a:r>
+            <a:endParaRPr lang="en-US" sz="1200" dirty="0"/>
+          </a:p>
+          <a:p>
+            <a:pPr indent="0" marL="0">
+              <a:lnSpc>
+                <a:spcPct val="150000"/>
+              </a:lnSpc>
+              <a:buNone/>
+            </a:pPr>
+            <a:r>
+              <a:rPr lang="en-US" sz="1200" dirty="0">
+                <a:solidFill>
+                  <a:srgbClr val="CBD9D0"/>
+                </a:solidFill>
+                <a:latin typeface="맑은 고딕" pitchFamily="34" charset="0"/>
+                <a:ea typeface="맑은 고딕" pitchFamily="34" charset="-122"/>
+                <a:cs typeface="맑은 고딕" pitchFamily="34" charset="-120"/>
+              </a:rPr>
+              <a:t>테스트계정 PW         ______________  (발송 시 기입)</a:t>
             </a:r>
             <a:endParaRPr lang="en-US" sz="1200" dirty="0"/>
           </a:p>
@@ -3011,7 +3071,7 @@
                 <a:ea typeface="맑은 고딕" pitchFamily="34" charset="-122"/>
                 <a:cs typeface="맑은 고딕" pitchFamily="34" charset="-120"/>
               </a:rPr>
-              <a:t>10</a:t>
+              <a:t>3</a:t>
             </a:r>
             <a:endParaRPr lang="en-US" sz="800" dirty="0"/>
           </a:p>
@@ -4238,7 +4298,7 @@
                 <a:ea typeface="맑은 고딕" pitchFamily="34" charset="-122"/>
                 <a:cs typeface="맑은 고딕" pitchFamily="34" charset="-120"/>
               </a:rPr>
-              <a:t>11</a:t>
+              <a:t>2</a:t>
             </a:r>
             <a:endParaRPr lang="en-US" sz="800" dirty="0"/>
           </a:p>
@@ -5596,7 +5656,7 @@
                 <a:ea typeface="맑은 고딕" pitchFamily="34" charset="-122"/>
                 <a:cs typeface="맑은 고딕" pitchFamily="34" charset="-120"/>
               </a:rPr>
-              <a:t>2</a:t>
+              <a:t>4</a:t>
             </a:r>
             <a:endParaRPr lang="en-US" sz="800" dirty="0"/>
           </a:p>
@@ -6120,7 +6180,7 @@
                 <a:ea typeface="맑은 고딕" pitchFamily="34" charset="-122"/>
                 <a:cs typeface="맑은 고딕" pitchFamily="34" charset="-120"/>
               </a:rPr>
-              <a:t>3</a:t>
+              <a:t>5</a:t>
             </a:r>
             <a:endParaRPr lang="en-US" sz="800" dirty="0"/>
           </a:p>
@@ -6692,7 +6752,7 @@
                 <a:ea typeface="맑은 고딕" pitchFamily="34" charset="-122"/>
                 <a:cs typeface="맑은 고딕" pitchFamily="34" charset="-120"/>
               </a:rPr>
-              <a:t>4</a:t>
+              <a:t>6</a:t>
             </a:r>
             <a:endParaRPr lang="en-US" sz="800" dirty="0"/>
           </a:p>
@@ -7240,7 +7300,7 @@
                 <a:ea typeface="맑은 고딕" pitchFamily="34" charset="-122"/>
                 <a:cs typeface="맑은 고딕" pitchFamily="34" charset="-120"/>
               </a:rPr>
-              <a:t>5</a:t>
+              <a:t>7</a:t>
             </a:r>
             <a:endParaRPr lang="en-US" sz="800" dirty="0"/>
           </a:p>
@@ -7764,7 +7824,7 @@
                 <a:ea typeface="맑은 고딕" pitchFamily="34" charset="-122"/>
                 <a:cs typeface="맑은 고딕" pitchFamily="34" charset="-120"/>
               </a:rPr>
-              <a:t>6</a:t>
+              <a:t>8</a:t>
             </a:r>
             <a:endParaRPr lang="en-US" sz="800" dirty="0"/>
           </a:p>
@@ -8312,7 +8372,7 @@
                 <a:ea typeface="맑은 고딕" pitchFamily="34" charset="-122"/>
                 <a:cs typeface="맑은 고딕" pitchFamily="34" charset="-120"/>
               </a:rPr>
-              <a:t>7</a:t>
+              <a:t>9</a:t>
             </a:r>
             <a:endParaRPr lang="en-US" sz="800" dirty="0"/>
           </a:p>
@@ -8625,7 +8685,7 @@
                 <a:ea typeface="맑은 고딕" pitchFamily="34" charset="-122"/>
                 <a:cs typeface="맑은 고딕" pitchFamily="34" charset="-120"/>
               </a:rPr>
-              <a:t>https://barosit.com/#/billing/success</a:t>
+              <a:t>https://barosit.com/?redirect_route=pricing&amp;payment=success</a:t>
             </a:r>
             <a:endParaRPr lang="en-US" sz="1000" dirty="0"/>
           </a:p>
@@ -8860,7 +8920,7 @@
                 <a:ea typeface="맑은 고딕" pitchFamily="34" charset="-122"/>
                 <a:cs typeface="맑은 고딕" pitchFamily="34" charset="-120"/>
               </a:rPr>
-              <a:t>8</a:t>
+              <a:t>10</a:t>
             </a:r>
             <a:endParaRPr lang="en-US" sz="800" dirty="0"/>
           </a:p>
@@ -9408,7 +9468,7 @@
                 <a:ea typeface="맑은 고딕" pitchFamily="34" charset="-122"/>
                 <a:cs typeface="맑은 고딕" pitchFamily="34" charset="-120"/>
               </a:rPr>
-              <a:t>9</a:t>
+              <a:t>11</a:t>
             </a:r>
             <a:endParaRPr lang="en-US" sz="800" dirty="0"/>
           </a:p>

--- a/docs/바로씻_빌링결제경로.pptx
+++ b/docs/바로씻_빌링결제경로.pptx
@@ -8,6 +8,7 @@
     <p:sldId id="256" r:id="rId2"/>
     <p:sldId id="266" r:id="rId12"/>
     <p:sldId id="265" r:id="rId11"/>
+    <p:sldId id="267" r:id="rId18"/>
     <p:sldId id="257" r:id="rId3"/>
     <p:sldId id="258" r:id="rId4"/>
     <p:sldId id="259" r:id="rId5"/>
@@ -1887,6 +1888,10 @@
             <a:prstDash val="solid"/>
           </a:ln>
         </p:spPr>
+        <p:txBody>
+          <a:bodyPr/>
+          <a:p/>
+        </p:txBody>
       </p:sp>
       <p:sp>
         <p:nvSpPr>
@@ -2018,7 +2023,7 @@
         </p:nvSpPr>
         <p:spPr>
           <a:xfrm>
-            <a:off x="731520" y="4315968"/>
+            <a:off x="731520" y="4645152"/>
             <a:ext cx="7680960" cy="274320"/>
           </a:xfrm>
           <a:prstGeom prst="rect">
@@ -2058,6 +2063,2689 @@
 </file>
 
 <file path=ppt/slides/slide10.xml><?xml version="1.0" encoding="utf-8"?>
+<p:sld xmlns:a="http://schemas.openxmlformats.org/drawingml/2006/main" xmlns:r="http://schemas.openxmlformats.org/officeDocument/2006/relationships" xmlns:p="http://schemas.openxmlformats.org/presentationml/2006/main">
+  <p:cSld name="Slide 7">
+    <p:bg>
+      <p:bgPr>
+        <a:solidFill>
+          <a:srgbClr val="FFFFFF"/>
+        </a:solidFill>
+      </p:bgPr>
+    </p:bg>
+    <p:spTree>
+      <p:nvGrpSpPr>
+        <p:cNvPr id="1" name=""/>
+        <p:cNvGrpSpPr/>
+        <p:nvPr/>
+      </p:nvGrpSpPr>
+      <p:grpSpPr>
+        <a:xfrm>
+          <a:off x="0" y="0"/>
+          <a:ext cx="0" cy="0"/>
+          <a:chOff x="0" y="0"/>
+          <a:chExt cx="0" cy="0"/>
+        </a:xfrm>
+      </p:grpSpPr>
+      <p:sp>
+        <p:nvSpPr>
+          <p:cNvPr id="2" name="Shape 0"/>
+          <p:cNvSpPr/>
+          <p:nvPr/>
+        </p:nvSpPr>
+        <p:spPr>
+          <a:xfrm>
+            <a:off x="457200" y="329184"/>
+            <a:ext cx="914400" cy="310896"/>
+          </a:xfrm>
+          <a:prstGeom prst="roundRect">
+            <a:avLst>
+              <a:gd name="adj" fmla="val 47059"/>
+            </a:avLst>
+          </a:prstGeom>
+          <a:solidFill>
+            <a:srgbClr val="2F6B4F"/>
+          </a:solidFill>
+          <a:ln/>
+        </p:spPr>
+        <p:txBody>
+          <a:bodyPr/>
+          <a:p/>
+        </p:txBody>
+      </p:sp>
+      <p:sp>
+        <p:nvSpPr>
+          <p:cNvPr id="3" name="Text 1"/>
+          <p:cNvSpPr/>
+          <p:nvPr/>
+        </p:nvSpPr>
+        <p:spPr>
+          <a:xfrm>
+            <a:off x="457200" y="329184"/>
+            <a:ext cx="914400" cy="310896"/>
+          </a:xfrm>
+          <a:prstGeom prst="rect">
+            <a:avLst/>
+          </a:prstGeom>
+          <a:noFill/>
+          <a:ln/>
+        </p:spPr>
+        <p:txBody>
+          <a:bodyPr wrap="square" lIns="0" tIns="0" rIns="0" bIns="0" rtlCol="0" anchor="ctr"/>
+          <a:lstStyle/>
+          <a:p>
+            <a:pPr algn="ctr" indent="0" marL="0">
+              <a:buNone/>
+            </a:pPr>
+            <a:r>
+              <a:rPr lang="en-US" sz="1200" b="1" dirty="0">
+                <a:solidFill>
+                  <a:srgbClr val="FFFFFF"/>
+                </a:solidFill>
+                <a:latin typeface="맑은 고딕" pitchFamily="34" charset="0"/>
+                <a:ea typeface="맑은 고딕" pitchFamily="34" charset="-122"/>
+                <a:cs typeface="맑은 고딕" pitchFamily="34" charset="-120"/>
+              </a:rPr>
+              <a:t>STEP 5</a:t>
+            </a:r>
+            <a:endParaRPr lang="en-US" sz="1200" dirty="0"/>
+          </a:p>
+        </p:txBody>
+      </p:sp>
+      <p:sp>
+        <p:nvSpPr>
+          <p:cNvPr id="4" name="Text 2"/>
+          <p:cNvSpPr/>
+          <p:nvPr/>
+        </p:nvSpPr>
+        <p:spPr>
+          <a:xfrm>
+            <a:off x="1508760" y="292608"/>
+            <a:ext cx="7223760" cy="384048"/>
+          </a:xfrm>
+          <a:prstGeom prst="rect">
+            <a:avLst/>
+          </a:prstGeom>
+          <a:noFill/>
+          <a:ln/>
+        </p:spPr>
+        <p:txBody>
+          <a:bodyPr wrap="square" lIns="0" tIns="0" rIns="0" bIns="0" rtlCol="0" anchor="ctr"/>
+          <a:lstStyle/>
+          <a:p>
+            <a:pPr algn="l" indent="0" marL="0">
+              <a:buNone/>
+            </a:pPr>
+            <a:r>
+              <a:rPr lang="en-US" sz="2000" b="1" dirty="0">
+                <a:solidFill>
+                  <a:srgbClr val="1F2A24"/>
+                </a:solidFill>
+                <a:latin typeface="맑은 고딕" pitchFamily="34" charset="0"/>
+                <a:ea typeface="맑은 고딕" pitchFamily="34" charset="-122"/>
+                <a:cs typeface="맑은 고딕" pitchFamily="34" charset="-120"/>
+              </a:rPr>
+              <a:t>토스페이먼츠 카드 등록 (빌링 인증)</a:t>
+            </a:r>
+            <a:endParaRPr lang="en-US" sz="2000" dirty="0"/>
+          </a:p>
+        </p:txBody>
+      </p:sp>
+      <p:sp>
+        <p:nvSpPr>
+          <p:cNvPr id="5" name="Shape 3"/>
+          <p:cNvSpPr/>
+          <p:nvPr/>
+        </p:nvSpPr>
+        <p:spPr>
+          <a:xfrm>
+            <a:off x="457200" y="868680"/>
+            <a:ext cx="5074920" cy="3611880"/>
+          </a:xfrm>
+          <a:prstGeom prst="rect">
+            <a:avLst/>
+          </a:prstGeom>
+          <a:solidFill>
+            <a:srgbClr val="F1F5F2"/>
+          </a:solidFill>
+          <a:ln w="12700">
+            <a:solidFill>
+              <a:srgbClr val="D8E0DA"/>
+            </a:solidFill>
+            <a:prstDash val="dash"/>
+          </a:ln>
+        </p:spPr>
+        <p:txBody>
+          <a:bodyPr/>
+          <a:p/>
+        </p:txBody>
+      </p:sp>
+      <p:sp>
+        <p:nvSpPr>
+          <p:cNvPr id="8" name="Text 6"/>
+          <p:cNvSpPr/>
+          <p:nvPr/>
+        </p:nvSpPr>
+        <p:spPr>
+          <a:xfrm>
+            <a:off x="5760720" y="868680"/>
+            <a:ext cx="2926080" cy="219456"/>
+          </a:xfrm>
+          <a:prstGeom prst="rect">
+            <a:avLst/>
+          </a:prstGeom>
+          <a:noFill/>
+          <a:ln/>
+        </p:spPr>
+        <p:txBody>
+          <a:bodyPr wrap="square" lIns="0" tIns="0" rIns="0" bIns="0" rtlCol="0" anchor="ctr"/>
+          <a:lstStyle/>
+          <a:p>
+            <a:pPr indent="0" marL="0">
+              <a:buNone/>
+            </a:pPr>
+            <a:r>
+              <a:rPr lang="en-US" sz="1000" b="1" dirty="0">
+                <a:solidFill>
+                  <a:srgbClr val="2F6B4F"/>
+                </a:solidFill>
+                <a:latin typeface="맑은 고딕" pitchFamily="34" charset="0"/>
+                <a:ea typeface="맑은 고딕" pitchFamily="34" charset="-122"/>
+                <a:cs typeface="맑은 고딕" pitchFamily="34" charset="-120"/>
+              </a:rPr>
+              <a:t>접속 경로</a:t>
+            </a:r>
+            <a:endParaRPr lang="en-US" sz="1000" dirty="0"/>
+          </a:p>
+        </p:txBody>
+      </p:sp>
+      <p:sp>
+        <p:nvSpPr>
+          <p:cNvPr id="9" name="Text 7"/>
+          <p:cNvSpPr/>
+          <p:nvPr/>
+        </p:nvSpPr>
+        <p:spPr>
+          <a:xfrm>
+            <a:off x="5760720" y="1106424"/>
+            <a:ext cx="2926080" cy="457200"/>
+          </a:xfrm>
+          <a:prstGeom prst="rect">
+            <a:avLst/>
+          </a:prstGeom>
+          <a:noFill/>
+          <a:ln/>
+        </p:spPr>
+        <p:txBody>
+          <a:bodyPr wrap="square" lIns="0" tIns="0" rIns="0" bIns="0" rtlCol="0" anchor="ctr"/>
+          <a:lstStyle/>
+          <a:p>
+            <a:pPr indent="0" marL="0">
+              <a:buNone/>
+            </a:pPr>
+            <a:r>
+              <a:rPr lang="en-US" sz="1000" dirty="0">
+                <a:solidFill>
+                  <a:srgbClr val="1F2A24"/>
+                </a:solidFill>
+                <a:latin typeface="맑은 고딕" pitchFamily="34" charset="0"/>
+                <a:ea typeface="맑은 고딕" pitchFamily="34" charset="-122"/>
+                <a:cs typeface="맑은 고딕" pitchFamily="34" charset="-120"/>
+              </a:rPr>
+              <a:t>토스페이먼츠 결제창 (js.tosspayments.com)</a:t>
+            </a:r>
+            <a:endParaRPr lang="en-US" sz="1000" dirty="0"/>
+          </a:p>
+        </p:txBody>
+      </p:sp>
+      <p:sp>
+        <p:nvSpPr>
+          <p:cNvPr id="10" name="Text 8"/>
+          <p:cNvSpPr/>
+          <p:nvPr/>
+        </p:nvSpPr>
+        <p:spPr>
+          <a:xfrm>
+            <a:off x="5760720" y="1673352"/>
+            <a:ext cx="2926080" cy="219456"/>
+          </a:xfrm>
+          <a:prstGeom prst="rect">
+            <a:avLst/>
+          </a:prstGeom>
+          <a:noFill/>
+          <a:ln/>
+        </p:spPr>
+        <p:txBody>
+          <a:bodyPr wrap="square" lIns="0" tIns="0" rIns="0" bIns="0" rtlCol="0" anchor="ctr"/>
+          <a:lstStyle/>
+          <a:p>
+            <a:pPr indent="0" marL="0">
+              <a:buNone/>
+            </a:pPr>
+            <a:r>
+              <a:rPr lang="en-US" sz="1000" b="1" dirty="0">
+                <a:solidFill>
+                  <a:srgbClr val="2F6B4F"/>
+                </a:solidFill>
+                <a:latin typeface="맑은 고딕" pitchFamily="34" charset="0"/>
+                <a:ea typeface="맑은 고딕" pitchFamily="34" charset="-122"/>
+                <a:cs typeface="맑은 고딕" pitchFamily="34" charset="-120"/>
+              </a:rPr>
+              <a:t>화면 설명</a:t>
+            </a:r>
+            <a:endParaRPr lang="en-US" sz="1000" dirty="0"/>
+          </a:p>
+        </p:txBody>
+      </p:sp>
+      <p:sp>
+        <p:nvSpPr>
+          <p:cNvPr id="11" name="Text 9"/>
+          <p:cNvSpPr/>
+          <p:nvPr/>
+        </p:nvSpPr>
+        <p:spPr>
+          <a:xfrm>
+            <a:off x="5760720" y="1929384"/>
+            <a:ext cx="2926080" cy="2377440"/>
+          </a:xfrm>
+          <a:prstGeom prst="rect">
+            <a:avLst/>
+          </a:prstGeom>
+          <a:noFill/>
+          <a:ln/>
+        </p:spPr>
+        <p:txBody>
+          <a:bodyPr wrap="square" lIns="0" tIns="0" rIns="0" bIns="0" rtlCol="0" anchor="t"/>
+          <a:lstStyle/>
+          <a:p>
+            <a:pPr marL="342900" indent="-342900">
+              <a:lnSpc>
+                <a:spcPct val="125000"/>
+              </a:lnSpc>
+              <a:spcAft>
+                <a:spcPts val="600"/>
+              </a:spcAft>
+              <a:buSzPct val="100000"/>
+              <a:buChar char="•"/>
+            </a:pPr>
+            <a:r>
+              <a:rPr lang="en-US" sz="1000" dirty="0">
+                <a:solidFill>
+                  <a:srgbClr val="1F2A24"/>
+                </a:solidFill>
+                <a:latin typeface="맑은 고딕" pitchFamily="34" charset="0"/>
+                <a:ea typeface="맑은 고딕" pitchFamily="34" charset="-122"/>
+                <a:cs typeface="맑은 고딕" pitchFamily="34" charset="-120"/>
+              </a:rPr>
+              <a:t>토스페이먼츠 JavaScript SDK를 통한 빌링 인증창 호출</a:t>
+            </a:r>
+            <a:endParaRPr lang="en-US" sz="1000" dirty="0"/>
+          </a:p>
+          <a:p>
+            <a:pPr marL="342900" indent="-342900">
+              <a:lnSpc>
+                <a:spcPct val="125000"/>
+              </a:lnSpc>
+              <a:spcAft>
+                <a:spcPts val="600"/>
+              </a:spcAft>
+              <a:buSzPct val="100000"/>
+              <a:buChar char="•"/>
+            </a:pPr>
+            <a:r>
+              <a:rPr lang="en-US" sz="1000" dirty="0">
+                <a:solidFill>
+                  <a:srgbClr val="1F2A24"/>
+                </a:solidFill>
+                <a:latin typeface="맑은 고딕" pitchFamily="34" charset="0"/>
+                <a:ea typeface="맑은 고딕" pitchFamily="34" charset="-122"/>
+                <a:cs typeface="맑은 고딕" pitchFamily="34" charset="-120"/>
+              </a:rPr>
+              <a:t>이용자가 카드 정보를 직접 입력하여 자동결제 카드 등록</a:t>
+            </a:r>
+            <a:endParaRPr lang="en-US" sz="1000" dirty="0"/>
+          </a:p>
+          <a:p>
+            <a:pPr marL="342900" indent="-342900">
+              <a:lnSpc>
+                <a:spcPct val="125000"/>
+              </a:lnSpc>
+              <a:spcAft>
+                <a:spcPts val="600"/>
+              </a:spcAft>
+              <a:buSzPct val="100000"/>
+              <a:buChar char="•"/>
+            </a:pPr>
+            <a:r>
+              <a:rPr lang="en-US" sz="1000" dirty="0">
+                <a:solidFill>
+                  <a:srgbClr val="1F2A24"/>
+                </a:solidFill>
+                <a:latin typeface="맑은 고딕" pitchFamily="34" charset="0"/>
+                <a:ea typeface="맑은 고딕" pitchFamily="34" charset="-122"/>
+                <a:cs typeface="맑은 고딕" pitchFamily="34" charset="-120"/>
+              </a:rPr>
+              <a:t>인증 완료 후 서버에서 빌링키 발급 및 최초 결제 승인</a:t>
+            </a:r>
+            <a:endParaRPr lang="en-US" sz="1000" dirty="0"/>
+          </a:p>
+          <a:p>
+            <a:pPr marL="342900" indent="-342900">
+              <a:lnSpc>
+                <a:spcPct val="125000"/>
+              </a:lnSpc>
+              <a:spcAft>
+                <a:spcPts val="600"/>
+              </a:spcAft>
+              <a:buSzPct val="100000"/>
+              <a:buChar char="•"/>
+            </a:pPr>
+            <a:r>
+              <a:rPr lang="en-US" sz="1000" dirty="0">
+                <a:solidFill>
+                  <a:srgbClr val="1F2A24"/>
+                </a:solidFill>
+                <a:latin typeface="맑은 고딕" pitchFamily="34" charset="0"/>
+                <a:ea typeface="맑은 고딕" pitchFamily="34" charset="-122"/>
+                <a:cs typeface="맑은 고딕" pitchFamily="34" charset="-120"/>
+              </a:rPr>
+              <a:t>카드정보는 당사 서버에 저장하지 않음</a:t>
+            </a:r>
+            <a:endParaRPr lang="en-US" sz="1000" dirty="0"/>
+          </a:p>
+        </p:txBody>
+      </p:sp>
+      <p:sp>
+        <p:nvSpPr>
+          <p:cNvPr id="12" name="Text 10"/>
+          <p:cNvSpPr/>
+          <p:nvPr/>
+        </p:nvSpPr>
+        <p:spPr>
+          <a:xfrm>
+            <a:off x="457200" y="4709160"/>
+            <a:ext cx="6400800" cy="256032"/>
+          </a:xfrm>
+          <a:prstGeom prst="rect">
+            <a:avLst/>
+          </a:prstGeom>
+          <a:noFill/>
+          <a:ln/>
+        </p:spPr>
+        <p:txBody>
+          <a:bodyPr wrap="square" lIns="0" tIns="0" rIns="0" bIns="0" rtlCol="0" anchor="ctr"/>
+          <a:lstStyle/>
+          <a:p>
+            <a:pPr algn="l" indent="0" marL="0">
+              <a:buNone/>
+            </a:pPr>
+            <a:r>
+              <a:rPr lang="en-US" sz="800" dirty="0">
+                <a:solidFill>
+                  <a:srgbClr val="6B7A72"/>
+                </a:solidFill>
+                <a:latin typeface="맑은 고딕" pitchFamily="34" charset="0"/>
+                <a:ea typeface="맑은 고딕" pitchFamily="34" charset="-122"/>
+                <a:cs typeface="맑은 고딕" pitchFamily="34" charset="-120"/>
+              </a:rPr>
+              <a:t>주식회사 구비드 · 바로씻(BaroSit) · MID bill_barosi69c</a:t>
+            </a:r>
+            <a:endParaRPr lang="en-US" sz="800" dirty="0"/>
+          </a:p>
+        </p:txBody>
+      </p:sp>
+      <p:sp>
+        <p:nvSpPr>
+          <p:cNvPr id="13" name="Text 11"/>
+          <p:cNvSpPr/>
+          <p:nvPr/>
+        </p:nvSpPr>
+        <p:spPr>
+          <a:xfrm>
+            <a:off x="8138160" y="4709160"/>
+            <a:ext cx="548640" cy="256032"/>
+          </a:xfrm>
+          <a:prstGeom prst="rect">
+            <a:avLst/>
+          </a:prstGeom>
+          <a:noFill/>
+          <a:ln/>
+        </p:spPr>
+        <p:txBody>
+          <a:bodyPr wrap="square" lIns="0" tIns="0" rIns="0" bIns="0" rtlCol="0" anchor="ctr"/>
+          <a:lstStyle/>
+          <a:p>
+            <a:pPr algn="r" indent="0" marL="0">
+              <a:buNone/>
+            </a:pPr>
+            <a:r>
+              <a:rPr lang="en-US" sz="800" dirty="0">
+                <a:solidFill>
+                  <a:srgbClr val="6B7A72"/>
+                </a:solidFill>
+                <a:latin typeface="맑은 고딕" pitchFamily="34" charset="0"/>
+                <a:ea typeface="맑은 고딕" pitchFamily="34" charset="-122"/>
+                <a:cs typeface="맑은 고딕" pitchFamily="34" charset="-120"/>
+              </a:rPr>
+              <a:t>10</a:t>
+            </a:r>
+            <a:endParaRPr lang="en-US" sz="800" dirty="0"/>
+          </a:p>
+        </p:txBody>
+      </p:sp>
+      <p:pic>
+        <p:nvPicPr>
+          <p:cNvPr id="14" name="Picture 13" descr="step5-toss-billing.png"/>
+          <p:cNvPicPr>
+            <a:picLocks noChangeAspect="1"/>
+          </p:cNvPicPr>
+          <p:nvPr/>
+        </p:nvPicPr>
+        <p:blipFill>
+          <a:blip r:embed="rId3"/>
+          <a:stretch>
+            <a:fillRect/>
+          </a:stretch>
+        </p:blipFill>
+        <p:spPr>
+          <a:xfrm>
+            <a:off x="530352" y="1288447"/>
+            <a:ext cx="4928616" cy="2772346"/>
+          </a:xfrm>
+          <a:prstGeom prst="rect">
+            <a:avLst/>
+          </a:prstGeom>
+        </p:spPr>
+      </p:pic>
+    </p:spTree>
+  </p:cSld>
+  <p:clrMapOvr>
+    <a:masterClrMapping/>
+  </p:clrMapOvr>
+</p:sld>
+</file>
+
+<file path=ppt/slides/slide11.xml><?xml version="1.0" encoding="utf-8"?>
+<p:sld xmlns:a="http://schemas.openxmlformats.org/drawingml/2006/main" xmlns:r="http://schemas.openxmlformats.org/officeDocument/2006/relationships" xmlns:p="http://schemas.openxmlformats.org/presentationml/2006/main">
+  <p:cSld name="Slide 8">
+    <p:bg>
+      <p:bgPr>
+        <a:solidFill>
+          <a:srgbClr val="FFFFFF"/>
+        </a:solidFill>
+      </p:bgPr>
+    </p:bg>
+    <p:spTree>
+      <p:nvGrpSpPr>
+        <p:cNvPr id="1" name=""/>
+        <p:cNvGrpSpPr/>
+        <p:nvPr/>
+      </p:nvGrpSpPr>
+      <p:grpSpPr>
+        <a:xfrm>
+          <a:off x="0" y="0"/>
+          <a:ext cx="0" cy="0"/>
+          <a:chOff x="0" y="0"/>
+          <a:chExt cx="0" cy="0"/>
+        </a:xfrm>
+      </p:grpSpPr>
+      <p:sp>
+        <p:nvSpPr>
+          <p:cNvPr id="2" name="Shape 0"/>
+          <p:cNvSpPr/>
+          <p:nvPr/>
+        </p:nvSpPr>
+        <p:spPr>
+          <a:xfrm>
+            <a:off x="457200" y="329184"/>
+            <a:ext cx="914400" cy="310896"/>
+          </a:xfrm>
+          <a:prstGeom prst="roundRect">
+            <a:avLst>
+              <a:gd name="adj" fmla="val 47059"/>
+            </a:avLst>
+          </a:prstGeom>
+          <a:solidFill>
+            <a:srgbClr val="2F6B4F"/>
+          </a:solidFill>
+          <a:ln/>
+        </p:spPr>
+        <p:txBody>
+          <a:bodyPr/>
+          <a:p/>
+        </p:txBody>
+      </p:sp>
+      <p:sp>
+        <p:nvSpPr>
+          <p:cNvPr id="3" name="Text 1"/>
+          <p:cNvSpPr/>
+          <p:nvPr/>
+        </p:nvSpPr>
+        <p:spPr>
+          <a:xfrm>
+            <a:off x="457200" y="329184"/>
+            <a:ext cx="914400" cy="310896"/>
+          </a:xfrm>
+          <a:prstGeom prst="rect">
+            <a:avLst/>
+          </a:prstGeom>
+          <a:noFill/>
+          <a:ln/>
+        </p:spPr>
+        <p:txBody>
+          <a:bodyPr wrap="square" lIns="0" tIns="0" rIns="0" bIns="0" rtlCol="0" anchor="ctr"/>
+          <a:lstStyle/>
+          <a:p>
+            <a:pPr algn="ctr" indent="0" marL="0">
+              <a:buNone/>
+            </a:pPr>
+            <a:r>
+              <a:rPr lang="en-US" sz="1200" b="1" dirty="0">
+                <a:solidFill>
+                  <a:srgbClr val="FFFFFF"/>
+                </a:solidFill>
+                <a:latin typeface="맑은 고딕" pitchFamily="34" charset="0"/>
+                <a:ea typeface="맑은 고딕" pitchFamily="34" charset="-122"/>
+                <a:cs typeface="맑은 고딕" pitchFamily="34" charset="-120"/>
+              </a:rPr>
+              <a:t>STEP 6</a:t>
+            </a:r>
+            <a:endParaRPr lang="en-US" sz="1200" dirty="0"/>
+          </a:p>
+        </p:txBody>
+      </p:sp>
+      <p:sp>
+        <p:nvSpPr>
+          <p:cNvPr id="4" name="Text 2"/>
+          <p:cNvSpPr/>
+          <p:nvPr/>
+        </p:nvSpPr>
+        <p:spPr>
+          <a:xfrm>
+            <a:off x="1508760" y="292608"/>
+            <a:ext cx="7223760" cy="384048"/>
+          </a:xfrm>
+          <a:prstGeom prst="rect">
+            <a:avLst/>
+          </a:prstGeom>
+          <a:noFill/>
+          <a:ln/>
+        </p:spPr>
+        <p:txBody>
+          <a:bodyPr wrap="square" lIns="0" tIns="0" rIns="0" bIns="0" rtlCol="0" anchor="ctr"/>
+          <a:lstStyle/>
+          <a:p>
+            <a:pPr algn="l" indent="0" marL="0">
+              <a:buNone/>
+            </a:pPr>
+            <a:r>
+              <a:rPr lang="en-US" sz="2000" b="1" dirty="0">
+                <a:solidFill>
+                  <a:srgbClr val="1F2A24"/>
+                </a:solidFill>
+                <a:latin typeface="맑은 고딕" pitchFamily="34" charset="0"/>
+                <a:ea typeface="맑은 고딕" pitchFamily="34" charset="-122"/>
+                <a:cs typeface="맑은 고딕" pitchFamily="34" charset="-120"/>
+              </a:rPr>
+              <a:t>결제 완료</a:t>
+            </a:r>
+            <a:endParaRPr lang="en-US" sz="2000" dirty="0"/>
+          </a:p>
+        </p:txBody>
+      </p:sp>
+      <p:sp>
+        <p:nvSpPr>
+          <p:cNvPr id="5" name="Shape 3"/>
+          <p:cNvSpPr/>
+          <p:nvPr/>
+        </p:nvSpPr>
+        <p:spPr>
+          <a:xfrm>
+            <a:off x="457200" y="868680"/>
+            <a:ext cx="5074920" cy="3611880"/>
+          </a:xfrm>
+          <a:prstGeom prst="rect">
+            <a:avLst/>
+          </a:prstGeom>
+          <a:solidFill>
+            <a:srgbClr val="F1F5F2"/>
+          </a:solidFill>
+          <a:ln w="12700">
+            <a:solidFill>
+              <a:srgbClr val="D8E0DA"/>
+            </a:solidFill>
+            <a:prstDash val="dash"/>
+          </a:ln>
+        </p:spPr>
+        <p:txBody>
+          <a:bodyPr/>
+          <a:p/>
+        </p:txBody>
+      </p:sp>
+      <p:sp>
+        <p:nvSpPr>
+          <p:cNvPr id="8" name="Text 6"/>
+          <p:cNvSpPr/>
+          <p:nvPr/>
+        </p:nvSpPr>
+        <p:spPr>
+          <a:xfrm>
+            <a:off x="5760720" y="868680"/>
+            <a:ext cx="2926080" cy="219456"/>
+          </a:xfrm>
+          <a:prstGeom prst="rect">
+            <a:avLst/>
+          </a:prstGeom>
+          <a:noFill/>
+          <a:ln/>
+        </p:spPr>
+        <p:txBody>
+          <a:bodyPr wrap="square" lIns="0" tIns="0" rIns="0" bIns="0" rtlCol="0" anchor="ctr"/>
+          <a:lstStyle/>
+          <a:p>
+            <a:pPr indent="0" marL="0">
+              <a:buNone/>
+            </a:pPr>
+            <a:r>
+              <a:rPr lang="en-US" sz="1000" b="1" dirty="0">
+                <a:solidFill>
+                  <a:srgbClr val="2F6B4F"/>
+                </a:solidFill>
+                <a:latin typeface="맑은 고딕" pitchFamily="34" charset="0"/>
+                <a:ea typeface="맑은 고딕" pitchFamily="34" charset="-122"/>
+                <a:cs typeface="맑은 고딕" pitchFamily="34" charset="-120"/>
+              </a:rPr>
+              <a:t>접속 경로</a:t>
+            </a:r>
+            <a:endParaRPr lang="en-US" sz="1000" dirty="0"/>
+          </a:p>
+        </p:txBody>
+      </p:sp>
+      <p:sp>
+        <p:nvSpPr>
+          <p:cNvPr id="9" name="Text 7"/>
+          <p:cNvSpPr/>
+          <p:nvPr/>
+        </p:nvSpPr>
+        <p:spPr>
+          <a:xfrm>
+            <a:off x="5760720" y="1106424"/>
+            <a:ext cx="2926080" cy="457200"/>
+          </a:xfrm>
+          <a:prstGeom prst="rect">
+            <a:avLst/>
+          </a:prstGeom>
+          <a:noFill/>
+          <a:ln/>
+        </p:spPr>
+        <p:txBody>
+          <a:bodyPr wrap="square" lIns="0" tIns="0" rIns="0" bIns="0" rtlCol="0" anchor="ctr"/>
+          <a:lstStyle/>
+          <a:p>
+            <a:pPr indent="0" marL="0">
+              <a:buNone/>
+            </a:pPr>
+            <a:r>
+              <a:rPr lang="en-US" sz="1000" dirty="0">
+                <a:solidFill>
+                  <a:srgbClr val="1F2A24"/>
+                </a:solidFill>
+                <a:latin typeface="맑은 고딕" pitchFamily="34" charset="0"/>
+                <a:ea typeface="맑은 고딕" pitchFamily="34" charset="-122"/>
+                <a:cs typeface="맑은 고딕" pitchFamily="34" charset="-120"/>
+              </a:rPr>
+              <a:t>https://barosit.com/#/pricing  (결제 완료 후 자동 복귀)</a:t>
+            </a:r>
+            <a:endParaRPr lang="en-US" sz="1000" dirty="0"/>
+          </a:p>
+        </p:txBody>
+      </p:sp>
+      <p:sp>
+        <p:nvSpPr>
+          <p:cNvPr id="10" name="Text 8"/>
+          <p:cNvSpPr/>
+          <p:nvPr/>
+        </p:nvSpPr>
+        <p:spPr>
+          <a:xfrm>
+            <a:off x="5760720" y="1673352"/>
+            <a:ext cx="2926080" cy="219456"/>
+          </a:xfrm>
+          <a:prstGeom prst="rect">
+            <a:avLst/>
+          </a:prstGeom>
+          <a:noFill/>
+          <a:ln/>
+        </p:spPr>
+        <p:txBody>
+          <a:bodyPr wrap="square" lIns="0" tIns="0" rIns="0" bIns="0" rtlCol="0" anchor="ctr"/>
+          <a:lstStyle/>
+          <a:p>
+            <a:pPr indent="0" marL="0">
+              <a:buNone/>
+            </a:pPr>
+            <a:r>
+              <a:rPr lang="en-US" sz="1000" b="1" dirty="0">
+                <a:solidFill>
+                  <a:srgbClr val="2F6B4F"/>
+                </a:solidFill>
+                <a:latin typeface="맑은 고딕" pitchFamily="34" charset="0"/>
+                <a:ea typeface="맑은 고딕" pitchFamily="34" charset="-122"/>
+                <a:cs typeface="맑은 고딕" pitchFamily="34" charset="-120"/>
+              </a:rPr>
+              <a:t>화면 설명</a:t>
+            </a:r>
+            <a:endParaRPr lang="en-US" sz="1000" dirty="0"/>
+          </a:p>
+        </p:txBody>
+      </p:sp>
+      <p:sp>
+        <p:nvSpPr>
+          <p:cNvPr id="11" name="Text 9"/>
+          <p:cNvSpPr/>
+          <p:nvPr/>
+        </p:nvSpPr>
+        <p:spPr>
+          <a:xfrm>
+            <a:off x="5760720" y="1929384"/>
+            <a:ext cx="2926080" cy="2377440"/>
+          </a:xfrm>
+          <a:prstGeom prst="rect">
+            <a:avLst/>
+          </a:prstGeom>
+          <a:noFill/>
+          <a:ln/>
+        </p:spPr>
+        <p:txBody>
+          <a:bodyPr wrap="square" lIns="0" tIns="0" rIns="0" bIns="0" rtlCol="0" anchor="t"/>
+          <a:lstStyle/>
+          <a:p>
+            <a:pPr marL="342900" indent="-342900">
+              <a:lnSpc>
+                <a:spcPct val="125000"/>
+              </a:lnSpc>
+              <a:spcAft>
+                <a:spcPts val="600"/>
+              </a:spcAft>
+              <a:buSzPct val="100000"/>
+              <a:buChar char="•"/>
+            </a:pPr>
+            <a:r>
+              <a:rPr lang="en-US" sz="1000" dirty="0">
+                <a:solidFill>
+                  <a:srgbClr val="1F2A24"/>
+                </a:solidFill>
+                <a:latin typeface="맑은 고딕" pitchFamily="34" charset="0"/>
+                <a:ea typeface="맑은 고딕" pitchFamily="34" charset="-122"/>
+                <a:cs typeface="맑은 고딕" pitchFamily="34" charset="-120"/>
+              </a:rPr>
+              <a:t>결제 완료 및 PRO 구독 활성화 안내</a:t>
+            </a:r>
+            <a:endParaRPr lang="en-US" sz="1000" dirty="0"/>
+          </a:p>
+          <a:p>
+            <a:pPr marL="342900" indent="-342900">
+              <a:lnSpc>
+                <a:spcPct val="125000"/>
+              </a:lnSpc>
+              <a:spcAft>
+                <a:spcPts val="600"/>
+              </a:spcAft>
+              <a:buSzPct val="100000"/>
+              <a:buChar char="•"/>
+            </a:pPr>
+            <a:r>
+              <a:rPr lang="en-US" sz="1000" dirty="0">
+                <a:solidFill>
+                  <a:srgbClr val="1F2A24"/>
+                </a:solidFill>
+                <a:latin typeface="맑은 고딕" pitchFamily="34" charset="0"/>
+                <a:ea typeface="맑은 고딕" pitchFamily="34" charset="-122"/>
+                <a:cs typeface="맑은 고딕" pitchFamily="34" charset="-120"/>
+              </a:rPr>
+              <a:t>결제 금액, 결제 수단, 다음 결제 예정일 표시</a:t>
+            </a:r>
+            <a:endParaRPr lang="en-US" sz="1000" dirty="0"/>
+          </a:p>
+          <a:p>
+            <a:pPr marL="342900" indent="-342900">
+              <a:lnSpc>
+                <a:spcPct val="125000"/>
+              </a:lnSpc>
+              <a:spcAft>
+                <a:spcPts val="600"/>
+              </a:spcAft>
+              <a:buSzPct val="100000"/>
+              <a:buChar char="•"/>
+            </a:pPr>
+            <a:r>
+              <a:rPr lang="en-US" sz="1000" dirty="0">
+                <a:solidFill>
+                  <a:srgbClr val="1F2A24"/>
+                </a:solidFill>
+                <a:latin typeface="맑은 고딕" pitchFamily="34" charset="0"/>
+                <a:ea typeface="맑은 고딕" pitchFamily="34" charset="-122"/>
+                <a:cs typeface="맑은 고딕" pitchFamily="34" charset="-120"/>
+              </a:rPr>
+              <a:t>데스크톱 앱 다운로드 안내로 연결</a:t>
+            </a:r>
+            <a:endParaRPr lang="en-US" sz="1000" dirty="0"/>
+          </a:p>
+          <a:p>
+            <a:pPr marL="342900" indent="-342900">
+              <a:lnSpc>
+                <a:spcPct val="125000"/>
+              </a:lnSpc>
+              <a:spcAft>
+                <a:spcPts val="600"/>
+              </a:spcAft>
+              <a:buSzPct val="100000"/>
+              <a:buChar char="•"/>
+            </a:pPr>
+            <a:r>
+              <a:rPr lang="en-US" sz="1000" dirty="0">
+                <a:solidFill>
+                  <a:srgbClr val="1F2A24"/>
+                </a:solidFill>
+                <a:latin typeface="맑은 고딕" pitchFamily="34" charset="0"/>
+                <a:ea typeface="맑은 고딕" pitchFamily="34" charset="-122"/>
+                <a:cs typeface="맑은 고딕" pitchFamily="34" charset="-120"/>
+              </a:rPr>
+              <a:t>결제 내역은 이메일로도 발송</a:t>
+            </a:r>
+            <a:endParaRPr lang="en-US" sz="1000" dirty="0"/>
+          </a:p>
+        </p:txBody>
+      </p:sp>
+      <p:sp>
+        <p:nvSpPr>
+          <p:cNvPr id="12" name="Text 10"/>
+          <p:cNvSpPr/>
+          <p:nvPr/>
+        </p:nvSpPr>
+        <p:spPr>
+          <a:xfrm>
+            <a:off x="457200" y="4709160"/>
+            <a:ext cx="6400800" cy="256032"/>
+          </a:xfrm>
+          <a:prstGeom prst="rect">
+            <a:avLst/>
+          </a:prstGeom>
+          <a:noFill/>
+          <a:ln/>
+        </p:spPr>
+        <p:txBody>
+          <a:bodyPr wrap="square" lIns="0" tIns="0" rIns="0" bIns="0" rtlCol="0" anchor="ctr"/>
+          <a:lstStyle/>
+          <a:p>
+            <a:pPr algn="l" indent="0" marL="0">
+              <a:buNone/>
+            </a:pPr>
+            <a:r>
+              <a:rPr lang="en-US" sz="800" dirty="0">
+                <a:solidFill>
+                  <a:srgbClr val="6B7A72"/>
+                </a:solidFill>
+                <a:latin typeface="맑은 고딕" pitchFamily="34" charset="0"/>
+                <a:ea typeface="맑은 고딕" pitchFamily="34" charset="-122"/>
+                <a:cs typeface="맑은 고딕" pitchFamily="34" charset="-120"/>
+              </a:rPr>
+              <a:t>주식회사 구비드 · 바로씻(BaroSit) · MID bill_barosi69c</a:t>
+            </a:r>
+            <a:endParaRPr lang="en-US" sz="800" dirty="0"/>
+          </a:p>
+        </p:txBody>
+      </p:sp>
+      <p:sp>
+        <p:nvSpPr>
+          <p:cNvPr id="13" name="Text 11"/>
+          <p:cNvSpPr/>
+          <p:nvPr/>
+        </p:nvSpPr>
+        <p:spPr>
+          <a:xfrm>
+            <a:off x="8138160" y="4709160"/>
+            <a:ext cx="548640" cy="256032"/>
+          </a:xfrm>
+          <a:prstGeom prst="rect">
+            <a:avLst/>
+          </a:prstGeom>
+          <a:noFill/>
+          <a:ln/>
+        </p:spPr>
+        <p:txBody>
+          <a:bodyPr wrap="square" lIns="0" tIns="0" rIns="0" bIns="0" rtlCol="0" anchor="ctr"/>
+          <a:lstStyle/>
+          <a:p>
+            <a:pPr algn="r" indent="0" marL="0">
+              <a:buNone/>
+            </a:pPr>
+            <a:r>
+              <a:rPr lang="en-US" sz="800" dirty="0">
+                <a:solidFill>
+                  <a:srgbClr val="6B7A72"/>
+                </a:solidFill>
+                <a:latin typeface="맑은 고딕" pitchFamily="34" charset="0"/>
+                <a:ea typeface="맑은 고딕" pitchFamily="34" charset="-122"/>
+                <a:cs typeface="맑은 고딕" pitchFamily="34" charset="-120"/>
+              </a:rPr>
+              <a:t>11</a:t>
+            </a:r>
+            <a:endParaRPr lang="en-US" sz="800" dirty="0"/>
+          </a:p>
+        </p:txBody>
+      </p:sp>
+      <p:pic>
+        <p:nvPicPr>
+          <p:cNvPr id="14" name="Picture 13" descr="step6-success.png"/>
+          <p:cNvPicPr>
+            <a:picLocks noChangeAspect="1"/>
+          </p:cNvPicPr>
+          <p:nvPr/>
+        </p:nvPicPr>
+        <p:blipFill>
+          <a:blip r:embed="rId3"/>
+          <a:stretch>
+            <a:fillRect/>
+          </a:stretch>
+        </p:blipFill>
+        <p:spPr>
+          <a:xfrm>
+            <a:off x="530352" y="1288447"/>
+            <a:ext cx="4928616" cy="2772346"/>
+          </a:xfrm>
+          <a:prstGeom prst="rect">
+            <a:avLst/>
+          </a:prstGeom>
+        </p:spPr>
+      </p:pic>
+    </p:spTree>
+  </p:cSld>
+  <p:clrMapOvr>
+    <a:masterClrMapping/>
+  </p:clrMapOvr>
+</p:sld>
+</file>
+
+<file path=ppt/slides/slide12.xml><?xml version="1.0" encoding="utf-8"?>
+<p:sld xmlns:a="http://schemas.openxmlformats.org/drawingml/2006/main" xmlns:r="http://schemas.openxmlformats.org/officeDocument/2006/relationships" xmlns:p="http://schemas.openxmlformats.org/presentationml/2006/main">
+  <p:cSld name="Slide 9">
+    <p:bg>
+      <p:bgPr>
+        <a:solidFill>
+          <a:srgbClr val="FFFFFF"/>
+        </a:solidFill>
+      </p:bgPr>
+    </p:bg>
+    <p:spTree>
+      <p:nvGrpSpPr>
+        <p:cNvPr id="1" name=""/>
+        <p:cNvGrpSpPr/>
+        <p:nvPr/>
+      </p:nvGrpSpPr>
+      <p:grpSpPr>
+        <a:xfrm>
+          <a:off x="0" y="0"/>
+          <a:ext cx="0" cy="0"/>
+          <a:chOff x="0" y="0"/>
+          <a:chExt cx="0" cy="0"/>
+        </a:xfrm>
+      </p:grpSpPr>
+      <p:sp>
+        <p:nvSpPr>
+          <p:cNvPr id="2" name="Shape 0"/>
+          <p:cNvSpPr/>
+          <p:nvPr/>
+        </p:nvSpPr>
+        <p:spPr>
+          <a:xfrm>
+            <a:off x="457200" y="329184"/>
+            <a:ext cx="914400" cy="310896"/>
+          </a:xfrm>
+          <a:prstGeom prst="roundRect">
+            <a:avLst>
+              <a:gd name="adj" fmla="val 47059"/>
+            </a:avLst>
+          </a:prstGeom>
+          <a:solidFill>
+            <a:srgbClr val="2F6B4F"/>
+          </a:solidFill>
+          <a:ln/>
+        </p:spPr>
+        <p:txBody>
+          <a:bodyPr/>
+          <a:p/>
+        </p:txBody>
+      </p:sp>
+      <p:sp>
+        <p:nvSpPr>
+          <p:cNvPr id="3" name="Text 1"/>
+          <p:cNvSpPr/>
+          <p:nvPr/>
+        </p:nvSpPr>
+        <p:spPr>
+          <a:xfrm>
+            <a:off x="457200" y="329184"/>
+            <a:ext cx="914400" cy="310896"/>
+          </a:xfrm>
+          <a:prstGeom prst="rect">
+            <a:avLst/>
+          </a:prstGeom>
+          <a:noFill/>
+          <a:ln/>
+        </p:spPr>
+        <p:txBody>
+          <a:bodyPr wrap="square" lIns="0" tIns="0" rIns="0" bIns="0" rtlCol="0" anchor="ctr"/>
+          <a:lstStyle/>
+          <a:p>
+            <a:pPr algn="ctr" indent="0" marL="0">
+              <a:buNone/>
+            </a:pPr>
+            <a:r>
+              <a:rPr lang="en-US" sz="1200" b="1" dirty="0">
+                <a:solidFill>
+                  <a:srgbClr val="FFFFFF"/>
+                </a:solidFill>
+                <a:latin typeface="맑은 고딕" pitchFamily="34" charset="0"/>
+                <a:ea typeface="맑은 고딕" pitchFamily="34" charset="-122"/>
+                <a:cs typeface="맑은 고딕" pitchFamily="34" charset="-120"/>
+              </a:rPr>
+              <a:t>STEP 7</a:t>
+            </a:r>
+            <a:endParaRPr lang="en-US" sz="1200" dirty="0"/>
+          </a:p>
+        </p:txBody>
+      </p:sp>
+      <p:sp>
+        <p:nvSpPr>
+          <p:cNvPr id="4" name="Text 2"/>
+          <p:cNvSpPr/>
+          <p:nvPr/>
+        </p:nvSpPr>
+        <p:spPr>
+          <a:xfrm>
+            <a:off x="1508760" y="292608"/>
+            <a:ext cx="7223760" cy="384048"/>
+          </a:xfrm>
+          <a:prstGeom prst="rect">
+            <a:avLst/>
+          </a:prstGeom>
+          <a:noFill/>
+          <a:ln/>
+        </p:spPr>
+        <p:txBody>
+          <a:bodyPr wrap="square" lIns="0" tIns="0" rIns="0" bIns="0" rtlCol="0" anchor="ctr"/>
+          <a:lstStyle/>
+          <a:p>
+            <a:pPr algn="l" indent="0" marL="0">
+              <a:buNone/>
+            </a:pPr>
+            <a:r>
+              <a:rPr lang="en-US" sz="2000" b="1" dirty="0">
+                <a:solidFill>
+                  <a:srgbClr val="1F2A24"/>
+                </a:solidFill>
+                <a:latin typeface="맑은 고딕" pitchFamily="34" charset="0"/>
+                <a:ea typeface="맑은 고딕" pitchFamily="34" charset="-122"/>
+                <a:cs typeface="맑은 고딕" pitchFamily="34" charset="-120"/>
+              </a:rPr>
+              <a:t>구독 관리 · 해지 · 환불 신청</a:t>
+            </a:r>
+            <a:endParaRPr lang="en-US" sz="2000" dirty="0"/>
+          </a:p>
+        </p:txBody>
+      </p:sp>
+      <p:sp>
+        <p:nvSpPr>
+          <p:cNvPr id="5" name="Shape 3"/>
+          <p:cNvSpPr/>
+          <p:nvPr/>
+        </p:nvSpPr>
+        <p:spPr>
+          <a:xfrm>
+            <a:off x="457200" y="868680"/>
+            <a:ext cx="5074920" cy="3611880"/>
+          </a:xfrm>
+          <a:prstGeom prst="rect">
+            <a:avLst/>
+          </a:prstGeom>
+          <a:solidFill>
+            <a:srgbClr val="F1F5F2"/>
+          </a:solidFill>
+          <a:ln w="12700">
+            <a:solidFill>
+              <a:srgbClr val="D8E0DA"/>
+            </a:solidFill>
+            <a:prstDash val="dash"/>
+          </a:ln>
+        </p:spPr>
+        <p:txBody>
+          <a:bodyPr/>
+          <a:p/>
+        </p:txBody>
+      </p:sp>
+      <p:sp>
+        <p:nvSpPr>
+          <p:cNvPr id="8" name="Text 6"/>
+          <p:cNvSpPr/>
+          <p:nvPr/>
+        </p:nvSpPr>
+        <p:spPr>
+          <a:xfrm>
+            <a:off x="5760720" y="868680"/>
+            <a:ext cx="2926080" cy="219456"/>
+          </a:xfrm>
+          <a:prstGeom prst="rect">
+            <a:avLst/>
+          </a:prstGeom>
+          <a:noFill/>
+          <a:ln/>
+        </p:spPr>
+        <p:txBody>
+          <a:bodyPr wrap="square" lIns="0" tIns="0" rIns="0" bIns="0" rtlCol="0" anchor="ctr"/>
+          <a:lstStyle/>
+          <a:p>
+            <a:pPr indent="0" marL="0">
+              <a:buNone/>
+            </a:pPr>
+            <a:r>
+              <a:rPr lang="en-US" sz="1000" b="1" dirty="0">
+                <a:solidFill>
+                  <a:srgbClr val="2F6B4F"/>
+                </a:solidFill>
+                <a:latin typeface="맑은 고딕" pitchFamily="34" charset="0"/>
+                <a:ea typeface="맑은 고딕" pitchFamily="34" charset="-122"/>
+                <a:cs typeface="맑은 고딕" pitchFamily="34" charset="-120"/>
+              </a:rPr>
+              <a:t>접속 경로</a:t>
+            </a:r>
+            <a:endParaRPr lang="en-US" sz="1000" dirty="0"/>
+          </a:p>
+        </p:txBody>
+      </p:sp>
+      <p:sp>
+        <p:nvSpPr>
+          <p:cNvPr id="9" name="Text 7"/>
+          <p:cNvSpPr/>
+          <p:nvPr/>
+        </p:nvSpPr>
+        <p:spPr>
+          <a:xfrm>
+            <a:off x="5760720" y="1106424"/>
+            <a:ext cx="2926080" cy="457200"/>
+          </a:xfrm>
+          <a:prstGeom prst="rect">
+            <a:avLst/>
+          </a:prstGeom>
+          <a:noFill/>
+          <a:ln/>
+        </p:spPr>
+        <p:txBody>
+          <a:bodyPr wrap="square" lIns="0" tIns="0" rIns="0" bIns="0" rtlCol="0" anchor="ctr"/>
+          <a:lstStyle/>
+          <a:p>
+            <a:pPr indent="0" marL="0">
+              <a:buNone/>
+            </a:pPr>
+            <a:r>
+              <a:rPr lang="en-US" sz="1000" dirty="0">
+                <a:solidFill>
+                  <a:srgbClr val="1F2A24"/>
+                </a:solidFill>
+                <a:latin typeface="맑은 고딕" pitchFamily="34" charset="0"/>
+                <a:ea typeface="맑은 고딕" pitchFamily="34" charset="-122"/>
+                <a:cs typeface="맑은 고딕" pitchFamily="34" charset="-120"/>
+              </a:rPr>
+              <a:t>https://barosit.com/#/account</a:t>
+            </a:r>
+            <a:endParaRPr lang="en-US" sz="1000" dirty="0"/>
+          </a:p>
+        </p:txBody>
+      </p:sp>
+      <p:sp>
+        <p:nvSpPr>
+          <p:cNvPr id="10" name="Text 8"/>
+          <p:cNvSpPr/>
+          <p:nvPr/>
+        </p:nvSpPr>
+        <p:spPr>
+          <a:xfrm>
+            <a:off x="5760720" y="1673352"/>
+            <a:ext cx="2926080" cy="219456"/>
+          </a:xfrm>
+          <a:prstGeom prst="rect">
+            <a:avLst/>
+          </a:prstGeom>
+          <a:noFill/>
+          <a:ln/>
+        </p:spPr>
+        <p:txBody>
+          <a:bodyPr wrap="square" lIns="0" tIns="0" rIns="0" bIns="0" rtlCol="0" anchor="ctr"/>
+          <a:lstStyle/>
+          <a:p>
+            <a:pPr indent="0" marL="0">
+              <a:buNone/>
+            </a:pPr>
+            <a:r>
+              <a:rPr lang="en-US" sz="1000" b="1" dirty="0">
+                <a:solidFill>
+                  <a:srgbClr val="2F6B4F"/>
+                </a:solidFill>
+                <a:latin typeface="맑은 고딕" pitchFamily="34" charset="0"/>
+                <a:ea typeface="맑은 고딕" pitchFamily="34" charset="-122"/>
+                <a:cs typeface="맑은 고딕" pitchFamily="34" charset="-120"/>
+              </a:rPr>
+              <a:t>화면 설명</a:t>
+            </a:r>
+            <a:endParaRPr lang="en-US" sz="1000" dirty="0"/>
+          </a:p>
+        </p:txBody>
+      </p:sp>
+      <p:sp>
+        <p:nvSpPr>
+          <p:cNvPr id="11" name="Text 9"/>
+          <p:cNvSpPr/>
+          <p:nvPr/>
+        </p:nvSpPr>
+        <p:spPr>
+          <a:xfrm>
+            <a:off x="5760720" y="1929384"/>
+            <a:ext cx="2926080" cy="2377440"/>
+          </a:xfrm>
+          <a:prstGeom prst="rect">
+            <a:avLst/>
+          </a:prstGeom>
+          <a:noFill/>
+          <a:ln/>
+        </p:spPr>
+        <p:txBody>
+          <a:bodyPr wrap="square" lIns="0" tIns="0" rIns="0" bIns="0" rtlCol="0" anchor="t"/>
+          <a:lstStyle/>
+          <a:p>
+            <a:pPr marL="342900" indent="-342900">
+              <a:lnSpc>
+                <a:spcPct val="125000"/>
+              </a:lnSpc>
+              <a:spcAft>
+                <a:spcPts val="600"/>
+              </a:spcAft>
+              <a:buSzPct val="100000"/>
+              <a:buChar char="•"/>
+            </a:pPr>
+            <a:r>
+              <a:rPr lang="en-US" sz="1000" dirty="0">
+                <a:solidFill>
+                  <a:srgbClr val="1F2A24"/>
+                </a:solidFill>
+                <a:latin typeface="맑은 고딕" pitchFamily="34" charset="0"/>
+                <a:ea typeface="맑은 고딕" pitchFamily="34" charset="-122"/>
+                <a:cs typeface="맑은 고딕" pitchFamily="34" charset="-120"/>
+              </a:rPr>
+              <a:t>현재 구독 상품, 결제 주기, 다음 결제 예정일 확인</a:t>
+            </a:r>
+            <a:endParaRPr lang="en-US" sz="1000" dirty="0"/>
+          </a:p>
+          <a:p>
+            <a:pPr marL="342900" indent="-342900">
+              <a:lnSpc>
+                <a:spcPct val="125000"/>
+              </a:lnSpc>
+              <a:spcAft>
+                <a:spcPts val="600"/>
+              </a:spcAft>
+              <a:buSzPct val="100000"/>
+              <a:buChar char="•"/>
+            </a:pPr>
+            <a:r>
+              <a:rPr lang="en-US" sz="1000" dirty="0">
+                <a:solidFill>
+                  <a:srgbClr val="1F2A24"/>
+                </a:solidFill>
+                <a:latin typeface="맑은 고딕" pitchFamily="34" charset="0"/>
+                <a:ea typeface="맑은 고딕" pitchFamily="34" charset="-122"/>
+                <a:cs typeface="맑은 고딕" pitchFamily="34" charset="-120"/>
+              </a:rPr>
+              <a:t>[플랜 취소]로 자동결제 해지 신청</a:t>
+            </a:r>
+            <a:endParaRPr lang="en-US" sz="1000" dirty="0"/>
+          </a:p>
+          <a:p>
+            <a:pPr marL="342900" indent="-342900">
+              <a:lnSpc>
+                <a:spcPct val="125000"/>
+              </a:lnSpc>
+              <a:spcAft>
+                <a:spcPts val="600"/>
+              </a:spcAft>
+              <a:buSzPct val="100000"/>
+              <a:buChar char="•"/>
+            </a:pPr>
+            <a:r>
+              <a:rPr lang="en-US" sz="1000" dirty="0">
+                <a:solidFill>
+                  <a:srgbClr val="1F2A24"/>
+                </a:solidFill>
+                <a:latin typeface="맑은 고딕" pitchFamily="34" charset="0"/>
+                <a:ea typeface="맑은 고딕" pitchFamily="34" charset="-122"/>
+                <a:cs typeface="맑은 고딕" pitchFamily="34" charset="-120"/>
+              </a:rPr>
+              <a:t>해지 시 결제된 주기 만료까지 이용 후 FREE 전환</a:t>
+            </a:r>
+            <a:endParaRPr lang="en-US" sz="1000" dirty="0"/>
+          </a:p>
+          <a:p>
+            <a:pPr marL="342900" indent="-342900">
+              <a:lnSpc>
+                <a:spcPct val="125000"/>
+              </a:lnSpc>
+              <a:spcAft>
+                <a:spcPts val="600"/>
+              </a:spcAft>
+              <a:buSzPct val="100000"/>
+              <a:buChar char="•"/>
+            </a:pPr>
+            <a:r>
+              <a:rPr lang="en-US" sz="1000" dirty="0">
+                <a:solidFill>
+                  <a:srgbClr val="1F2A24"/>
+                </a:solidFill>
+                <a:latin typeface="맑은 고딕" pitchFamily="34" charset="0"/>
+                <a:ea typeface="맑은 고딕" pitchFamily="34" charset="-122"/>
+                <a:cs typeface="맑은 고딕" pitchFamily="34" charset="-120"/>
+              </a:rPr>
+              <a:t>환불 요건 충족 시 [환불 신청] 노출 · 그 외 support@barosit.com 접수</a:t>
+            </a:r>
+            <a:endParaRPr lang="en-US" sz="1000" dirty="0"/>
+          </a:p>
+        </p:txBody>
+      </p:sp>
+      <p:sp>
+        <p:nvSpPr>
+          <p:cNvPr id="12" name="Text 10"/>
+          <p:cNvSpPr/>
+          <p:nvPr/>
+        </p:nvSpPr>
+        <p:spPr>
+          <a:xfrm>
+            <a:off x="457200" y="4709160"/>
+            <a:ext cx="6400800" cy="256032"/>
+          </a:xfrm>
+          <a:prstGeom prst="rect">
+            <a:avLst/>
+          </a:prstGeom>
+          <a:noFill/>
+          <a:ln/>
+        </p:spPr>
+        <p:txBody>
+          <a:bodyPr wrap="square" lIns="0" tIns="0" rIns="0" bIns="0" rtlCol="0" anchor="ctr"/>
+          <a:lstStyle/>
+          <a:p>
+            <a:pPr algn="l" indent="0" marL="0">
+              <a:buNone/>
+            </a:pPr>
+            <a:r>
+              <a:rPr lang="en-US" sz="800" dirty="0">
+                <a:solidFill>
+                  <a:srgbClr val="6B7A72"/>
+                </a:solidFill>
+                <a:latin typeface="맑은 고딕" pitchFamily="34" charset="0"/>
+                <a:ea typeface="맑은 고딕" pitchFamily="34" charset="-122"/>
+                <a:cs typeface="맑은 고딕" pitchFamily="34" charset="-120"/>
+              </a:rPr>
+              <a:t>주식회사 구비드 · 바로씻(BaroSit) · MID bill_barosi69c</a:t>
+            </a:r>
+            <a:endParaRPr lang="en-US" sz="800" dirty="0"/>
+          </a:p>
+        </p:txBody>
+      </p:sp>
+      <p:sp>
+        <p:nvSpPr>
+          <p:cNvPr id="13" name="Text 11"/>
+          <p:cNvSpPr/>
+          <p:nvPr/>
+        </p:nvSpPr>
+        <p:spPr>
+          <a:xfrm>
+            <a:off x="8138160" y="4709160"/>
+            <a:ext cx="548640" cy="256032"/>
+          </a:xfrm>
+          <a:prstGeom prst="rect">
+            <a:avLst/>
+          </a:prstGeom>
+          <a:noFill/>
+          <a:ln/>
+        </p:spPr>
+        <p:txBody>
+          <a:bodyPr wrap="square" lIns="0" tIns="0" rIns="0" bIns="0" rtlCol="0" anchor="ctr"/>
+          <a:lstStyle/>
+          <a:p>
+            <a:pPr algn="r" indent="0" marL="0">
+              <a:buNone/>
+            </a:pPr>
+            <a:r>
+              <a:rPr lang="en-US" sz="800" dirty="0">
+                <a:solidFill>
+                  <a:srgbClr val="6B7A72"/>
+                </a:solidFill>
+                <a:latin typeface="맑은 고딕" pitchFamily="34" charset="0"/>
+                <a:ea typeface="맑은 고딕" pitchFamily="34" charset="-122"/>
+                <a:cs typeface="맑은 고딕" pitchFamily="34" charset="-120"/>
+              </a:rPr>
+              <a:t>12</a:t>
+            </a:r>
+            <a:endParaRPr lang="en-US" sz="800" dirty="0"/>
+          </a:p>
+        </p:txBody>
+      </p:sp>
+      <p:pic>
+        <p:nvPicPr>
+          <p:cNvPr id="14" name="Picture 13" descr="step7-account.png"/>
+          <p:cNvPicPr>
+            <a:picLocks noChangeAspect="1"/>
+          </p:cNvPicPr>
+          <p:nvPr/>
+        </p:nvPicPr>
+        <p:blipFill>
+          <a:blip r:embed="rId3"/>
+          <a:stretch>
+            <a:fillRect/>
+          </a:stretch>
+        </p:blipFill>
+        <p:spPr>
+          <a:xfrm>
+            <a:off x="530352" y="1288447"/>
+            <a:ext cx="4928616" cy="2772346"/>
+          </a:xfrm>
+          <a:prstGeom prst="rect">
+            <a:avLst/>
+          </a:prstGeom>
+        </p:spPr>
+      </p:pic>
+    </p:spTree>
+  </p:cSld>
+  <p:clrMapOvr>
+    <a:masterClrMapping/>
+  </p:clrMapOvr>
+</p:sld>
+</file>
+
+<file path=ppt/slides/slide2.xml><?xml version="1.0" encoding="utf-8"?>
+<p:sld xmlns:a="http://schemas.openxmlformats.org/drawingml/2006/main" xmlns:r="http://schemas.openxmlformats.org/officeDocument/2006/relationships" xmlns:p="http://schemas.openxmlformats.org/presentationml/2006/main">
+  <p:cSld name="Slide 11">
+    <p:bg>
+      <p:bgPr>
+        <a:solidFill>
+          <a:srgbClr val="FFFFFF"/>
+        </a:solidFill>
+      </p:bgPr>
+    </p:bg>
+    <p:spTree>
+      <p:nvGrpSpPr>
+        <p:cNvPr id="1" name=""/>
+        <p:cNvGrpSpPr/>
+        <p:nvPr/>
+      </p:nvGrpSpPr>
+      <p:grpSpPr>
+        <a:xfrm>
+          <a:off x="0" y="0"/>
+          <a:ext cx="0" cy="0"/>
+          <a:chOff x="0" y="0"/>
+          <a:chExt cx="0" cy="0"/>
+        </a:xfrm>
+      </p:grpSpPr>
+      <p:sp>
+        <p:nvSpPr>
+          <p:cNvPr id="2" name="Text 0"/>
+          <p:cNvSpPr/>
+          <p:nvPr/>
+        </p:nvSpPr>
+        <p:spPr>
+          <a:xfrm>
+            <a:off x="457200" y="292608"/>
+            <a:ext cx="8229600" cy="384048"/>
+          </a:xfrm>
+          <a:prstGeom prst="rect">
+            <a:avLst/>
+          </a:prstGeom>
+          <a:noFill/>
+          <a:ln/>
+        </p:spPr>
+        <p:txBody>
+          <a:bodyPr wrap="square" lIns="0" tIns="0" rIns="0" bIns="0" rtlCol="0" anchor="ctr"/>
+          <a:lstStyle/>
+          <a:p>
+            <a:pPr algn="l" indent="0" marL="0">
+              <a:buNone/>
+            </a:pPr>
+            <a:r>
+              <a:rPr lang="en-US" sz="2000" b="1" dirty="0">
+                <a:solidFill>
+                  <a:srgbClr val="1F2A24"/>
+                </a:solidFill>
+                <a:latin typeface="맑은 고딕" pitchFamily="34" charset="0"/>
+                <a:ea typeface="맑은 고딕" pitchFamily="34" charset="-122"/>
+                <a:cs typeface="맑은 고딕" pitchFamily="34" charset="-120"/>
+              </a:rPr>
+              <a:t>사업자정보 (홈페이지 하단 상시 표기)</a:t>
+            </a:r>
+            <a:endParaRPr lang="en-US" sz="2000" dirty="0"/>
+          </a:p>
+        </p:txBody>
+      </p:sp>
+      <p:graphicFrame>
+        <p:nvGraphicFramePr>
+          <p:cNvPr id="12" name="Table 0"/>
+          <p:cNvGraphicFramePr>
+            <a:graphicFrameLocks noGrp="1"/>
+          </p:cNvGraphicFramePr>
+          <p:nvPr>
+            <p:extLst>
+              <p:ext uri="{D42A27DB-BD31-4B8C-83A1-F6EECF244321}">
+                <p14:modId xmlns:p14="http://schemas.microsoft.com/office/powerpoint/2010/main" val="1579011935"/>
+              </p:ext>
+            </p:extLst>
+          </p:nvPr>
+        </p:nvGraphicFramePr>
+        <p:xfrm>
+          <a:off x="457200" y="914400"/>
+          <a:ext cx="8229600" cy="914400"/>
+        </p:xfrm>
+        <a:graphic>
+          <a:graphicData uri="http://schemas.openxmlformats.org/drawingml/2006/table">
+            <a:tbl>
+              <a:tblPr/>
+              <a:tblGrid>
+                <a:gridCol w="2377440"/>
+                <a:gridCol w="5852160"/>
+              </a:tblGrid>
+              <a:tr h="347472">
+                <a:tc>
+                  <a:txBody>
+                    <a:bodyPr/>
+                    <a:lstStyle/>
+                    <a:p>
+                      <a:pPr algn="l" indent="0" marL="0">
+                        <a:buNone/>
+                      </a:pPr>
+                      <a:r>
+                        <a:rPr lang="en-US" sz="1100" b="1" dirty="0">
+                          <a:solidFill>
+                            <a:srgbClr val="1F2A24"/>
+                          </a:solidFill>
+                          <a:latin typeface="맑은 고딕" pitchFamily="34" charset="0"/>
+                          <a:ea typeface="맑은 고딕" pitchFamily="34" charset="-122"/>
+                          <a:cs typeface="맑은 고딕" pitchFamily="34" charset="-120"/>
+                        </a:rPr>
+                        <a:t>상호명</a:t>
+                      </a:r>
+                      <a:endParaRPr lang="en-US" sz="1100" dirty="0">
+                        <a:latin typeface="맑은 고딕" charset="0"/>
+                        <a:ea typeface="맑은 고딕" charset="0"/>
+                        <a:cs typeface="맑은 고딕" charset="0"/>
+                      </a:endParaRPr>
+                    </a:p>
+                  </a:txBody>
+                  <a:tcPr marL="91440" marR="91440" marT="91440" marB="91440" anchor="ctr">
+                    <a:lnL w="12700" cap="flat" cmpd="sng" algn="ctr">
+                      <a:solidFill>
+                        <a:srgbClr val="D8E0DA"/>
+                      </a:solidFill>
+                      <a:prstDash val="solid"/>
+                      <a:round/>
+                      <a:headEnd type="none" w="med" len="med"/>
+                      <a:tailEnd type="none" w="med" len="med"/>
+                    </a:lnL>
+                    <a:lnR w="12700" cap="flat" cmpd="sng" algn="ctr">
+                      <a:solidFill>
+                        <a:srgbClr val="D8E0DA"/>
+                      </a:solidFill>
+                      <a:prstDash val="solid"/>
+                      <a:round/>
+                      <a:headEnd type="none" w="med" len="med"/>
+                      <a:tailEnd type="none" w="med" len="med"/>
+                    </a:lnR>
+                    <a:lnT w="12700" cap="flat" cmpd="sng" algn="ctr">
+                      <a:solidFill>
+                        <a:srgbClr val="D8E0DA"/>
+                      </a:solidFill>
+                      <a:prstDash val="solid"/>
+                      <a:round/>
+                      <a:headEnd type="none" w="med" len="med"/>
+                      <a:tailEnd type="none" w="med" len="med"/>
+                    </a:lnT>
+                    <a:lnB w="12700" cap="flat" cmpd="sng" algn="ctr">
+                      <a:solidFill>
+                        <a:srgbClr val="D8E0DA"/>
+                      </a:solidFill>
+                      <a:prstDash val="solid"/>
+                      <a:round/>
+                      <a:headEnd type="none" w="med" len="med"/>
+                      <a:tailEnd type="none" w="med" len="med"/>
+                    </a:lnB>
+                    <a:solidFill>
+                      <a:srgbClr val="F1F5F2"/>
+                    </a:solidFill>
+                  </a:tcPr>
+                </a:tc>
+                <a:tc>
+                  <a:txBody>
+                    <a:bodyPr/>
+                    <a:lstStyle/>
+                    <a:p>
+                      <a:pPr algn="l" indent="0" marL="0">
+                        <a:buNone/>
+                      </a:pPr>
+                      <a:r>
+                        <a:rPr lang="en-US" sz="1100" dirty="0">
+                          <a:solidFill>
+                            <a:srgbClr val="1F2A24"/>
+                          </a:solidFill>
+                          <a:latin typeface="맑은 고딕" pitchFamily="34" charset="0"/>
+                          <a:ea typeface="맑은 고딕" pitchFamily="34" charset="-122"/>
+                          <a:cs typeface="맑은 고딕" pitchFamily="34" charset="-120"/>
+                        </a:rPr>
+                        <a:t>주식회사 구비드</a:t>
+                      </a:r>
+                      <a:endParaRPr lang="en-US" sz="1100" dirty="0">
+                        <a:latin typeface="맑은 고딕" charset="0"/>
+                        <a:ea typeface="맑은 고딕" charset="0"/>
+                        <a:cs typeface="맑은 고딕" charset="0"/>
+                      </a:endParaRPr>
+                    </a:p>
+                  </a:txBody>
+                  <a:tcPr marL="91440" marR="91440" marT="91440" marB="91440" anchor="ctr">
+                    <a:lnL w="12700" cap="flat" cmpd="sng" algn="ctr">
+                      <a:solidFill>
+                        <a:srgbClr val="D8E0DA"/>
+                      </a:solidFill>
+                      <a:prstDash val="solid"/>
+                      <a:round/>
+                      <a:headEnd type="none" w="med" len="med"/>
+                      <a:tailEnd type="none" w="med" len="med"/>
+                    </a:lnL>
+                    <a:lnR w="12700" cap="flat" cmpd="sng" algn="ctr">
+                      <a:solidFill>
+                        <a:srgbClr val="D8E0DA"/>
+                      </a:solidFill>
+                      <a:prstDash val="solid"/>
+                      <a:round/>
+                      <a:headEnd type="none" w="med" len="med"/>
+                      <a:tailEnd type="none" w="med" len="med"/>
+                    </a:lnR>
+                    <a:lnT w="12700" cap="flat" cmpd="sng" algn="ctr">
+                      <a:solidFill>
+                        <a:srgbClr val="D8E0DA"/>
+                      </a:solidFill>
+                      <a:prstDash val="solid"/>
+                      <a:round/>
+                      <a:headEnd type="none" w="med" len="med"/>
+                      <a:tailEnd type="none" w="med" len="med"/>
+                    </a:lnT>
+                    <a:lnB w="12700" cap="flat" cmpd="sng" algn="ctr">
+                      <a:solidFill>
+                        <a:srgbClr val="D8E0DA"/>
+                      </a:solidFill>
+                      <a:prstDash val="solid"/>
+                      <a:round/>
+                      <a:headEnd type="none" w="med" len="med"/>
+                      <a:tailEnd type="none" w="med" len="med"/>
+                    </a:lnB>
+                  </a:tcPr>
+                </a:tc>
+              </a:tr>
+              <a:tr h="347472">
+                <a:tc>
+                  <a:txBody>
+                    <a:bodyPr/>
+                    <a:lstStyle/>
+                    <a:p>
+                      <a:pPr algn="l" indent="0" marL="0">
+                        <a:buNone/>
+                      </a:pPr>
+                      <a:r>
+                        <a:rPr lang="en-US" sz="1100" b="1" dirty="0">
+                          <a:solidFill>
+                            <a:srgbClr val="1F2A24"/>
+                          </a:solidFill>
+                          <a:latin typeface="맑은 고딕" pitchFamily="34" charset="0"/>
+                          <a:ea typeface="맑은 고딕" pitchFamily="34" charset="-122"/>
+                          <a:cs typeface="맑은 고딕" pitchFamily="34" charset="-120"/>
+                        </a:rPr>
+                        <a:t>대표자명</a:t>
+                      </a:r>
+                      <a:endParaRPr lang="en-US" sz="1100" dirty="0">
+                        <a:latin typeface="맑은 고딕" charset="0"/>
+                        <a:ea typeface="맑은 고딕" charset="0"/>
+                        <a:cs typeface="맑은 고딕" charset="0"/>
+                      </a:endParaRPr>
+                    </a:p>
+                  </a:txBody>
+                  <a:tcPr marL="91440" marR="91440" marT="91440" marB="91440" anchor="ctr">
+                    <a:lnL w="12700" cap="flat" cmpd="sng" algn="ctr">
+                      <a:solidFill>
+                        <a:srgbClr val="D8E0DA"/>
+                      </a:solidFill>
+                      <a:prstDash val="solid"/>
+                      <a:round/>
+                      <a:headEnd type="none" w="med" len="med"/>
+                      <a:tailEnd type="none" w="med" len="med"/>
+                    </a:lnL>
+                    <a:lnR w="12700" cap="flat" cmpd="sng" algn="ctr">
+                      <a:solidFill>
+                        <a:srgbClr val="D8E0DA"/>
+                      </a:solidFill>
+                      <a:prstDash val="solid"/>
+                      <a:round/>
+                      <a:headEnd type="none" w="med" len="med"/>
+                      <a:tailEnd type="none" w="med" len="med"/>
+                    </a:lnR>
+                    <a:lnT w="12700" cap="flat" cmpd="sng" algn="ctr">
+                      <a:solidFill>
+                        <a:srgbClr val="D8E0DA"/>
+                      </a:solidFill>
+                      <a:prstDash val="solid"/>
+                      <a:round/>
+                      <a:headEnd type="none" w="med" len="med"/>
+                      <a:tailEnd type="none" w="med" len="med"/>
+                    </a:lnT>
+                    <a:lnB w="12700" cap="flat" cmpd="sng" algn="ctr">
+                      <a:solidFill>
+                        <a:srgbClr val="D8E0DA"/>
+                      </a:solidFill>
+                      <a:prstDash val="solid"/>
+                      <a:round/>
+                      <a:headEnd type="none" w="med" len="med"/>
+                      <a:tailEnd type="none" w="med" len="med"/>
+                    </a:lnB>
+                    <a:solidFill>
+                      <a:srgbClr val="F1F5F2"/>
+                    </a:solidFill>
+                  </a:tcPr>
+                </a:tc>
+                <a:tc>
+                  <a:txBody>
+                    <a:bodyPr/>
+                    <a:lstStyle/>
+                    <a:p>
+                      <a:pPr algn="l" indent="0" marL="0">
+                        <a:buNone/>
+                      </a:pPr>
+                      <a:r>
+                        <a:rPr lang="en-US" sz="1100" dirty="0">
+                          <a:solidFill>
+                            <a:srgbClr val="1F2A24"/>
+                          </a:solidFill>
+                          <a:latin typeface="맑은 고딕" pitchFamily="34" charset="0"/>
+                          <a:ea typeface="맑은 고딕" pitchFamily="34" charset="-122"/>
+                          <a:cs typeface="맑은 고딕" pitchFamily="34" charset="-120"/>
+                        </a:rPr>
+                        <a:t>이종현</a:t>
+                      </a:r>
+                      <a:endParaRPr lang="en-US" sz="1100" dirty="0">
+                        <a:latin typeface="맑은 고딕" charset="0"/>
+                        <a:ea typeface="맑은 고딕" charset="0"/>
+                        <a:cs typeface="맑은 고딕" charset="0"/>
+                      </a:endParaRPr>
+                    </a:p>
+                  </a:txBody>
+                  <a:tcPr marL="91440" marR="91440" marT="91440" marB="91440" anchor="ctr">
+                    <a:lnL w="12700" cap="flat" cmpd="sng" algn="ctr">
+                      <a:solidFill>
+                        <a:srgbClr val="D8E0DA"/>
+                      </a:solidFill>
+                      <a:prstDash val="solid"/>
+                      <a:round/>
+                      <a:headEnd type="none" w="med" len="med"/>
+                      <a:tailEnd type="none" w="med" len="med"/>
+                    </a:lnL>
+                    <a:lnR w="12700" cap="flat" cmpd="sng" algn="ctr">
+                      <a:solidFill>
+                        <a:srgbClr val="D8E0DA"/>
+                      </a:solidFill>
+                      <a:prstDash val="solid"/>
+                      <a:round/>
+                      <a:headEnd type="none" w="med" len="med"/>
+                      <a:tailEnd type="none" w="med" len="med"/>
+                    </a:lnR>
+                    <a:lnT w="12700" cap="flat" cmpd="sng" algn="ctr">
+                      <a:solidFill>
+                        <a:srgbClr val="D8E0DA"/>
+                      </a:solidFill>
+                      <a:prstDash val="solid"/>
+                      <a:round/>
+                      <a:headEnd type="none" w="med" len="med"/>
+                      <a:tailEnd type="none" w="med" len="med"/>
+                    </a:lnT>
+                    <a:lnB w="12700" cap="flat" cmpd="sng" algn="ctr">
+                      <a:solidFill>
+                        <a:srgbClr val="D8E0DA"/>
+                      </a:solidFill>
+                      <a:prstDash val="solid"/>
+                      <a:round/>
+                      <a:headEnd type="none" w="med" len="med"/>
+                      <a:tailEnd type="none" w="med" len="med"/>
+                    </a:lnB>
+                  </a:tcPr>
+                </a:tc>
+              </a:tr>
+              <a:tr h="347472">
+                <a:tc>
+                  <a:txBody>
+                    <a:bodyPr/>
+                    <a:lstStyle/>
+                    <a:p>
+                      <a:pPr algn="l" indent="0" marL="0">
+                        <a:buNone/>
+                      </a:pPr>
+                      <a:r>
+                        <a:rPr lang="en-US" sz="1100" b="1" dirty="0">
+                          <a:solidFill>
+                            <a:srgbClr val="1F2A24"/>
+                          </a:solidFill>
+                          <a:latin typeface="맑은 고딕" pitchFamily="34" charset="0"/>
+                          <a:ea typeface="맑은 고딕" pitchFamily="34" charset="-122"/>
+                          <a:cs typeface="맑은 고딕" pitchFamily="34" charset="-120"/>
+                        </a:rPr>
+                        <a:t>사업자등록번호</a:t>
+                      </a:r>
+                      <a:endParaRPr lang="en-US" sz="1100" dirty="0">
+                        <a:latin typeface="맑은 고딕" charset="0"/>
+                        <a:ea typeface="맑은 고딕" charset="0"/>
+                        <a:cs typeface="맑은 고딕" charset="0"/>
+                      </a:endParaRPr>
+                    </a:p>
+                  </a:txBody>
+                  <a:tcPr marL="91440" marR="91440" marT="91440" marB="91440" anchor="ctr">
+                    <a:lnL w="12700" cap="flat" cmpd="sng" algn="ctr">
+                      <a:solidFill>
+                        <a:srgbClr val="D8E0DA"/>
+                      </a:solidFill>
+                      <a:prstDash val="solid"/>
+                      <a:round/>
+                      <a:headEnd type="none" w="med" len="med"/>
+                      <a:tailEnd type="none" w="med" len="med"/>
+                    </a:lnL>
+                    <a:lnR w="12700" cap="flat" cmpd="sng" algn="ctr">
+                      <a:solidFill>
+                        <a:srgbClr val="D8E0DA"/>
+                      </a:solidFill>
+                      <a:prstDash val="solid"/>
+                      <a:round/>
+                      <a:headEnd type="none" w="med" len="med"/>
+                      <a:tailEnd type="none" w="med" len="med"/>
+                    </a:lnR>
+                    <a:lnT w="12700" cap="flat" cmpd="sng" algn="ctr">
+                      <a:solidFill>
+                        <a:srgbClr val="D8E0DA"/>
+                      </a:solidFill>
+                      <a:prstDash val="solid"/>
+                      <a:round/>
+                      <a:headEnd type="none" w="med" len="med"/>
+                      <a:tailEnd type="none" w="med" len="med"/>
+                    </a:lnT>
+                    <a:lnB w="12700" cap="flat" cmpd="sng" algn="ctr">
+                      <a:solidFill>
+                        <a:srgbClr val="D8E0DA"/>
+                      </a:solidFill>
+                      <a:prstDash val="solid"/>
+                      <a:round/>
+                      <a:headEnd type="none" w="med" len="med"/>
+                      <a:tailEnd type="none" w="med" len="med"/>
+                    </a:lnB>
+                    <a:solidFill>
+                      <a:srgbClr val="F1F5F2"/>
+                    </a:solidFill>
+                  </a:tcPr>
+                </a:tc>
+                <a:tc>
+                  <a:txBody>
+                    <a:bodyPr/>
+                    <a:lstStyle/>
+                    <a:p>
+                      <a:pPr algn="l" indent="0" marL="0">
+                        <a:buNone/>
+                      </a:pPr>
+                      <a:r>
+                        <a:rPr lang="en-US" sz="1100" dirty="0">
+                          <a:solidFill>
+                            <a:srgbClr val="1F2A24"/>
+                          </a:solidFill>
+                          <a:latin typeface="맑은 고딕" pitchFamily="34" charset="0"/>
+                          <a:ea typeface="맑은 고딕" pitchFamily="34" charset="-122"/>
+                          <a:cs typeface="맑은 고딕" pitchFamily="34" charset="-120"/>
+                        </a:rPr>
+                        <a:t>512-88-00059</a:t>
+                      </a:r>
+                      <a:endParaRPr lang="en-US" sz="1100" dirty="0">
+                        <a:latin typeface="맑은 고딕" charset="0"/>
+                        <a:ea typeface="맑은 고딕" charset="0"/>
+                        <a:cs typeface="맑은 고딕" charset="0"/>
+                      </a:endParaRPr>
+                    </a:p>
+                  </a:txBody>
+                  <a:tcPr marL="91440" marR="91440" marT="91440" marB="91440" anchor="ctr">
+                    <a:lnL w="12700" cap="flat" cmpd="sng" algn="ctr">
+                      <a:solidFill>
+                        <a:srgbClr val="D8E0DA"/>
+                      </a:solidFill>
+                      <a:prstDash val="solid"/>
+                      <a:round/>
+                      <a:headEnd type="none" w="med" len="med"/>
+                      <a:tailEnd type="none" w="med" len="med"/>
+                    </a:lnL>
+                    <a:lnR w="12700" cap="flat" cmpd="sng" algn="ctr">
+                      <a:solidFill>
+                        <a:srgbClr val="D8E0DA"/>
+                      </a:solidFill>
+                      <a:prstDash val="solid"/>
+                      <a:round/>
+                      <a:headEnd type="none" w="med" len="med"/>
+                      <a:tailEnd type="none" w="med" len="med"/>
+                    </a:lnR>
+                    <a:lnT w="12700" cap="flat" cmpd="sng" algn="ctr">
+                      <a:solidFill>
+                        <a:srgbClr val="D8E0DA"/>
+                      </a:solidFill>
+                      <a:prstDash val="solid"/>
+                      <a:round/>
+                      <a:headEnd type="none" w="med" len="med"/>
+                      <a:tailEnd type="none" w="med" len="med"/>
+                    </a:lnT>
+                    <a:lnB w="12700" cap="flat" cmpd="sng" algn="ctr">
+                      <a:solidFill>
+                        <a:srgbClr val="D8E0DA"/>
+                      </a:solidFill>
+                      <a:prstDash val="solid"/>
+                      <a:round/>
+                      <a:headEnd type="none" w="med" len="med"/>
+                      <a:tailEnd type="none" w="med" len="med"/>
+                    </a:lnB>
+                  </a:tcPr>
+                </a:tc>
+              </a:tr>
+              <a:tr h="347472">
+                <a:tc>
+                  <a:txBody>
+                    <a:bodyPr/>
+                    <a:lstStyle/>
+                    <a:p>
+                      <a:pPr algn="l" indent="0" marL="0">
+                        <a:buNone/>
+                      </a:pPr>
+                      <a:r>
+                        <a:rPr lang="en-US" sz="1100" b="1" dirty="0">
+                          <a:solidFill>
+                            <a:srgbClr val="1F2A24"/>
+                          </a:solidFill>
+                          <a:latin typeface="맑은 고딕" pitchFamily="34" charset="0"/>
+                          <a:ea typeface="맑은 고딕" pitchFamily="34" charset="-122"/>
+                          <a:cs typeface="맑은 고딕" pitchFamily="34" charset="-120"/>
+                        </a:rPr>
+                        <a:t>사업장 주소</a:t>
+                      </a:r>
+                      <a:endParaRPr lang="en-US" sz="1100" dirty="0">
+                        <a:latin typeface="맑은 고딕" charset="0"/>
+                        <a:ea typeface="맑은 고딕" charset="0"/>
+                        <a:cs typeface="맑은 고딕" charset="0"/>
+                      </a:endParaRPr>
+                    </a:p>
+                  </a:txBody>
+                  <a:tcPr marL="91440" marR="91440" marT="91440" marB="91440" anchor="ctr">
+                    <a:lnL w="12700" cap="flat" cmpd="sng" algn="ctr">
+                      <a:solidFill>
+                        <a:srgbClr val="D8E0DA"/>
+                      </a:solidFill>
+                      <a:prstDash val="solid"/>
+                      <a:round/>
+                      <a:headEnd type="none" w="med" len="med"/>
+                      <a:tailEnd type="none" w="med" len="med"/>
+                    </a:lnL>
+                    <a:lnR w="12700" cap="flat" cmpd="sng" algn="ctr">
+                      <a:solidFill>
+                        <a:srgbClr val="D8E0DA"/>
+                      </a:solidFill>
+                      <a:prstDash val="solid"/>
+                      <a:round/>
+                      <a:headEnd type="none" w="med" len="med"/>
+                      <a:tailEnd type="none" w="med" len="med"/>
+                    </a:lnR>
+                    <a:lnT w="12700" cap="flat" cmpd="sng" algn="ctr">
+                      <a:solidFill>
+                        <a:srgbClr val="D8E0DA"/>
+                      </a:solidFill>
+                      <a:prstDash val="solid"/>
+                      <a:round/>
+                      <a:headEnd type="none" w="med" len="med"/>
+                      <a:tailEnd type="none" w="med" len="med"/>
+                    </a:lnT>
+                    <a:lnB w="12700" cap="flat" cmpd="sng" algn="ctr">
+                      <a:solidFill>
+                        <a:srgbClr val="D8E0DA"/>
+                      </a:solidFill>
+                      <a:prstDash val="solid"/>
+                      <a:round/>
+                      <a:headEnd type="none" w="med" len="med"/>
+                      <a:tailEnd type="none" w="med" len="med"/>
+                    </a:lnB>
+                    <a:solidFill>
+                      <a:srgbClr val="F1F5F2"/>
+                    </a:solidFill>
+                  </a:tcPr>
+                </a:tc>
+                <a:tc>
+                  <a:txBody>
+                    <a:bodyPr/>
+                    <a:lstStyle/>
+                    <a:p>
+                      <a:pPr algn="l" indent="0" marL="0">
+                        <a:buNone/>
+                      </a:pPr>
+                      <a:r>
+                        <a:rPr lang="en-US" sz="1100" dirty="0">
+                          <a:solidFill>
+                            <a:srgbClr val="1F2A24"/>
+                          </a:solidFill>
+                          <a:latin typeface="맑은 고딕" pitchFamily="34" charset="0"/>
+                          <a:ea typeface="맑은 고딕" pitchFamily="34" charset="-122"/>
+                          <a:cs typeface="맑은 고딕" pitchFamily="34" charset="-120"/>
+                        </a:rPr>
+                        <a:t>서울특별시 송파구 오금로15길 5-12, 3층 3425호 (방이동, 정환빌딩)</a:t>
+                      </a:r>
+                      <a:endParaRPr lang="en-US" sz="1100" dirty="0">
+                        <a:latin typeface="맑은 고딕" charset="0"/>
+                        <a:ea typeface="맑은 고딕" charset="0"/>
+                        <a:cs typeface="맑은 고딕" charset="0"/>
+                      </a:endParaRPr>
+                    </a:p>
+                  </a:txBody>
+                  <a:tcPr marL="91440" marR="91440" marT="91440" marB="91440" anchor="ctr">
+                    <a:lnL w="12700" cap="flat" cmpd="sng" algn="ctr">
+                      <a:solidFill>
+                        <a:srgbClr val="D8E0DA"/>
+                      </a:solidFill>
+                      <a:prstDash val="solid"/>
+                      <a:round/>
+                      <a:headEnd type="none" w="med" len="med"/>
+                      <a:tailEnd type="none" w="med" len="med"/>
+                    </a:lnL>
+                    <a:lnR w="12700" cap="flat" cmpd="sng" algn="ctr">
+                      <a:solidFill>
+                        <a:srgbClr val="D8E0DA"/>
+                      </a:solidFill>
+                      <a:prstDash val="solid"/>
+                      <a:round/>
+                      <a:headEnd type="none" w="med" len="med"/>
+                      <a:tailEnd type="none" w="med" len="med"/>
+                    </a:lnR>
+                    <a:lnT w="12700" cap="flat" cmpd="sng" algn="ctr">
+                      <a:solidFill>
+                        <a:srgbClr val="D8E0DA"/>
+                      </a:solidFill>
+                      <a:prstDash val="solid"/>
+                      <a:round/>
+                      <a:headEnd type="none" w="med" len="med"/>
+                      <a:tailEnd type="none" w="med" len="med"/>
+                    </a:lnT>
+                    <a:lnB w="12700" cap="flat" cmpd="sng" algn="ctr">
+                      <a:solidFill>
+                        <a:srgbClr val="D8E0DA"/>
+                      </a:solidFill>
+                      <a:prstDash val="solid"/>
+                      <a:round/>
+                      <a:headEnd type="none" w="med" len="med"/>
+                      <a:tailEnd type="none" w="med" len="med"/>
+                    </a:lnB>
+                  </a:tcPr>
+                </a:tc>
+              </a:tr>
+              <a:tr h="347472">
+                <a:tc>
+                  <a:txBody>
+                    <a:bodyPr/>
+                    <a:lstStyle/>
+                    <a:p>
+                      <a:pPr algn="l" indent="0" marL="0">
+                        <a:buNone/>
+                      </a:pPr>
+                      <a:r>
+                        <a:rPr lang="en-US" sz="1100" b="1" dirty="0">
+                          <a:solidFill>
+                            <a:srgbClr val="1F2A24"/>
+                          </a:solidFill>
+                          <a:latin typeface="맑은 고딕" pitchFamily="34" charset="0"/>
+                          <a:ea typeface="맑은 고딕" pitchFamily="34" charset="-122"/>
+                          <a:cs typeface="맑은 고딕" pitchFamily="34" charset="-120"/>
+                        </a:rPr>
+                        <a:t>유선번호</a:t>
+                      </a:r>
+                      <a:endParaRPr lang="en-US" sz="1100" dirty="0">
+                        <a:latin typeface="맑은 고딕" charset="0"/>
+                        <a:ea typeface="맑은 고딕" charset="0"/>
+                        <a:cs typeface="맑은 고딕" charset="0"/>
+                      </a:endParaRPr>
+                    </a:p>
+                  </a:txBody>
+                  <a:tcPr marL="91440" marR="91440" marT="91440" marB="91440" anchor="ctr">
+                    <a:lnL w="12700" cap="flat" cmpd="sng" algn="ctr">
+                      <a:solidFill>
+                        <a:srgbClr val="D8E0DA"/>
+                      </a:solidFill>
+                      <a:prstDash val="solid"/>
+                      <a:round/>
+                      <a:headEnd type="none" w="med" len="med"/>
+                      <a:tailEnd type="none" w="med" len="med"/>
+                    </a:lnL>
+                    <a:lnR w="12700" cap="flat" cmpd="sng" algn="ctr">
+                      <a:solidFill>
+                        <a:srgbClr val="D8E0DA"/>
+                      </a:solidFill>
+                      <a:prstDash val="solid"/>
+                      <a:round/>
+                      <a:headEnd type="none" w="med" len="med"/>
+                      <a:tailEnd type="none" w="med" len="med"/>
+                    </a:lnR>
+                    <a:lnT w="12700" cap="flat" cmpd="sng" algn="ctr">
+                      <a:solidFill>
+                        <a:srgbClr val="D8E0DA"/>
+                      </a:solidFill>
+                      <a:prstDash val="solid"/>
+                      <a:round/>
+                      <a:headEnd type="none" w="med" len="med"/>
+                      <a:tailEnd type="none" w="med" len="med"/>
+                    </a:lnT>
+                    <a:lnB w="12700" cap="flat" cmpd="sng" algn="ctr">
+                      <a:solidFill>
+                        <a:srgbClr val="D8E0DA"/>
+                      </a:solidFill>
+                      <a:prstDash val="solid"/>
+                      <a:round/>
+                      <a:headEnd type="none" w="med" len="med"/>
+                      <a:tailEnd type="none" w="med" len="med"/>
+                    </a:lnB>
+                    <a:solidFill>
+                      <a:srgbClr val="F1F5F2"/>
+                    </a:solidFill>
+                  </a:tcPr>
+                </a:tc>
+                <a:tc>
+                  <a:txBody>
+                    <a:bodyPr/>
+                    <a:lstStyle/>
+                    <a:p>
+                      <a:pPr algn="l" indent="0" marL="0">
+                        <a:buNone/>
+                      </a:pPr>
+                      <a:r>
+                        <a:rPr lang="en-US" sz="1100" dirty="0">
+                          <a:solidFill>
+                            <a:srgbClr val="1F2A24"/>
+                          </a:solidFill>
+                          <a:latin typeface="맑은 고딕" pitchFamily="34" charset="0"/>
+                          <a:ea typeface="맑은 고딕" pitchFamily="34" charset="-122"/>
+                          <a:cs typeface="맑은 고딕" pitchFamily="34" charset="-120"/>
+                        </a:rPr>
+                        <a:t>010-8635-0058</a:t>
+                      </a:r>
+                      <a:endParaRPr lang="en-US" sz="1100" dirty="0">
+                        <a:latin typeface="맑은 고딕" charset="0"/>
+                        <a:ea typeface="맑은 고딕" charset="0"/>
+                        <a:cs typeface="맑은 고딕" charset="0"/>
+                      </a:endParaRPr>
+                    </a:p>
+                  </a:txBody>
+                  <a:tcPr marL="91440" marR="91440" marT="91440" marB="91440" anchor="ctr">
+                    <a:lnL w="12700" cap="flat" cmpd="sng" algn="ctr">
+                      <a:solidFill>
+                        <a:srgbClr val="D8E0DA"/>
+                      </a:solidFill>
+                      <a:prstDash val="solid"/>
+                      <a:round/>
+                      <a:headEnd type="none" w="med" len="med"/>
+                      <a:tailEnd type="none" w="med" len="med"/>
+                    </a:lnL>
+                    <a:lnR w="12700" cap="flat" cmpd="sng" algn="ctr">
+                      <a:solidFill>
+                        <a:srgbClr val="D8E0DA"/>
+                      </a:solidFill>
+                      <a:prstDash val="solid"/>
+                      <a:round/>
+                      <a:headEnd type="none" w="med" len="med"/>
+                      <a:tailEnd type="none" w="med" len="med"/>
+                    </a:lnR>
+                    <a:lnT w="12700" cap="flat" cmpd="sng" algn="ctr">
+                      <a:solidFill>
+                        <a:srgbClr val="D8E0DA"/>
+                      </a:solidFill>
+                      <a:prstDash val="solid"/>
+                      <a:round/>
+                      <a:headEnd type="none" w="med" len="med"/>
+                      <a:tailEnd type="none" w="med" len="med"/>
+                    </a:lnT>
+                    <a:lnB w="12700" cap="flat" cmpd="sng" algn="ctr">
+                      <a:solidFill>
+                        <a:srgbClr val="D8E0DA"/>
+                      </a:solidFill>
+                      <a:prstDash val="solid"/>
+                      <a:round/>
+                      <a:headEnd type="none" w="med" len="med"/>
+                      <a:tailEnd type="none" w="med" len="med"/>
+                    </a:lnB>
+                  </a:tcPr>
+                </a:tc>
+              </a:tr>
+              <a:tr h="347472">
+                <a:tc>
+                  <a:txBody>
+                    <a:bodyPr/>
+                    <a:lstStyle/>
+                    <a:p>
+                      <a:pPr algn="l" indent="0" marL="0">
+                        <a:buNone/>
+                      </a:pPr>
+                      <a:r>
+                        <a:rPr lang="en-US" sz="1100" b="1" dirty="0">
+                          <a:solidFill>
+                            <a:srgbClr val="1F2A24"/>
+                          </a:solidFill>
+                          <a:latin typeface="맑은 고딕" pitchFamily="34" charset="0"/>
+                          <a:ea typeface="맑은 고딕" pitchFamily="34" charset="-122"/>
+                          <a:cs typeface="맑은 고딕" pitchFamily="34" charset="-120"/>
+                        </a:rPr>
+                        <a:t>통신판매업신고번호</a:t>
+                      </a:r>
+                      <a:endParaRPr lang="en-US" sz="1100" dirty="0">
+                        <a:latin typeface="맑은 고딕" charset="0"/>
+                        <a:ea typeface="맑은 고딕" charset="0"/>
+                        <a:cs typeface="맑은 고딕" charset="0"/>
+                      </a:endParaRPr>
+                    </a:p>
+                  </a:txBody>
+                  <a:tcPr marL="91440" marR="91440" marT="91440" marB="91440" anchor="ctr">
+                    <a:lnL w="12700" cap="flat" cmpd="sng" algn="ctr">
+                      <a:solidFill>
+                        <a:srgbClr val="D8E0DA"/>
+                      </a:solidFill>
+                      <a:prstDash val="solid"/>
+                      <a:round/>
+                      <a:headEnd type="none" w="med" len="med"/>
+                      <a:tailEnd type="none" w="med" len="med"/>
+                    </a:lnL>
+                    <a:lnR w="12700" cap="flat" cmpd="sng" algn="ctr">
+                      <a:solidFill>
+                        <a:srgbClr val="D8E0DA"/>
+                      </a:solidFill>
+                      <a:prstDash val="solid"/>
+                      <a:round/>
+                      <a:headEnd type="none" w="med" len="med"/>
+                      <a:tailEnd type="none" w="med" len="med"/>
+                    </a:lnR>
+                    <a:lnT w="12700" cap="flat" cmpd="sng" algn="ctr">
+                      <a:solidFill>
+                        <a:srgbClr val="D8E0DA"/>
+                      </a:solidFill>
+                      <a:prstDash val="solid"/>
+                      <a:round/>
+                      <a:headEnd type="none" w="med" len="med"/>
+                      <a:tailEnd type="none" w="med" len="med"/>
+                    </a:lnT>
+                    <a:lnB w="12700" cap="flat" cmpd="sng" algn="ctr">
+                      <a:solidFill>
+                        <a:srgbClr val="D8E0DA"/>
+                      </a:solidFill>
+                      <a:prstDash val="solid"/>
+                      <a:round/>
+                      <a:headEnd type="none" w="med" len="med"/>
+                      <a:tailEnd type="none" w="med" len="med"/>
+                    </a:lnB>
+                    <a:solidFill>
+                      <a:srgbClr val="F1F5F2"/>
+                    </a:solidFill>
+                  </a:tcPr>
+                </a:tc>
+                <a:tc>
+                  <a:txBody>
+                    <a:bodyPr/>
+                    <a:lstStyle/>
+                    <a:p>
+                      <a:pPr algn="l" indent="0" marL="0">
+                        <a:buNone/>
+                      </a:pPr>
+                      <a:r>
+                        <a:rPr lang="en-US" sz="1100" dirty="0">
+                          <a:solidFill>
+                            <a:srgbClr val="1F2A24"/>
+                          </a:solidFill>
+                          <a:latin typeface="맑은 고딕" pitchFamily="34" charset="0"/>
+                          <a:ea typeface="맑은 고딕" pitchFamily="34" charset="-122"/>
+                          <a:cs typeface="맑은 고딕" pitchFamily="34" charset="-120"/>
+                        </a:rPr>
+                        <a:t>제 2025-서울송파-2552 호</a:t>
+                      </a:r>
+                      <a:endParaRPr lang="en-US" sz="1100" dirty="0">
+                        <a:latin typeface="맑은 고딕" charset="0"/>
+                        <a:ea typeface="맑은 고딕" charset="0"/>
+                        <a:cs typeface="맑은 고딕" charset="0"/>
+                      </a:endParaRPr>
+                    </a:p>
+                  </a:txBody>
+                  <a:tcPr marL="91440" marR="91440" marT="91440" marB="91440" anchor="ctr">
+                    <a:lnL w="12700" cap="flat" cmpd="sng" algn="ctr">
+                      <a:solidFill>
+                        <a:srgbClr val="D8E0DA"/>
+                      </a:solidFill>
+                      <a:prstDash val="solid"/>
+                      <a:round/>
+                      <a:headEnd type="none" w="med" len="med"/>
+                      <a:tailEnd type="none" w="med" len="med"/>
+                    </a:lnL>
+                    <a:lnR w="12700" cap="flat" cmpd="sng" algn="ctr">
+                      <a:solidFill>
+                        <a:srgbClr val="D8E0DA"/>
+                      </a:solidFill>
+                      <a:prstDash val="solid"/>
+                      <a:round/>
+                      <a:headEnd type="none" w="med" len="med"/>
+                      <a:tailEnd type="none" w="med" len="med"/>
+                    </a:lnR>
+                    <a:lnT w="12700" cap="flat" cmpd="sng" algn="ctr">
+                      <a:solidFill>
+                        <a:srgbClr val="D8E0DA"/>
+                      </a:solidFill>
+                      <a:prstDash val="solid"/>
+                      <a:round/>
+                      <a:headEnd type="none" w="med" len="med"/>
+                      <a:tailEnd type="none" w="med" len="med"/>
+                    </a:lnT>
+                    <a:lnB w="12700" cap="flat" cmpd="sng" algn="ctr">
+                      <a:solidFill>
+                        <a:srgbClr val="D8E0DA"/>
+                      </a:solidFill>
+                      <a:prstDash val="solid"/>
+                      <a:round/>
+                      <a:headEnd type="none" w="med" len="med"/>
+                      <a:tailEnd type="none" w="med" len="med"/>
+                    </a:lnB>
+                  </a:tcPr>
+                </a:tc>
+              </a:tr>
+              <a:tr h="347472">
+                <a:tc>
+                  <a:txBody>
+                    <a:bodyPr/>
+                    <a:lstStyle/>
+                    <a:p>
+                      <a:pPr algn="l" indent="0" marL="0">
+                        <a:buNone/>
+                      </a:pPr>
+                      <a:r>
+                        <a:rPr lang="en-US" sz="1100" b="1" dirty="0">
+                          <a:solidFill>
+                            <a:srgbClr val="1F2A24"/>
+                          </a:solidFill>
+                          <a:latin typeface="맑은 고딕" pitchFamily="34" charset="0"/>
+                          <a:ea typeface="맑은 고딕" pitchFamily="34" charset="-122"/>
+                          <a:cs typeface="맑은 고딕" pitchFamily="34" charset="-120"/>
+                        </a:rPr>
+                        <a:t>고객문의</a:t>
+                      </a:r>
+                      <a:endParaRPr lang="en-US" sz="1100" dirty="0">
+                        <a:latin typeface="맑은 고딕" charset="0"/>
+                        <a:ea typeface="맑은 고딕" charset="0"/>
+                        <a:cs typeface="맑은 고딕" charset="0"/>
+                      </a:endParaRPr>
+                    </a:p>
+                  </a:txBody>
+                  <a:tcPr marL="91440" marR="91440" marT="91440" marB="91440" anchor="ctr">
+                    <a:lnL w="12700" cap="flat" cmpd="sng" algn="ctr">
+                      <a:solidFill>
+                        <a:srgbClr val="D8E0DA"/>
+                      </a:solidFill>
+                      <a:prstDash val="solid"/>
+                      <a:round/>
+                      <a:headEnd type="none" w="med" len="med"/>
+                      <a:tailEnd type="none" w="med" len="med"/>
+                    </a:lnL>
+                    <a:lnR w="12700" cap="flat" cmpd="sng" algn="ctr">
+                      <a:solidFill>
+                        <a:srgbClr val="D8E0DA"/>
+                      </a:solidFill>
+                      <a:prstDash val="solid"/>
+                      <a:round/>
+                      <a:headEnd type="none" w="med" len="med"/>
+                      <a:tailEnd type="none" w="med" len="med"/>
+                    </a:lnR>
+                    <a:lnT w="12700" cap="flat" cmpd="sng" algn="ctr">
+                      <a:solidFill>
+                        <a:srgbClr val="D8E0DA"/>
+                      </a:solidFill>
+                      <a:prstDash val="solid"/>
+                      <a:round/>
+                      <a:headEnd type="none" w="med" len="med"/>
+                      <a:tailEnd type="none" w="med" len="med"/>
+                    </a:lnT>
+                    <a:lnB w="12700" cap="flat" cmpd="sng" algn="ctr">
+                      <a:solidFill>
+                        <a:srgbClr val="D8E0DA"/>
+                      </a:solidFill>
+                      <a:prstDash val="solid"/>
+                      <a:round/>
+                      <a:headEnd type="none" w="med" len="med"/>
+                      <a:tailEnd type="none" w="med" len="med"/>
+                    </a:lnB>
+                    <a:solidFill>
+                      <a:srgbClr val="F1F5F2"/>
+                    </a:solidFill>
+                  </a:tcPr>
+                </a:tc>
+                <a:tc>
+                  <a:txBody>
+                    <a:bodyPr/>
+                    <a:lstStyle/>
+                    <a:p>
+                      <a:pPr algn="l" indent="0" marL="0">
+                        <a:buNone/>
+                      </a:pPr>
+                      <a:r>
+                        <a:rPr lang="en-US" sz="1100" dirty="0">
+                          <a:solidFill>
+                            <a:srgbClr val="1F2A24"/>
+                          </a:solidFill>
+                          <a:latin typeface="맑은 고딕" pitchFamily="34" charset="0"/>
+                          <a:ea typeface="맑은 고딕" pitchFamily="34" charset="-122"/>
+                          <a:cs typeface="맑은 고딕" pitchFamily="34" charset="-120"/>
+                        </a:rPr>
+                        <a:t>support@barosit.com</a:t>
+                      </a:r>
+                      <a:endParaRPr lang="en-US" sz="1100" dirty="0">
+                        <a:latin typeface="맑은 고딕" charset="0"/>
+                        <a:ea typeface="맑은 고딕" charset="0"/>
+                        <a:cs typeface="맑은 고딕" charset="0"/>
+                      </a:endParaRPr>
+                    </a:p>
+                  </a:txBody>
+                  <a:tcPr marL="91440" marR="91440" marT="91440" marB="91440" anchor="ctr">
+                    <a:lnL w="12700" cap="flat" cmpd="sng" algn="ctr">
+                      <a:solidFill>
+                        <a:srgbClr val="D8E0DA"/>
+                      </a:solidFill>
+                      <a:prstDash val="solid"/>
+                      <a:round/>
+                      <a:headEnd type="none" w="med" len="med"/>
+                      <a:tailEnd type="none" w="med" len="med"/>
+                    </a:lnL>
+                    <a:lnR w="12700" cap="flat" cmpd="sng" algn="ctr">
+                      <a:solidFill>
+                        <a:srgbClr val="D8E0DA"/>
+                      </a:solidFill>
+                      <a:prstDash val="solid"/>
+                      <a:round/>
+                      <a:headEnd type="none" w="med" len="med"/>
+                      <a:tailEnd type="none" w="med" len="med"/>
+                    </a:lnR>
+                    <a:lnT w="12700" cap="flat" cmpd="sng" algn="ctr">
+                      <a:solidFill>
+                        <a:srgbClr val="D8E0DA"/>
+                      </a:solidFill>
+                      <a:prstDash val="solid"/>
+                      <a:round/>
+                      <a:headEnd type="none" w="med" len="med"/>
+                      <a:tailEnd type="none" w="med" len="med"/>
+                    </a:lnT>
+                    <a:lnB w="12700" cap="flat" cmpd="sng" algn="ctr">
+                      <a:solidFill>
+                        <a:srgbClr val="D8E0DA"/>
+                      </a:solidFill>
+                      <a:prstDash val="solid"/>
+                      <a:round/>
+                      <a:headEnd type="none" w="med" len="med"/>
+                      <a:tailEnd type="none" w="med" len="med"/>
+                    </a:lnB>
+                  </a:tcPr>
+                </a:tc>
+              </a:tr>
+            </a:tbl>
+          </a:graphicData>
+        </a:graphic>
+      </p:graphicFrame>
+      <p:sp>
+        <p:nvSpPr>
+          <p:cNvPr id="4" name="Shape 1"/>
+          <p:cNvSpPr/>
+          <p:nvPr/>
+        </p:nvSpPr>
+        <p:spPr>
+          <a:xfrm>
+            <a:off x="457200" y="3429000"/>
+            <a:ext cx="8229600" cy="1051560"/>
+          </a:xfrm>
+          <a:prstGeom prst="rect">
+            <a:avLst/>
+          </a:prstGeom>
+          <a:solidFill>
+            <a:srgbClr val="F1F5F2"/>
+          </a:solidFill>
+          <a:ln w="12700">
+            <a:solidFill>
+              <a:srgbClr val="D8E0DA"/>
+            </a:solidFill>
+            <a:prstDash val="dash"/>
+          </a:ln>
+        </p:spPr>
+        <p:txBody>
+          <a:bodyPr/>
+          <a:p/>
+        </p:txBody>
+      </p:sp>
+      <p:sp>
+        <p:nvSpPr>
+          <p:cNvPr id="7" name="Text 4"/>
+          <p:cNvSpPr/>
+          <p:nvPr/>
+        </p:nvSpPr>
+        <p:spPr>
+          <a:xfrm>
+            <a:off x="457200" y="4709160"/>
+            <a:ext cx="6400800" cy="256032"/>
+          </a:xfrm>
+          <a:prstGeom prst="rect">
+            <a:avLst/>
+          </a:prstGeom>
+          <a:noFill/>
+          <a:ln/>
+        </p:spPr>
+        <p:txBody>
+          <a:bodyPr wrap="square" lIns="0" tIns="0" rIns="0" bIns="0" rtlCol="0" anchor="ctr"/>
+          <a:lstStyle/>
+          <a:p>
+            <a:pPr algn="l" indent="0" marL="0">
+              <a:buNone/>
+            </a:pPr>
+            <a:r>
+              <a:rPr lang="en-US" sz="800" dirty="0">
+                <a:solidFill>
+                  <a:srgbClr val="6B7A72"/>
+                </a:solidFill>
+                <a:latin typeface="맑은 고딕" pitchFamily="34" charset="0"/>
+                <a:ea typeface="맑은 고딕" pitchFamily="34" charset="-122"/>
+                <a:cs typeface="맑은 고딕" pitchFamily="34" charset="-120"/>
+              </a:rPr>
+              <a:t>주식회사 구비드 · 바로씻(BaroSit) · MID bill_barosi69c</a:t>
+            </a:r>
+            <a:endParaRPr lang="en-US" sz="800" dirty="0"/>
+          </a:p>
+        </p:txBody>
+      </p:sp>
+      <p:sp>
+        <p:nvSpPr>
+          <p:cNvPr id="8" name="Text 5"/>
+          <p:cNvSpPr/>
+          <p:nvPr/>
+        </p:nvSpPr>
+        <p:spPr>
+          <a:xfrm>
+            <a:off x="8138160" y="4709160"/>
+            <a:ext cx="548640" cy="256032"/>
+          </a:xfrm>
+          <a:prstGeom prst="rect">
+            <a:avLst/>
+          </a:prstGeom>
+          <a:noFill/>
+          <a:ln/>
+        </p:spPr>
+        <p:txBody>
+          <a:bodyPr wrap="square" lIns="0" tIns="0" rIns="0" bIns="0" rtlCol="0" anchor="ctr"/>
+          <a:lstStyle/>
+          <a:p>
+            <a:pPr algn="r" indent="0" marL="0">
+              <a:buNone/>
+            </a:pPr>
+            <a:r>
+              <a:rPr lang="en-US" sz="800" dirty="0">
+                <a:solidFill>
+                  <a:srgbClr val="6B7A72"/>
+                </a:solidFill>
+                <a:latin typeface="맑은 고딕" pitchFamily="34" charset="0"/>
+                <a:ea typeface="맑은 고딕" pitchFamily="34" charset="-122"/>
+                <a:cs typeface="맑은 고딕" pitchFamily="34" charset="-120"/>
+              </a:rPr>
+              <a:t>2</a:t>
+            </a:r>
+            <a:endParaRPr lang="en-US" sz="800" dirty="0"/>
+          </a:p>
+        </p:txBody>
+      </p:sp>
+      <p:pic>
+        <p:nvPicPr>
+          <p:cNvPr id="13" name="Picture 12" descr="footer-business-info.png"/>
+          <p:cNvPicPr>
+            <a:picLocks noChangeAspect="1"/>
+          </p:cNvPicPr>
+          <p:nvPr/>
+        </p:nvPicPr>
+        <p:blipFill>
+          <a:blip r:embed="rId3"/>
+          <a:stretch>
+            <a:fillRect/>
+          </a:stretch>
+        </p:blipFill>
+        <p:spPr>
+          <a:xfrm>
+            <a:off x="1722120" y="3502152"/>
+            <a:ext cx="5699760" cy="905256"/>
+          </a:xfrm>
+          <a:prstGeom prst="rect">
+            <a:avLst/>
+          </a:prstGeom>
+        </p:spPr>
+      </p:pic>
+    </p:spTree>
+  </p:cSld>
+  <p:clrMapOvr>
+    <a:masterClrMapping/>
+  </p:clrMapOvr>
+</p:sld>
+</file>
+
+<file path=ppt/slides/slide3.xml><?xml version="1.0" encoding="utf-8"?>
 <p:sld xmlns:a="http://schemas.openxmlformats.org/drawingml/2006/main" xmlns:r="http://schemas.openxmlformats.org/officeDocument/2006/relationships" xmlns:p="http://schemas.openxmlformats.org/presentationml/2006/main">
   <p:cSld name="Slide 10">
     <p:bg>
@@ -3085,34 +5773,20 @@
 </p:sld>
 </file>
 
-<file path=ppt/slides/slide11.xml><?xml version="1.0" encoding="utf-8"?>
-<p:sld xmlns:a="http://schemas.openxmlformats.org/drawingml/2006/main" xmlns:r="http://schemas.openxmlformats.org/officeDocument/2006/relationships" xmlns:p="http://schemas.openxmlformats.org/presentationml/2006/main">
-  <p:cSld name="Slide 11">
-    <p:bg>
-      <p:bgPr>
-        <a:solidFill>
-          <a:srgbClr val="FFFFFF"/>
-        </a:solidFill>
-      </p:bgPr>
-    </p:bg>
+<file path=ppt/slides/slide4.xml><?xml version="1.0" encoding="utf-8"?>
+<p:sld xmlns:a="http://schemas.openxmlformats.org/drawingml/2006/main" xmlns:p="http://schemas.openxmlformats.org/presentationml/2006/main" xmlns:r="http://schemas.openxmlformats.org/officeDocument/2006/relationships">
+  <p:cSld>
     <p:spTree>
       <p:nvGrpSpPr>
         <p:cNvPr id="1" name=""/>
         <p:cNvGrpSpPr/>
         <p:nvPr/>
       </p:nvGrpSpPr>
-      <p:grpSpPr>
-        <a:xfrm>
-          <a:off x="0" y="0"/>
-          <a:ext cx="0" cy="0"/>
-          <a:chOff x="0" y="0"/>
-          <a:chExt cx="0" cy="0"/>
-        </a:xfrm>
-      </p:grpSpPr>
-      <p:sp>
-        <p:nvSpPr>
-          <p:cNvPr id="2" name="Text 0"/>
-          <p:cNvSpPr/>
+      <p:grpSpPr/>
+      <p:sp>
+        <p:nvSpPr>
+          <p:cNvPr id="2" name="TextBox 1"/>
+          <p:cNvSpPr txBox="1"/>
           <p:nvPr/>
         </p:nvSpPr>
         <p:spPr>
@@ -3124,1112 +5798,183 @@
             <a:avLst/>
           </a:prstGeom>
           <a:noFill/>
-          <a:ln/>
-        </p:spPr>
-        <p:txBody>
-          <a:bodyPr wrap="square" lIns="0" tIns="0" rIns="0" bIns="0" rtlCol="0" anchor="ctr"/>
-          <a:lstStyle/>
-          <a:p>
-            <a:pPr algn="l" indent="0" marL="0">
-              <a:buNone/>
-            </a:pPr>
-            <a:r>
-              <a:rPr lang="en-US" sz="2000" b="1" dirty="0">
+        </p:spPr>
+        <p:txBody>
+          <a:bodyPr wrap="square">
+            <a:spAutoFit/>
+          </a:bodyPr>
+          <a:lstStyle/>
+          <a:p>
+            <a:pPr algn="l"/>
+            <a:r>
+              <a:rPr sz="2000" b="1">
                 <a:solidFill>
                   <a:srgbClr val="1F2A24"/>
                 </a:solidFill>
-                <a:latin typeface="맑은 고딕" pitchFamily="34" charset="0"/>
-                <a:ea typeface="맑은 고딕" pitchFamily="34" charset="-122"/>
-                <a:cs typeface="맑은 고딕" pitchFamily="34" charset="-120"/>
-              </a:rPr>
-              <a:t>사업자정보 (홈페이지 하단 상시 표기)</a:t>
-            </a:r>
-            <a:endParaRPr lang="en-US" sz="2000" dirty="0"/>
-          </a:p>
-        </p:txBody>
-      </p:sp>
-      <p:graphicFrame>
-        <p:nvGraphicFramePr>
-          <p:cNvPr id="12" name="Table 0"/>
-          <p:cNvGraphicFramePr>
-            <a:graphicFrameLocks noGrp="1"/>
-          </p:cNvGraphicFramePr>
-          <p:nvPr>
-            <p:extLst>
-              <p:ext uri="{D42A27DB-BD31-4B8C-83A1-F6EECF244321}">
-                <p14:modId xmlns:p14="http://schemas.microsoft.com/office/powerpoint/2010/main" val="1579011935"/>
-              </p:ext>
-            </p:extLst>
-          </p:nvPr>
-        </p:nvGraphicFramePr>
-        <p:xfrm>
-          <a:off x="457200" y="914400"/>
-          <a:ext cx="8229600" cy="914400"/>
-        </p:xfrm>
-        <a:graphic>
-          <a:graphicData uri="http://schemas.openxmlformats.org/drawingml/2006/table">
-            <a:tbl>
-              <a:tblPr/>
-              <a:tblGrid>
-                <a:gridCol w="2377440"/>
-                <a:gridCol w="5852160"/>
-              </a:tblGrid>
-              <a:tr h="347472">
-                <a:tc>
-                  <a:txBody>
-                    <a:bodyPr/>
-                    <a:lstStyle/>
-                    <a:p>
-                      <a:pPr algn="l" indent="0" marL="0">
-                        <a:buNone/>
-                      </a:pPr>
-                      <a:r>
-                        <a:rPr lang="en-US" sz="1100" b="1" dirty="0">
-                          <a:solidFill>
-                            <a:srgbClr val="1F2A24"/>
-                          </a:solidFill>
-                          <a:latin typeface="맑은 고딕" pitchFamily="34" charset="0"/>
-                          <a:ea typeface="맑은 고딕" pitchFamily="34" charset="-122"/>
-                          <a:cs typeface="맑은 고딕" pitchFamily="34" charset="-120"/>
-                        </a:rPr>
-                        <a:t>상호명</a:t>
-                      </a:r>
-                      <a:endParaRPr lang="en-US" sz="1100" dirty="0">
-                        <a:latin typeface="맑은 고딕" charset="0"/>
-                        <a:ea typeface="맑은 고딕" charset="0"/>
-                        <a:cs typeface="맑은 고딕" charset="0"/>
-                      </a:endParaRPr>
-                    </a:p>
-                  </a:txBody>
-                  <a:tcPr marL="91440" marR="91440" marT="91440" marB="91440" anchor="ctr">
-                    <a:lnL w="12700" cap="flat" cmpd="sng" algn="ctr">
-                      <a:solidFill>
-                        <a:srgbClr val="D8E0DA"/>
-                      </a:solidFill>
-                      <a:prstDash val="solid"/>
-                      <a:round/>
-                      <a:headEnd type="none" w="med" len="med"/>
-                      <a:tailEnd type="none" w="med" len="med"/>
-                    </a:lnL>
-                    <a:lnR w="12700" cap="flat" cmpd="sng" algn="ctr">
-                      <a:solidFill>
-                        <a:srgbClr val="D8E0DA"/>
-                      </a:solidFill>
-                      <a:prstDash val="solid"/>
-                      <a:round/>
-                      <a:headEnd type="none" w="med" len="med"/>
-                      <a:tailEnd type="none" w="med" len="med"/>
-                    </a:lnR>
-                    <a:lnT w="12700" cap="flat" cmpd="sng" algn="ctr">
-                      <a:solidFill>
-                        <a:srgbClr val="D8E0DA"/>
-                      </a:solidFill>
-                      <a:prstDash val="solid"/>
-                      <a:round/>
-                      <a:headEnd type="none" w="med" len="med"/>
-                      <a:tailEnd type="none" w="med" len="med"/>
-                    </a:lnT>
-                    <a:lnB w="12700" cap="flat" cmpd="sng" algn="ctr">
-                      <a:solidFill>
-                        <a:srgbClr val="D8E0DA"/>
-                      </a:solidFill>
-                      <a:prstDash val="solid"/>
-                      <a:round/>
-                      <a:headEnd type="none" w="med" len="med"/>
-                      <a:tailEnd type="none" w="med" len="med"/>
-                    </a:lnB>
-                    <a:solidFill>
-                      <a:srgbClr val="F1F5F2"/>
-                    </a:solidFill>
-                  </a:tcPr>
-                </a:tc>
-                <a:tc>
-                  <a:txBody>
-                    <a:bodyPr/>
-                    <a:lstStyle/>
-                    <a:p>
-                      <a:pPr algn="l" indent="0" marL="0">
-                        <a:buNone/>
-                      </a:pPr>
-                      <a:r>
-                        <a:rPr lang="en-US" sz="1100" dirty="0">
-                          <a:solidFill>
-                            <a:srgbClr val="1F2A24"/>
-                          </a:solidFill>
-                          <a:latin typeface="맑은 고딕" pitchFamily="34" charset="0"/>
-                          <a:ea typeface="맑은 고딕" pitchFamily="34" charset="-122"/>
-                          <a:cs typeface="맑은 고딕" pitchFamily="34" charset="-120"/>
-                        </a:rPr>
-                        <a:t>주식회사 구비드</a:t>
-                      </a:r>
-                      <a:endParaRPr lang="en-US" sz="1100" dirty="0">
-                        <a:latin typeface="맑은 고딕" charset="0"/>
-                        <a:ea typeface="맑은 고딕" charset="0"/>
-                        <a:cs typeface="맑은 고딕" charset="0"/>
-                      </a:endParaRPr>
-                    </a:p>
-                  </a:txBody>
-                  <a:tcPr marL="91440" marR="91440" marT="91440" marB="91440" anchor="ctr">
-                    <a:lnL w="12700" cap="flat" cmpd="sng" algn="ctr">
-                      <a:solidFill>
-                        <a:srgbClr val="D8E0DA"/>
-                      </a:solidFill>
-                      <a:prstDash val="solid"/>
-                      <a:round/>
-                      <a:headEnd type="none" w="med" len="med"/>
-                      <a:tailEnd type="none" w="med" len="med"/>
-                    </a:lnL>
-                    <a:lnR w="12700" cap="flat" cmpd="sng" algn="ctr">
-                      <a:solidFill>
-                        <a:srgbClr val="D8E0DA"/>
-                      </a:solidFill>
-                      <a:prstDash val="solid"/>
-                      <a:round/>
-                      <a:headEnd type="none" w="med" len="med"/>
-                      <a:tailEnd type="none" w="med" len="med"/>
-                    </a:lnR>
-                    <a:lnT w="12700" cap="flat" cmpd="sng" algn="ctr">
-                      <a:solidFill>
-                        <a:srgbClr val="D8E0DA"/>
-                      </a:solidFill>
-                      <a:prstDash val="solid"/>
-                      <a:round/>
-                      <a:headEnd type="none" w="med" len="med"/>
-                      <a:tailEnd type="none" w="med" len="med"/>
-                    </a:lnT>
-                    <a:lnB w="12700" cap="flat" cmpd="sng" algn="ctr">
-                      <a:solidFill>
-                        <a:srgbClr val="D8E0DA"/>
-                      </a:solidFill>
-                      <a:prstDash val="solid"/>
-                      <a:round/>
-                      <a:headEnd type="none" w="med" len="med"/>
-                      <a:tailEnd type="none" w="med" len="med"/>
-                    </a:lnB>
-                  </a:tcPr>
-                </a:tc>
-              </a:tr>
-              <a:tr h="347472">
-                <a:tc>
-                  <a:txBody>
-                    <a:bodyPr/>
-                    <a:lstStyle/>
-                    <a:p>
-                      <a:pPr algn="l" indent="0" marL="0">
-                        <a:buNone/>
-                      </a:pPr>
-                      <a:r>
-                        <a:rPr lang="en-US" sz="1100" b="1" dirty="0">
-                          <a:solidFill>
-                            <a:srgbClr val="1F2A24"/>
-                          </a:solidFill>
-                          <a:latin typeface="맑은 고딕" pitchFamily="34" charset="0"/>
-                          <a:ea typeface="맑은 고딕" pitchFamily="34" charset="-122"/>
-                          <a:cs typeface="맑은 고딕" pitchFamily="34" charset="-120"/>
-                        </a:rPr>
-                        <a:t>대표자명</a:t>
-                      </a:r>
-                      <a:endParaRPr lang="en-US" sz="1100" dirty="0">
-                        <a:latin typeface="맑은 고딕" charset="0"/>
-                        <a:ea typeface="맑은 고딕" charset="0"/>
-                        <a:cs typeface="맑은 고딕" charset="0"/>
-                      </a:endParaRPr>
-                    </a:p>
-                  </a:txBody>
-                  <a:tcPr marL="91440" marR="91440" marT="91440" marB="91440" anchor="ctr">
-                    <a:lnL w="12700" cap="flat" cmpd="sng" algn="ctr">
-                      <a:solidFill>
-                        <a:srgbClr val="D8E0DA"/>
-                      </a:solidFill>
-                      <a:prstDash val="solid"/>
-                      <a:round/>
-                      <a:headEnd type="none" w="med" len="med"/>
-                      <a:tailEnd type="none" w="med" len="med"/>
-                    </a:lnL>
-                    <a:lnR w="12700" cap="flat" cmpd="sng" algn="ctr">
-                      <a:solidFill>
-                        <a:srgbClr val="D8E0DA"/>
-                      </a:solidFill>
-                      <a:prstDash val="solid"/>
-                      <a:round/>
-                      <a:headEnd type="none" w="med" len="med"/>
-                      <a:tailEnd type="none" w="med" len="med"/>
-                    </a:lnR>
-                    <a:lnT w="12700" cap="flat" cmpd="sng" algn="ctr">
-                      <a:solidFill>
-                        <a:srgbClr val="D8E0DA"/>
-                      </a:solidFill>
-                      <a:prstDash val="solid"/>
-                      <a:round/>
-                      <a:headEnd type="none" w="med" len="med"/>
-                      <a:tailEnd type="none" w="med" len="med"/>
-                    </a:lnT>
-                    <a:lnB w="12700" cap="flat" cmpd="sng" algn="ctr">
-                      <a:solidFill>
-                        <a:srgbClr val="D8E0DA"/>
-                      </a:solidFill>
-                      <a:prstDash val="solid"/>
-                      <a:round/>
-                      <a:headEnd type="none" w="med" len="med"/>
-                      <a:tailEnd type="none" w="med" len="med"/>
-                    </a:lnB>
-                    <a:solidFill>
-                      <a:srgbClr val="F1F5F2"/>
-                    </a:solidFill>
-                  </a:tcPr>
-                </a:tc>
-                <a:tc>
-                  <a:txBody>
-                    <a:bodyPr/>
-                    <a:lstStyle/>
-                    <a:p>
-                      <a:pPr algn="l" indent="0" marL="0">
-                        <a:buNone/>
-                      </a:pPr>
-                      <a:r>
-                        <a:rPr lang="en-US" sz="1100" dirty="0">
-                          <a:solidFill>
-                            <a:srgbClr val="1F2A24"/>
-                          </a:solidFill>
-                          <a:latin typeface="맑은 고딕" pitchFamily="34" charset="0"/>
-                          <a:ea typeface="맑은 고딕" pitchFamily="34" charset="-122"/>
-                          <a:cs typeface="맑은 고딕" pitchFamily="34" charset="-120"/>
-                        </a:rPr>
-                        <a:t>이종현</a:t>
-                      </a:r>
-                      <a:endParaRPr lang="en-US" sz="1100" dirty="0">
-                        <a:latin typeface="맑은 고딕" charset="0"/>
-                        <a:ea typeface="맑은 고딕" charset="0"/>
-                        <a:cs typeface="맑은 고딕" charset="0"/>
-                      </a:endParaRPr>
-                    </a:p>
-                  </a:txBody>
-                  <a:tcPr marL="91440" marR="91440" marT="91440" marB="91440" anchor="ctr">
-                    <a:lnL w="12700" cap="flat" cmpd="sng" algn="ctr">
-                      <a:solidFill>
-                        <a:srgbClr val="D8E0DA"/>
-                      </a:solidFill>
-                      <a:prstDash val="solid"/>
-                      <a:round/>
-                      <a:headEnd type="none" w="med" len="med"/>
-                      <a:tailEnd type="none" w="med" len="med"/>
-                    </a:lnL>
-                    <a:lnR w="12700" cap="flat" cmpd="sng" algn="ctr">
-                      <a:solidFill>
-                        <a:srgbClr val="D8E0DA"/>
-                      </a:solidFill>
-                      <a:prstDash val="solid"/>
-                      <a:round/>
-                      <a:headEnd type="none" w="med" len="med"/>
-                      <a:tailEnd type="none" w="med" len="med"/>
-                    </a:lnR>
-                    <a:lnT w="12700" cap="flat" cmpd="sng" algn="ctr">
-                      <a:solidFill>
-                        <a:srgbClr val="D8E0DA"/>
-                      </a:solidFill>
-                      <a:prstDash val="solid"/>
-                      <a:round/>
-                      <a:headEnd type="none" w="med" len="med"/>
-                      <a:tailEnd type="none" w="med" len="med"/>
-                    </a:lnT>
-                    <a:lnB w="12700" cap="flat" cmpd="sng" algn="ctr">
-                      <a:solidFill>
-                        <a:srgbClr val="D8E0DA"/>
-                      </a:solidFill>
-                      <a:prstDash val="solid"/>
-                      <a:round/>
-                      <a:headEnd type="none" w="med" len="med"/>
-                      <a:tailEnd type="none" w="med" len="med"/>
-                    </a:lnB>
-                  </a:tcPr>
-                </a:tc>
-              </a:tr>
-              <a:tr h="347472">
-                <a:tc>
-                  <a:txBody>
-                    <a:bodyPr/>
-                    <a:lstStyle/>
-                    <a:p>
-                      <a:pPr algn="l" indent="0" marL="0">
-                        <a:buNone/>
-                      </a:pPr>
-                      <a:r>
-                        <a:rPr lang="en-US" sz="1100" b="1" dirty="0">
-                          <a:solidFill>
-                            <a:srgbClr val="1F2A24"/>
-                          </a:solidFill>
-                          <a:latin typeface="맑은 고딕" pitchFamily="34" charset="0"/>
-                          <a:ea typeface="맑은 고딕" pitchFamily="34" charset="-122"/>
-                          <a:cs typeface="맑은 고딕" pitchFamily="34" charset="-120"/>
-                        </a:rPr>
-                        <a:t>사업자등록번호</a:t>
-                      </a:r>
-                      <a:endParaRPr lang="en-US" sz="1100" dirty="0">
-                        <a:latin typeface="맑은 고딕" charset="0"/>
-                        <a:ea typeface="맑은 고딕" charset="0"/>
-                        <a:cs typeface="맑은 고딕" charset="0"/>
-                      </a:endParaRPr>
-                    </a:p>
-                  </a:txBody>
-                  <a:tcPr marL="91440" marR="91440" marT="91440" marB="91440" anchor="ctr">
-                    <a:lnL w="12700" cap="flat" cmpd="sng" algn="ctr">
-                      <a:solidFill>
-                        <a:srgbClr val="D8E0DA"/>
-                      </a:solidFill>
-                      <a:prstDash val="solid"/>
-                      <a:round/>
-                      <a:headEnd type="none" w="med" len="med"/>
-                      <a:tailEnd type="none" w="med" len="med"/>
-                    </a:lnL>
-                    <a:lnR w="12700" cap="flat" cmpd="sng" algn="ctr">
-                      <a:solidFill>
-                        <a:srgbClr val="D8E0DA"/>
-                      </a:solidFill>
-                      <a:prstDash val="solid"/>
-                      <a:round/>
-                      <a:headEnd type="none" w="med" len="med"/>
-                      <a:tailEnd type="none" w="med" len="med"/>
-                    </a:lnR>
-                    <a:lnT w="12700" cap="flat" cmpd="sng" algn="ctr">
-                      <a:solidFill>
-                        <a:srgbClr val="D8E0DA"/>
-                      </a:solidFill>
-                      <a:prstDash val="solid"/>
-                      <a:round/>
-                      <a:headEnd type="none" w="med" len="med"/>
-                      <a:tailEnd type="none" w="med" len="med"/>
-                    </a:lnT>
-                    <a:lnB w="12700" cap="flat" cmpd="sng" algn="ctr">
-                      <a:solidFill>
-                        <a:srgbClr val="D8E0DA"/>
-                      </a:solidFill>
-                      <a:prstDash val="solid"/>
-                      <a:round/>
-                      <a:headEnd type="none" w="med" len="med"/>
-                      <a:tailEnd type="none" w="med" len="med"/>
-                    </a:lnB>
-                    <a:solidFill>
-                      <a:srgbClr val="F1F5F2"/>
-                    </a:solidFill>
-                  </a:tcPr>
-                </a:tc>
-                <a:tc>
-                  <a:txBody>
-                    <a:bodyPr/>
-                    <a:lstStyle/>
-                    <a:p>
-                      <a:pPr algn="l" indent="0" marL="0">
-                        <a:buNone/>
-                      </a:pPr>
-                      <a:r>
-                        <a:rPr lang="en-US" sz="1100" dirty="0">
-                          <a:solidFill>
-                            <a:srgbClr val="1F2A24"/>
-                          </a:solidFill>
-                          <a:latin typeface="맑은 고딕" pitchFamily="34" charset="0"/>
-                          <a:ea typeface="맑은 고딕" pitchFamily="34" charset="-122"/>
-                          <a:cs typeface="맑은 고딕" pitchFamily="34" charset="-120"/>
-                        </a:rPr>
-                        <a:t>512-88-00059</a:t>
-                      </a:r>
-                      <a:endParaRPr lang="en-US" sz="1100" dirty="0">
-                        <a:latin typeface="맑은 고딕" charset="0"/>
-                        <a:ea typeface="맑은 고딕" charset="0"/>
-                        <a:cs typeface="맑은 고딕" charset="0"/>
-                      </a:endParaRPr>
-                    </a:p>
-                  </a:txBody>
-                  <a:tcPr marL="91440" marR="91440" marT="91440" marB="91440" anchor="ctr">
-                    <a:lnL w="12700" cap="flat" cmpd="sng" algn="ctr">
-                      <a:solidFill>
-                        <a:srgbClr val="D8E0DA"/>
-                      </a:solidFill>
-                      <a:prstDash val="solid"/>
-                      <a:round/>
-                      <a:headEnd type="none" w="med" len="med"/>
-                      <a:tailEnd type="none" w="med" len="med"/>
-                    </a:lnL>
-                    <a:lnR w="12700" cap="flat" cmpd="sng" algn="ctr">
-                      <a:solidFill>
-                        <a:srgbClr val="D8E0DA"/>
-                      </a:solidFill>
-                      <a:prstDash val="solid"/>
-                      <a:round/>
-                      <a:headEnd type="none" w="med" len="med"/>
-                      <a:tailEnd type="none" w="med" len="med"/>
-                    </a:lnR>
-                    <a:lnT w="12700" cap="flat" cmpd="sng" algn="ctr">
-                      <a:solidFill>
-                        <a:srgbClr val="D8E0DA"/>
-                      </a:solidFill>
-                      <a:prstDash val="solid"/>
-                      <a:round/>
-                      <a:headEnd type="none" w="med" len="med"/>
-                      <a:tailEnd type="none" w="med" len="med"/>
-                    </a:lnT>
-                    <a:lnB w="12700" cap="flat" cmpd="sng" algn="ctr">
-                      <a:solidFill>
-                        <a:srgbClr val="D8E0DA"/>
-                      </a:solidFill>
-                      <a:prstDash val="solid"/>
-                      <a:round/>
-                      <a:headEnd type="none" w="med" len="med"/>
-                      <a:tailEnd type="none" w="med" len="med"/>
-                    </a:lnB>
-                  </a:tcPr>
-                </a:tc>
-              </a:tr>
-              <a:tr h="347472">
-                <a:tc>
-                  <a:txBody>
-                    <a:bodyPr/>
-                    <a:lstStyle/>
-                    <a:p>
-                      <a:pPr algn="l" indent="0" marL="0">
-                        <a:buNone/>
-                      </a:pPr>
-                      <a:r>
-                        <a:rPr lang="en-US" sz="1100" b="1" dirty="0">
-                          <a:solidFill>
-                            <a:srgbClr val="1F2A24"/>
-                          </a:solidFill>
-                          <a:latin typeface="맑은 고딕" pitchFamily="34" charset="0"/>
-                          <a:ea typeface="맑은 고딕" pitchFamily="34" charset="-122"/>
-                          <a:cs typeface="맑은 고딕" pitchFamily="34" charset="-120"/>
-                        </a:rPr>
-                        <a:t>사업장 주소</a:t>
-                      </a:r>
-                      <a:endParaRPr lang="en-US" sz="1100" dirty="0">
-                        <a:latin typeface="맑은 고딕" charset="0"/>
-                        <a:ea typeface="맑은 고딕" charset="0"/>
-                        <a:cs typeface="맑은 고딕" charset="0"/>
-                      </a:endParaRPr>
-                    </a:p>
-                  </a:txBody>
-                  <a:tcPr marL="91440" marR="91440" marT="91440" marB="91440" anchor="ctr">
-                    <a:lnL w="12700" cap="flat" cmpd="sng" algn="ctr">
-                      <a:solidFill>
-                        <a:srgbClr val="D8E0DA"/>
-                      </a:solidFill>
-                      <a:prstDash val="solid"/>
-                      <a:round/>
-                      <a:headEnd type="none" w="med" len="med"/>
-                      <a:tailEnd type="none" w="med" len="med"/>
-                    </a:lnL>
-                    <a:lnR w="12700" cap="flat" cmpd="sng" algn="ctr">
-                      <a:solidFill>
-                        <a:srgbClr val="D8E0DA"/>
-                      </a:solidFill>
-                      <a:prstDash val="solid"/>
-                      <a:round/>
-                      <a:headEnd type="none" w="med" len="med"/>
-                      <a:tailEnd type="none" w="med" len="med"/>
-                    </a:lnR>
-                    <a:lnT w="12700" cap="flat" cmpd="sng" algn="ctr">
-                      <a:solidFill>
-                        <a:srgbClr val="D8E0DA"/>
-                      </a:solidFill>
-                      <a:prstDash val="solid"/>
-                      <a:round/>
-                      <a:headEnd type="none" w="med" len="med"/>
-                      <a:tailEnd type="none" w="med" len="med"/>
-                    </a:lnT>
-                    <a:lnB w="12700" cap="flat" cmpd="sng" algn="ctr">
-                      <a:solidFill>
-                        <a:srgbClr val="D8E0DA"/>
-                      </a:solidFill>
-                      <a:prstDash val="solid"/>
-                      <a:round/>
-                      <a:headEnd type="none" w="med" len="med"/>
-                      <a:tailEnd type="none" w="med" len="med"/>
-                    </a:lnB>
-                    <a:solidFill>
-                      <a:srgbClr val="F1F5F2"/>
-                    </a:solidFill>
-                  </a:tcPr>
-                </a:tc>
-                <a:tc>
-                  <a:txBody>
-                    <a:bodyPr/>
-                    <a:lstStyle/>
-                    <a:p>
-                      <a:pPr algn="l" indent="0" marL="0">
-                        <a:buNone/>
-                      </a:pPr>
-                      <a:r>
-                        <a:rPr lang="en-US" sz="1100" dirty="0">
-                          <a:solidFill>
-                            <a:srgbClr val="1F2A24"/>
-                          </a:solidFill>
-                          <a:latin typeface="맑은 고딕" pitchFamily="34" charset="0"/>
-                          <a:ea typeface="맑은 고딕" pitchFamily="34" charset="-122"/>
-                          <a:cs typeface="맑은 고딕" pitchFamily="34" charset="-120"/>
-                        </a:rPr>
-                        <a:t>서울특별시 송파구 오금로15길 5-12, 3층 3425호 (방이동, 정환빌딩)</a:t>
-                      </a:r>
-                      <a:endParaRPr lang="en-US" sz="1100" dirty="0">
-                        <a:latin typeface="맑은 고딕" charset="0"/>
-                        <a:ea typeface="맑은 고딕" charset="0"/>
-                        <a:cs typeface="맑은 고딕" charset="0"/>
-                      </a:endParaRPr>
-                    </a:p>
-                  </a:txBody>
-                  <a:tcPr marL="91440" marR="91440" marT="91440" marB="91440" anchor="ctr">
-                    <a:lnL w="12700" cap="flat" cmpd="sng" algn="ctr">
-                      <a:solidFill>
-                        <a:srgbClr val="D8E0DA"/>
-                      </a:solidFill>
-                      <a:prstDash val="solid"/>
-                      <a:round/>
-                      <a:headEnd type="none" w="med" len="med"/>
-                      <a:tailEnd type="none" w="med" len="med"/>
-                    </a:lnL>
-                    <a:lnR w="12700" cap="flat" cmpd="sng" algn="ctr">
-                      <a:solidFill>
-                        <a:srgbClr val="D8E0DA"/>
-                      </a:solidFill>
-                      <a:prstDash val="solid"/>
-                      <a:round/>
-                      <a:headEnd type="none" w="med" len="med"/>
-                      <a:tailEnd type="none" w="med" len="med"/>
-                    </a:lnR>
-                    <a:lnT w="12700" cap="flat" cmpd="sng" algn="ctr">
-                      <a:solidFill>
-                        <a:srgbClr val="D8E0DA"/>
-                      </a:solidFill>
-                      <a:prstDash val="solid"/>
-                      <a:round/>
-                      <a:headEnd type="none" w="med" len="med"/>
-                      <a:tailEnd type="none" w="med" len="med"/>
-                    </a:lnT>
-                    <a:lnB w="12700" cap="flat" cmpd="sng" algn="ctr">
-                      <a:solidFill>
-                        <a:srgbClr val="D8E0DA"/>
-                      </a:solidFill>
-                      <a:prstDash val="solid"/>
-                      <a:round/>
-                      <a:headEnd type="none" w="med" len="med"/>
-                      <a:tailEnd type="none" w="med" len="med"/>
-                    </a:lnB>
-                  </a:tcPr>
-                </a:tc>
-              </a:tr>
-              <a:tr h="347472">
-                <a:tc>
-                  <a:txBody>
-                    <a:bodyPr/>
-                    <a:lstStyle/>
-                    <a:p>
-                      <a:pPr algn="l" indent="0" marL="0">
-                        <a:buNone/>
-                      </a:pPr>
-                      <a:r>
-                        <a:rPr lang="en-US" sz="1100" b="1" dirty="0">
-                          <a:solidFill>
-                            <a:srgbClr val="1F2A24"/>
-                          </a:solidFill>
-                          <a:latin typeface="맑은 고딕" pitchFamily="34" charset="0"/>
-                          <a:ea typeface="맑은 고딕" pitchFamily="34" charset="-122"/>
-                          <a:cs typeface="맑은 고딕" pitchFamily="34" charset="-120"/>
-                        </a:rPr>
-                        <a:t>유선번호</a:t>
-                      </a:r>
-                      <a:endParaRPr lang="en-US" sz="1100" dirty="0">
-                        <a:latin typeface="맑은 고딕" charset="0"/>
-                        <a:ea typeface="맑은 고딕" charset="0"/>
-                        <a:cs typeface="맑은 고딕" charset="0"/>
-                      </a:endParaRPr>
-                    </a:p>
-                  </a:txBody>
-                  <a:tcPr marL="91440" marR="91440" marT="91440" marB="91440" anchor="ctr">
-                    <a:lnL w="12700" cap="flat" cmpd="sng" algn="ctr">
-                      <a:solidFill>
-                        <a:srgbClr val="D8E0DA"/>
-                      </a:solidFill>
-                      <a:prstDash val="solid"/>
-                      <a:round/>
-                      <a:headEnd type="none" w="med" len="med"/>
-                      <a:tailEnd type="none" w="med" len="med"/>
-                    </a:lnL>
-                    <a:lnR w="12700" cap="flat" cmpd="sng" algn="ctr">
-                      <a:solidFill>
-                        <a:srgbClr val="D8E0DA"/>
-                      </a:solidFill>
-                      <a:prstDash val="solid"/>
-                      <a:round/>
-                      <a:headEnd type="none" w="med" len="med"/>
-                      <a:tailEnd type="none" w="med" len="med"/>
-                    </a:lnR>
-                    <a:lnT w="12700" cap="flat" cmpd="sng" algn="ctr">
-                      <a:solidFill>
-                        <a:srgbClr val="D8E0DA"/>
-                      </a:solidFill>
-                      <a:prstDash val="solid"/>
-                      <a:round/>
-                      <a:headEnd type="none" w="med" len="med"/>
-                      <a:tailEnd type="none" w="med" len="med"/>
-                    </a:lnT>
-                    <a:lnB w="12700" cap="flat" cmpd="sng" algn="ctr">
-                      <a:solidFill>
-                        <a:srgbClr val="D8E0DA"/>
-                      </a:solidFill>
-                      <a:prstDash val="solid"/>
-                      <a:round/>
-                      <a:headEnd type="none" w="med" len="med"/>
-                      <a:tailEnd type="none" w="med" len="med"/>
-                    </a:lnB>
-                    <a:solidFill>
-                      <a:srgbClr val="F1F5F2"/>
-                    </a:solidFill>
-                  </a:tcPr>
-                </a:tc>
-                <a:tc>
-                  <a:txBody>
-                    <a:bodyPr/>
-                    <a:lstStyle/>
-                    <a:p>
-                      <a:pPr algn="l" indent="0" marL="0">
-                        <a:buNone/>
-                      </a:pPr>
-                      <a:r>
-                        <a:rPr lang="en-US" sz="1100" dirty="0">
-                          <a:solidFill>
-                            <a:srgbClr val="1F2A24"/>
-                          </a:solidFill>
-                          <a:latin typeface="맑은 고딕" pitchFamily="34" charset="0"/>
-                          <a:ea typeface="맑은 고딕" pitchFamily="34" charset="-122"/>
-                          <a:cs typeface="맑은 고딕" pitchFamily="34" charset="-120"/>
-                        </a:rPr>
-                        <a:t>010-8635-0058</a:t>
-                      </a:r>
-                      <a:endParaRPr lang="en-US" sz="1100" dirty="0">
-                        <a:latin typeface="맑은 고딕" charset="0"/>
-                        <a:ea typeface="맑은 고딕" charset="0"/>
-                        <a:cs typeface="맑은 고딕" charset="0"/>
-                      </a:endParaRPr>
-                    </a:p>
-                  </a:txBody>
-                  <a:tcPr marL="91440" marR="91440" marT="91440" marB="91440" anchor="ctr">
-                    <a:lnL w="12700" cap="flat" cmpd="sng" algn="ctr">
-                      <a:solidFill>
-                        <a:srgbClr val="D8E0DA"/>
-                      </a:solidFill>
-                      <a:prstDash val="solid"/>
-                      <a:round/>
-                      <a:headEnd type="none" w="med" len="med"/>
-                      <a:tailEnd type="none" w="med" len="med"/>
-                    </a:lnL>
-                    <a:lnR w="12700" cap="flat" cmpd="sng" algn="ctr">
-                      <a:solidFill>
-                        <a:srgbClr val="D8E0DA"/>
-                      </a:solidFill>
-                      <a:prstDash val="solid"/>
-                      <a:round/>
-                      <a:headEnd type="none" w="med" len="med"/>
-                      <a:tailEnd type="none" w="med" len="med"/>
-                    </a:lnR>
-                    <a:lnT w="12700" cap="flat" cmpd="sng" algn="ctr">
-                      <a:solidFill>
-                        <a:srgbClr val="D8E0DA"/>
-                      </a:solidFill>
-                      <a:prstDash val="solid"/>
-                      <a:round/>
-                      <a:headEnd type="none" w="med" len="med"/>
-                      <a:tailEnd type="none" w="med" len="med"/>
-                    </a:lnT>
-                    <a:lnB w="12700" cap="flat" cmpd="sng" algn="ctr">
-                      <a:solidFill>
-                        <a:srgbClr val="D8E0DA"/>
-                      </a:solidFill>
-                      <a:prstDash val="solid"/>
-                      <a:round/>
-                      <a:headEnd type="none" w="med" len="med"/>
-                      <a:tailEnd type="none" w="med" len="med"/>
-                    </a:lnB>
-                  </a:tcPr>
-                </a:tc>
-              </a:tr>
-              <a:tr h="347472">
-                <a:tc>
-                  <a:txBody>
-                    <a:bodyPr/>
-                    <a:lstStyle/>
-                    <a:p>
-                      <a:pPr algn="l" indent="0" marL="0">
-                        <a:buNone/>
-                      </a:pPr>
-                      <a:r>
-                        <a:rPr lang="en-US" sz="1100" b="1" dirty="0">
-                          <a:solidFill>
-                            <a:srgbClr val="1F2A24"/>
-                          </a:solidFill>
-                          <a:latin typeface="맑은 고딕" pitchFamily="34" charset="0"/>
-                          <a:ea typeface="맑은 고딕" pitchFamily="34" charset="-122"/>
-                          <a:cs typeface="맑은 고딕" pitchFamily="34" charset="-120"/>
-                        </a:rPr>
-                        <a:t>통신판매업신고번호</a:t>
-                      </a:r>
-                      <a:endParaRPr lang="en-US" sz="1100" dirty="0">
-                        <a:latin typeface="맑은 고딕" charset="0"/>
-                        <a:ea typeface="맑은 고딕" charset="0"/>
-                        <a:cs typeface="맑은 고딕" charset="0"/>
-                      </a:endParaRPr>
-                    </a:p>
-                  </a:txBody>
-                  <a:tcPr marL="91440" marR="91440" marT="91440" marB="91440" anchor="ctr">
-                    <a:lnL w="12700" cap="flat" cmpd="sng" algn="ctr">
-                      <a:solidFill>
-                        <a:srgbClr val="D8E0DA"/>
-                      </a:solidFill>
-                      <a:prstDash val="solid"/>
-                      <a:round/>
-                      <a:headEnd type="none" w="med" len="med"/>
-                      <a:tailEnd type="none" w="med" len="med"/>
-                    </a:lnL>
-                    <a:lnR w="12700" cap="flat" cmpd="sng" algn="ctr">
-                      <a:solidFill>
-                        <a:srgbClr val="D8E0DA"/>
-                      </a:solidFill>
-                      <a:prstDash val="solid"/>
-                      <a:round/>
-                      <a:headEnd type="none" w="med" len="med"/>
-                      <a:tailEnd type="none" w="med" len="med"/>
-                    </a:lnR>
-                    <a:lnT w="12700" cap="flat" cmpd="sng" algn="ctr">
-                      <a:solidFill>
-                        <a:srgbClr val="D8E0DA"/>
-                      </a:solidFill>
-                      <a:prstDash val="solid"/>
-                      <a:round/>
-                      <a:headEnd type="none" w="med" len="med"/>
-                      <a:tailEnd type="none" w="med" len="med"/>
-                    </a:lnT>
-                    <a:lnB w="12700" cap="flat" cmpd="sng" algn="ctr">
-                      <a:solidFill>
-                        <a:srgbClr val="D8E0DA"/>
-                      </a:solidFill>
-                      <a:prstDash val="solid"/>
-                      <a:round/>
-                      <a:headEnd type="none" w="med" len="med"/>
-                      <a:tailEnd type="none" w="med" len="med"/>
-                    </a:lnB>
-                    <a:solidFill>
-                      <a:srgbClr val="F1F5F2"/>
-                    </a:solidFill>
-                  </a:tcPr>
-                </a:tc>
-                <a:tc>
-                  <a:txBody>
-                    <a:bodyPr/>
-                    <a:lstStyle/>
-                    <a:p>
-                      <a:pPr algn="l" indent="0" marL="0">
-                        <a:buNone/>
-                      </a:pPr>
-                      <a:r>
-                        <a:rPr lang="en-US" sz="1100" dirty="0">
-                          <a:solidFill>
-                            <a:srgbClr val="1F2A24"/>
-                          </a:solidFill>
-                          <a:latin typeface="맑은 고딕" pitchFamily="34" charset="0"/>
-                          <a:ea typeface="맑은 고딕" pitchFamily="34" charset="-122"/>
-                          <a:cs typeface="맑은 고딕" pitchFamily="34" charset="-120"/>
-                        </a:rPr>
-                        <a:t>제 2025-서울송파-2552 호</a:t>
-                      </a:r>
-                      <a:endParaRPr lang="en-US" sz="1100" dirty="0">
-                        <a:latin typeface="맑은 고딕" charset="0"/>
-                        <a:ea typeface="맑은 고딕" charset="0"/>
-                        <a:cs typeface="맑은 고딕" charset="0"/>
-                      </a:endParaRPr>
-                    </a:p>
-                  </a:txBody>
-                  <a:tcPr marL="91440" marR="91440" marT="91440" marB="91440" anchor="ctr">
-                    <a:lnL w="12700" cap="flat" cmpd="sng" algn="ctr">
-                      <a:solidFill>
-                        <a:srgbClr val="D8E0DA"/>
-                      </a:solidFill>
-                      <a:prstDash val="solid"/>
-                      <a:round/>
-                      <a:headEnd type="none" w="med" len="med"/>
-                      <a:tailEnd type="none" w="med" len="med"/>
-                    </a:lnL>
-                    <a:lnR w="12700" cap="flat" cmpd="sng" algn="ctr">
-                      <a:solidFill>
-                        <a:srgbClr val="D8E0DA"/>
-                      </a:solidFill>
-                      <a:prstDash val="solid"/>
-                      <a:round/>
-                      <a:headEnd type="none" w="med" len="med"/>
-                      <a:tailEnd type="none" w="med" len="med"/>
-                    </a:lnR>
-                    <a:lnT w="12700" cap="flat" cmpd="sng" algn="ctr">
-                      <a:solidFill>
-                        <a:srgbClr val="D8E0DA"/>
-                      </a:solidFill>
-                      <a:prstDash val="solid"/>
-                      <a:round/>
-                      <a:headEnd type="none" w="med" len="med"/>
-                      <a:tailEnd type="none" w="med" len="med"/>
-                    </a:lnT>
-                    <a:lnB w="12700" cap="flat" cmpd="sng" algn="ctr">
-                      <a:solidFill>
-                        <a:srgbClr val="D8E0DA"/>
-                      </a:solidFill>
-                      <a:prstDash val="solid"/>
-                      <a:round/>
-                      <a:headEnd type="none" w="med" len="med"/>
-                      <a:tailEnd type="none" w="med" len="med"/>
-                    </a:lnB>
-                  </a:tcPr>
-                </a:tc>
-              </a:tr>
-              <a:tr h="347472">
-                <a:tc>
-                  <a:txBody>
-                    <a:bodyPr/>
-                    <a:lstStyle/>
-                    <a:p>
-                      <a:pPr algn="l" indent="0" marL="0">
-                        <a:buNone/>
-                      </a:pPr>
-                      <a:r>
-                        <a:rPr lang="en-US" sz="1100" b="1" dirty="0">
-                          <a:solidFill>
-                            <a:srgbClr val="1F2A24"/>
-                          </a:solidFill>
-                          <a:latin typeface="맑은 고딕" pitchFamily="34" charset="0"/>
-                          <a:ea typeface="맑은 고딕" pitchFamily="34" charset="-122"/>
-                          <a:cs typeface="맑은 고딕" pitchFamily="34" charset="-120"/>
-                        </a:rPr>
-                        <a:t>고객문의</a:t>
-                      </a:r>
-                      <a:endParaRPr lang="en-US" sz="1100" dirty="0">
-                        <a:latin typeface="맑은 고딕" charset="0"/>
-                        <a:ea typeface="맑은 고딕" charset="0"/>
-                        <a:cs typeface="맑은 고딕" charset="0"/>
-                      </a:endParaRPr>
-                    </a:p>
-                  </a:txBody>
-                  <a:tcPr marL="91440" marR="91440" marT="91440" marB="91440" anchor="ctr">
-                    <a:lnL w="12700" cap="flat" cmpd="sng" algn="ctr">
-                      <a:solidFill>
-                        <a:srgbClr val="D8E0DA"/>
-                      </a:solidFill>
-                      <a:prstDash val="solid"/>
-                      <a:round/>
-                      <a:headEnd type="none" w="med" len="med"/>
-                      <a:tailEnd type="none" w="med" len="med"/>
-                    </a:lnL>
-                    <a:lnR w="12700" cap="flat" cmpd="sng" algn="ctr">
-                      <a:solidFill>
-                        <a:srgbClr val="D8E0DA"/>
-                      </a:solidFill>
-                      <a:prstDash val="solid"/>
-                      <a:round/>
-                      <a:headEnd type="none" w="med" len="med"/>
-                      <a:tailEnd type="none" w="med" len="med"/>
-                    </a:lnR>
-                    <a:lnT w="12700" cap="flat" cmpd="sng" algn="ctr">
-                      <a:solidFill>
-                        <a:srgbClr val="D8E0DA"/>
-                      </a:solidFill>
-                      <a:prstDash val="solid"/>
-                      <a:round/>
-                      <a:headEnd type="none" w="med" len="med"/>
-                      <a:tailEnd type="none" w="med" len="med"/>
-                    </a:lnT>
-                    <a:lnB w="12700" cap="flat" cmpd="sng" algn="ctr">
-                      <a:solidFill>
-                        <a:srgbClr val="D8E0DA"/>
-                      </a:solidFill>
-                      <a:prstDash val="solid"/>
-                      <a:round/>
-                      <a:headEnd type="none" w="med" len="med"/>
-                      <a:tailEnd type="none" w="med" len="med"/>
-                    </a:lnB>
-                    <a:solidFill>
-                      <a:srgbClr val="F1F5F2"/>
-                    </a:solidFill>
-                  </a:tcPr>
-                </a:tc>
-                <a:tc>
-                  <a:txBody>
-                    <a:bodyPr/>
-                    <a:lstStyle/>
-                    <a:p>
-                      <a:pPr algn="l" indent="0" marL="0">
-                        <a:buNone/>
-                      </a:pPr>
-                      <a:r>
-                        <a:rPr lang="en-US" sz="1100" dirty="0">
-                          <a:solidFill>
-                            <a:srgbClr val="1F2A24"/>
-                          </a:solidFill>
-                          <a:latin typeface="맑은 고딕" pitchFamily="34" charset="0"/>
-                          <a:ea typeface="맑은 고딕" pitchFamily="34" charset="-122"/>
-                          <a:cs typeface="맑은 고딕" pitchFamily="34" charset="-120"/>
-                        </a:rPr>
-                        <a:t>support@barosit.com</a:t>
-                      </a:r>
-                      <a:endParaRPr lang="en-US" sz="1100" dirty="0">
-                        <a:latin typeface="맑은 고딕" charset="0"/>
-                        <a:ea typeface="맑은 고딕" charset="0"/>
-                        <a:cs typeface="맑은 고딕" charset="0"/>
-                      </a:endParaRPr>
-                    </a:p>
-                  </a:txBody>
-                  <a:tcPr marL="91440" marR="91440" marT="91440" marB="91440" anchor="ctr">
-                    <a:lnL w="12700" cap="flat" cmpd="sng" algn="ctr">
-                      <a:solidFill>
-                        <a:srgbClr val="D8E0DA"/>
-                      </a:solidFill>
-                      <a:prstDash val="solid"/>
-                      <a:round/>
-                      <a:headEnd type="none" w="med" len="med"/>
-                      <a:tailEnd type="none" w="med" len="med"/>
-                    </a:lnL>
-                    <a:lnR w="12700" cap="flat" cmpd="sng" algn="ctr">
-                      <a:solidFill>
-                        <a:srgbClr val="D8E0DA"/>
-                      </a:solidFill>
-                      <a:prstDash val="solid"/>
-                      <a:round/>
-                      <a:headEnd type="none" w="med" len="med"/>
-                      <a:tailEnd type="none" w="med" len="med"/>
-                    </a:lnR>
-                    <a:lnT w="12700" cap="flat" cmpd="sng" algn="ctr">
-                      <a:solidFill>
-                        <a:srgbClr val="D8E0DA"/>
-                      </a:solidFill>
-                      <a:prstDash val="solid"/>
-                      <a:round/>
-                      <a:headEnd type="none" w="med" len="med"/>
-                      <a:tailEnd type="none" w="med" len="med"/>
-                    </a:lnT>
-                    <a:lnB w="12700" cap="flat" cmpd="sng" algn="ctr">
-                      <a:solidFill>
-                        <a:srgbClr val="D8E0DA"/>
-                      </a:solidFill>
-                      <a:prstDash val="solid"/>
-                      <a:round/>
-                      <a:headEnd type="none" w="med" len="med"/>
-                      <a:tailEnd type="none" w="med" len="med"/>
-                    </a:lnB>
-                  </a:tcPr>
-                </a:tc>
-              </a:tr>
-            </a:tbl>
-          </a:graphicData>
-        </a:graphic>
-      </p:graphicFrame>
-      <p:sp>
-        <p:nvSpPr>
-          <p:cNvPr id="4" name="Shape 1"/>
-          <p:cNvSpPr/>
-          <p:nvPr/>
-        </p:nvSpPr>
-        <p:spPr>
-          <a:xfrm>
-            <a:off x="457200" y="3429000"/>
-            <a:ext cx="8229600" cy="1051560"/>
-          </a:xfrm>
-          <a:prstGeom prst="rect">
-            <a:avLst/>
-          </a:prstGeom>
-          <a:solidFill>
-            <a:srgbClr val="F1F5F2"/>
-          </a:solidFill>
-          <a:ln w="12700">
-            <a:solidFill>
-              <a:srgbClr val="D8E0DA"/>
-            </a:solidFill>
-            <a:prstDash val="dash"/>
-          </a:ln>
-        </p:spPr>
-      </p:sp>
-      <p:sp>
-        <p:nvSpPr>
-          <p:cNvPr id="5" name="Text 2"/>
-          <p:cNvSpPr/>
-          <p:nvPr/>
-        </p:nvSpPr>
-        <p:spPr>
-          <a:xfrm>
-            <a:off x="457200" y="3643884"/>
-            <a:ext cx="8229600" cy="274320"/>
+                <a:latin typeface="맑은 고딕"/>
+              </a:rPr>
+              <a:t>환불정책 화면 (홈페이지 게시)</a:t>
+            </a:r>
+          </a:p>
+        </p:txBody>
+      </p:sp>
+      <p:sp>
+        <p:nvSpPr>
+          <p:cNvPr id="3" name="TextBox 2"/>
+          <p:cNvSpPr txBox="1"/>
+          <p:nvPr/>
+        </p:nvSpPr>
+        <p:spPr>
+          <a:xfrm>
+            <a:off x="457200" y="841248"/>
+            <a:ext cx="8229600" cy="256032"/>
           </a:xfrm>
           <a:prstGeom prst="rect">
             <a:avLst/>
           </a:prstGeom>
           <a:noFill/>
-          <a:ln/>
-        </p:spPr>
-        <p:txBody>
-          <a:bodyPr wrap="square" lIns="0" tIns="0" rIns="0" bIns="0" rtlCol="0" anchor="ctr"/>
-          <a:lstStyle/>
-          <a:p>
-            <a:pPr algn="ctr" indent="0" marL="0">
-              <a:buNone/>
-            </a:pPr>
-            <a:r>
-              <a:rPr lang="en-US" sz="1200" b="1" dirty="0">
+        </p:spPr>
+        <p:txBody>
+          <a:bodyPr wrap="square">
+            <a:spAutoFit/>
+          </a:bodyPr>
+          <a:lstStyle/>
+          <a:p>
+            <a:pPr algn="l"/>
+            <a:r>
+              <a:rPr sz="1000" b="0">
                 <a:solidFill>
                   <a:srgbClr val="6B7A72"/>
                 </a:solidFill>
-                <a:latin typeface="맑은 고딕" pitchFamily="34" charset="0"/>
-                <a:ea typeface="맑은 고딕" pitchFamily="34" charset="-122"/>
-                <a:cs typeface="맑은 고딕" pitchFamily="34" charset="-120"/>
-              </a:rPr>
-              <a:t>화면 캡처 삽입</a:t>
-            </a:r>
-            <a:endParaRPr lang="en-US" sz="1200" dirty="0"/>
-          </a:p>
-        </p:txBody>
-      </p:sp>
-      <p:sp>
-        <p:nvSpPr>
-          <p:cNvPr id="6" name="Text 3"/>
-          <p:cNvSpPr/>
-          <p:nvPr/>
-        </p:nvSpPr>
-        <p:spPr>
-          <a:xfrm>
-            <a:off x="640080" y="3936492"/>
-            <a:ext cx="7863840" cy="548640"/>
+                <a:latin typeface="맑은 고딕"/>
+              </a:rPr>
+              <a:t>게시 위치 : https://barosit.com/#/refund  — 로그인 없이 누구나 열람 가능</a:t>
+            </a:r>
+          </a:p>
+        </p:txBody>
+      </p:sp>
+      <p:pic>
+        <p:nvPicPr>
+          <p:cNvPr id="4" name="Picture 3" descr="refund-top.png"/>
+          <p:cNvPicPr>
+            <a:picLocks noChangeAspect="1"/>
+          </p:cNvPicPr>
+          <p:nvPr/>
+        </p:nvPicPr>
+        <p:blipFill>
+          <a:blip r:embed="rId2"/>
+          <a:stretch>
+            <a:fillRect/>
+          </a:stretch>
+        </p:blipFill>
+        <p:spPr>
+          <a:xfrm>
+            <a:off x="530352" y="1345597"/>
+            <a:ext cx="3831335" cy="2155125"/>
+          </a:xfrm>
+          <a:prstGeom prst="rect">
+            <a:avLst/>
+          </a:prstGeom>
+        </p:spPr>
+      </p:pic>
+      <p:sp>
+        <p:nvSpPr>
+          <p:cNvPr id="5" name="TextBox 4"/>
+          <p:cNvSpPr txBox="1"/>
+          <p:nvPr/>
+        </p:nvSpPr>
+        <p:spPr>
+          <a:xfrm>
+            <a:off x="457200" y="3703320"/>
+            <a:ext cx="3977639" cy="457200"/>
           </a:xfrm>
           <a:prstGeom prst="rect">
             <a:avLst/>
           </a:prstGeom>
           <a:noFill/>
-          <a:ln/>
-        </p:spPr>
-        <p:txBody>
-          <a:bodyPr wrap="square" lIns="0" tIns="0" rIns="0" bIns="0" rtlCol="0" anchor="t"/>
-          <a:lstStyle/>
-          <a:p>
-            <a:pPr algn="ctr" indent="0" marL="0">
-              <a:buNone/>
-            </a:pPr>
-            <a:r>
-              <a:rPr lang="en-US" sz="900" dirty="0">
+        </p:spPr>
+        <p:txBody>
+          <a:bodyPr wrap="square">
+            <a:spAutoFit/>
+          </a:bodyPr>
+          <a:lstStyle/>
+          <a:p>
+            <a:pPr algn="l"/>
+            <a:r>
+              <a:rPr sz="900" b="0">
                 <a:solidFill>
                   <a:srgbClr val="6B7A72"/>
                 </a:solidFill>
-                <a:latin typeface="맑은 고딕" pitchFamily="34" charset="0"/>
-                <a:ea typeface="맑은 고딕" pitchFamily="34" charset="-122"/>
-                <a:cs typeface="맑은 고딕" pitchFamily="34" charset="-120"/>
-              </a:rPr>
-              <a:t>홈페이지 하단 사업자정보 영역 캡처</a:t>
-            </a:r>
-            <a:endParaRPr lang="en-US" sz="900" dirty="0"/>
-          </a:p>
-        </p:txBody>
-      </p:sp>
-      <p:sp>
-        <p:nvSpPr>
-          <p:cNvPr id="7" name="Text 4"/>
-          <p:cNvSpPr/>
+                <a:latin typeface="맑은 고딕"/>
+              </a:rPr>
+              <a:t>상단 : 유료 구독 상품·요금, 청약철회(7일) 기준</a:t>
+            </a:r>
+          </a:p>
+        </p:txBody>
+      </p:sp>
+      <p:pic>
+        <p:nvPicPr>
+          <p:cNvPr id="6" name="Picture 5" descr="refund-bottom.png"/>
+          <p:cNvPicPr>
+            <a:picLocks noChangeAspect="1"/>
+          </p:cNvPicPr>
+          <p:nvPr/>
+        </p:nvPicPr>
+        <p:blipFill>
+          <a:blip r:embed="rId3"/>
+          <a:stretch>
+            <a:fillRect/>
+          </a:stretch>
+        </p:blipFill>
+        <p:spPr>
+          <a:xfrm>
+            <a:off x="4782312" y="1345597"/>
+            <a:ext cx="3831335" cy="2155125"/>
+          </a:xfrm>
+          <a:prstGeom prst="rect">
+            <a:avLst/>
+          </a:prstGeom>
+        </p:spPr>
+      </p:pic>
+      <p:sp>
+        <p:nvSpPr>
+          <p:cNvPr id="7" name="TextBox 6"/>
+          <p:cNvSpPr txBox="1"/>
+          <p:nvPr/>
+        </p:nvSpPr>
+        <p:spPr>
+          <a:xfrm>
+            <a:off x="4709160" y="3703320"/>
+            <a:ext cx="3977639" cy="457200"/>
+          </a:xfrm>
+          <a:prstGeom prst="rect">
+            <a:avLst/>
+          </a:prstGeom>
+          <a:noFill/>
+        </p:spPr>
+        <p:txBody>
+          <a:bodyPr wrap="square">
+            <a:spAutoFit/>
+          </a:bodyPr>
+          <a:lstStyle/>
+          <a:p>
+            <a:pPr algn="l"/>
+            <a:r>
+              <a:rPr sz="900" b="0">
+                <a:solidFill>
+                  <a:srgbClr val="6B7A72"/>
+                </a:solidFill>
+                <a:latin typeface="맑은 고딕"/>
+              </a:rPr>
+              <a:t>하단 : 중도 환불 산정식, 구독 해지, 접수 경로, 사업자정보</a:t>
+            </a:r>
+          </a:p>
+        </p:txBody>
+      </p:sp>
+      <p:sp>
+        <p:nvSpPr>
+          <p:cNvPr id="8" name="TextBox 7"/>
+          <p:cNvSpPr txBox="1"/>
           <p:nvPr/>
         </p:nvSpPr>
         <p:spPr>
@@ -4241,34 +5986,30 @@
             <a:avLst/>
           </a:prstGeom>
           <a:noFill/>
-          <a:ln/>
-        </p:spPr>
-        <p:txBody>
-          <a:bodyPr wrap="square" lIns="0" tIns="0" rIns="0" bIns="0" rtlCol="0" anchor="ctr"/>
-          <a:lstStyle/>
-          <a:p>
-            <a:pPr algn="l" indent="0" marL="0">
-              <a:buNone/>
-            </a:pPr>
-            <a:r>
-              <a:rPr lang="en-US" sz="800" dirty="0">
+        </p:spPr>
+        <p:txBody>
+          <a:bodyPr wrap="square">
+            <a:spAutoFit/>
+          </a:bodyPr>
+          <a:lstStyle/>
+          <a:p>
+            <a:pPr algn="l"/>
+            <a:r>
+              <a:rPr sz="800" b="0">
                 <a:solidFill>
                   <a:srgbClr val="6B7A72"/>
                 </a:solidFill>
-                <a:latin typeface="맑은 고딕" pitchFamily="34" charset="0"/>
-                <a:ea typeface="맑은 고딕" pitchFamily="34" charset="-122"/>
-                <a:cs typeface="맑은 고딕" pitchFamily="34" charset="-120"/>
+                <a:latin typeface="맑은 고딕"/>
               </a:rPr>
               <a:t>주식회사 구비드 · 바로씻(BaroSit) · MID bill_barosi69c</a:t>
             </a:r>
-            <a:endParaRPr lang="en-US" sz="800" dirty="0"/>
-          </a:p>
-        </p:txBody>
-      </p:sp>
-      <p:sp>
-        <p:nvSpPr>
-          <p:cNvPr id="8" name="Text 5"/>
-          <p:cNvSpPr/>
+          </a:p>
+        </p:txBody>
+      </p:sp>
+      <p:sp>
+        <p:nvSpPr>
+          <p:cNvPr id="9" name="PageNum"/>
+          <p:cNvSpPr txBox="1"/>
           <p:nvPr/>
         </p:nvSpPr>
         <p:spPr>
@@ -4280,27 +6021,23 @@
             <a:avLst/>
           </a:prstGeom>
           <a:noFill/>
-          <a:ln/>
-        </p:spPr>
-        <p:txBody>
-          <a:bodyPr wrap="square" lIns="0" tIns="0" rIns="0" bIns="0" rtlCol="0" anchor="ctr"/>
-          <a:lstStyle/>
-          <a:p>
-            <a:pPr algn="r" indent="0" marL="0">
-              <a:buNone/>
-            </a:pPr>
-            <a:r>
-              <a:rPr lang="en-US" sz="800" dirty="0">
+        </p:spPr>
+        <p:txBody>
+          <a:bodyPr wrap="square">
+            <a:spAutoFit/>
+          </a:bodyPr>
+          <a:lstStyle/>
+          <a:p>
+            <a:pPr algn="r"/>
+            <a:r>
+              <a:rPr sz="800" b="0">
                 <a:solidFill>
                   <a:srgbClr val="6B7A72"/>
                 </a:solidFill>
-                <a:latin typeface="맑은 고딕" pitchFamily="34" charset="0"/>
-                <a:ea typeface="맑은 고딕" pitchFamily="34" charset="-122"/>
-                <a:cs typeface="맑은 고딕" pitchFamily="34" charset="-120"/>
-              </a:rPr>
-              <a:t>2</a:t>
-            </a:r>
-            <a:endParaRPr lang="en-US" sz="800" dirty="0"/>
+                <a:latin typeface="맑은 고딕"/>
+              </a:rPr>
+              <a:t>4</a:t>
+            </a:r>
           </a:p>
         </p:txBody>
       </p:sp>
@@ -4312,7 +6049,7 @@
 </p:sld>
 </file>
 
-<file path=ppt/slides/slide2.xml><?xml version="1.0" encoding="utf-8"?>
+<file path=ppt/slides/slide5.xml><?xml version="1.0" encoding="utf-8"?>
 <p:sld xmlns:a="http://schemas.openxmlformats.org/drawingml/2006/main" xmlns:r="http://schemas.openxmlformats.org/officeDocument/2006/relationships" xmlns:p="http://schemas.openxmlformats.org/presentationml/2006/main">
   <p:cSld name="Slide 2">
     <p:bg>
@@ -5268,6 +7005,10 @@
             <a:prstDash val="solid"/>
           </a:ln>
         </p:spPr>
+        <p:txBody>
+          <a:bodyPr/>
+          <a:p/>
+        </p:txBody>
       </p:sp>
       <p:sp>
         <p:nvSpPr>
@@ -5426,6 +7167,10 @@
             <a:prstDash val="solid"/>
           </a:ln>
         </p:spPr>
+        <p:txBody>
+          <a:bodyPr/>
+          <a:p/>
+        </p:txBody>
       </p:sp>
       <p:sp>
         <p:nvSpPr>
@@ -5656,7 +7401,7 @@
                 <a:ea typeface="맑은 고딕" pitchFamily="34" charset="-122"/>
                 <a:cs typeface="맑은 고딕" pitchFamily="34" charset="-120"/>
               </a:rPr>
-              <a:t>4</a:t>
+              <a:t>5</a:t>
             </a:r>
             <a:endParaRPr lang="en-US" sz="800" dirty="0"/>
           </a:p>
@@ -5670,7 +7415,7 @@
 </p:sld>
 </file>
 
-<file path=ppt/slides/slide3.xml><?xml version="1.0" encoding="utf-8"?>
+<file path=ppt/slides/slide6.xml><?xml version="1.0" encoding="utf-8"?>
 <p:sld xmlns:a="http://schemas.openxmlformats.org/drawingml/2006/main" xmlns:r="http://schemas.openxmlformats.org/officeDocument/2006/relationships" xmlns:p="http://schemas.openxmlformats.org/presentationml/2006/main">
   <p:cSld name="Slide 3">
     <p:bg>
@@ -5715,6 +7460,10 @@
           </a:solidFill>
           <a:ln/>
         </p:spPr>
+        <p:txBody>
+          <a:bodyPr/>
+          <a:p/>
+        </p:txBody>
       </p:sp>
       <p:sp>
         <p:nvSpPr>
@@ -5818,83 +7567,9 @@
             <a:prstDash val="dash"/>
           </a:ln>
         </p:spPr>
-      </p:sp>
-      <p:sp>
-        <p:nvSpPr>
-          <p:cNvPr id="6" name="Text 4"/>
-          <p:cNvSpPr/>
-          <p:nvPr/>
-        </p:nvSpPr>
-        <p:spPr>
-          <a:xfrm>
-            <a:off x="457200" y="2363724"/>
-            <a:ext cx="5074920" cy="274320"/>
-          </a:xfrm>
-          <a:prstGeom prst="rect">
-            <a:avLst/>
-          </a:prstGeom>
-          <a:noFill/>
-          <a:ln/>
-        </p:spPr>
-        <p:txBody>
-          <a:bodyPr wrap="square" lIns="0" tIns="0" rIns="0" bIns="0" rtlCol="0" anchor="ctr"/>
-          <a:lstStyle/>
-          <a:p>
-            <a:pPr algn="ctr" indent="0" marL="0">
-              <a:buNone/>
-            </a:pPr>
-            <a:r>
-              <a:rPr lang="en-US" sz="1200" b="1" dirty="0">
-                <a:solidFill>
-                  <a:srgbClr val="6B7A72"/>
-                </a:solidFill>
-                <a:latin typeface="맑은 고딕" pitchFamily="34" charset="0"/>
-                <a:ea typeface="맑은 고딕" pitchFamily="34" charset="-122"/>
-                <a:cs typeface="맑은 고딕" pitchFamily="34" charset="-120"/>
-              </a:rPr>
-              <a:t>화면 캡처 삽입</a:t>
-            </a:r>
-            <a:endParaRPr lang="en-US" sz="1200" dirty="0"/>
-          </a:p>
-        </p:txBody>
-      </p:sp>
-      <p:sp>
-        <p:nvSpPr>
-          <p:cNvPr id="7" name="Text 5"/>
-          <p:cNvSpPr/>
-          <p:nvPr/>
-        </p:nvSpPr>
-        <p:spPr>
-          <a:xfrm>
-            <a:off x="640080" y="2656332"/>
-            <a:ext cx="4709160" cy="548640"/>
-          </a:xfrm>
-          <a:prstGeom prst="rect">
-            <a:avLst/>
-          </a:prstGeom>
-          <a:noFill/>
-          <a:ln/>
-        </p:spPr>
-        <p:txBody>
-          <a:bodyPr wrap="square" lIns="0" tIns="0" rIns="0" bIns="0" rtlCol="0" anchor="t"/>
-          <a:lstStyle/>
-          <a:p>
-            <a:pPr algn="ctr" indent="0" marL="0">
-              <a:buNone/>
-            </a:pPr>
-            <a:r>
-              <a:rPr lang="en-US" sz="900" dirty="0">
-                <a:solidFill>
-                  <a:srgbClr val="6B7A72"/>
-                </a:solidFill>
-                <a:latin typeface="맑은 고딕" pitchFamily="34" charset="0"/>
-                <a:ea typeface="맑은 고딕" pitchFamily="34" charset="-122"/>
-                <a:cs typeface="맑은 고딕" pitchFamily="34" charset="-120"/>
-              </a:rPr>
-              <a:t>barosit.com 첫 화면 전체 (상단 네비게이션 포함)</a:t>
-            </a:r>
-            <a:endParaRPr lang="en-US" sz="900" dirty="0"/>
-          </a:p>
+        <p:txBody>
+          <a:bodyPr/>
+          <a:p/>
         </p:txBody>
       </p:sp>
       <p:sp>
@@ -6180,12 +7855,36 @@
                 <a:ea typeface="맑은 고딕" pitchFamily="34" charset="-122"/>
                 <a:cs typeface="맑은 고딕" pitchFamily="34" charset="-120"/>
               </a:rPr>
-              <a:t>5</a:t>
+              <a:t>6</a:t>
             </a:r>
             <a:endParaRPr lang="en-US" sz="800" dirty="0"/>
           </a:p>
         </p:txBody>
       </p:sp>
+      <p:pic>
+        <p:nvPicPr>
+          <p:cNvPr id="14" name="Picture 13" descr="step1-landing.png"/>
+          <p:cNvPicPr>
+            <a:picLocks noChangeAspect="1"/>
+          </p:cNvPicPr>
+          <p:nvPr/>
+        </p:nvPicPr>
+        <p:blipFill>
+          <a:blip r:embed="rId3"/>
+          <a:stretch>
+            <a:fillRect/>
+          </a:stretch>
+        </p:blipFill>
+        <p:spPr>
+          <a:xfrm>
+            <a:off x="530352" y="1288447"/>
+            <a:ext cx="4928616" cy="2772346"/>
+          </a:xfrm>
+          <a:prstGeom prst="rect">
+            <a:avLst/>
+          </a:prstGeom>
+        </p:spPr>
+      </p:pic>
     </p:spTree>
   </p:cSld>
   <p:clrMapOvr>
@@ -6194,7 +7893,7 @@
 </p:sld>
 </file>
 
-<file path=ppt/slides/slide4.xml><?xml version="1.0" encoding="utf-8"?>
+<file path=ppt/slides/slide7.xml><?xml version="1.0" encoding="utf-8"?>
 <p:sld xmlns:a="http://schemas.openxmlformats.org/drawingml/2006/main" xmlns:r="http://schemas.openxmlformats.org/officeDocument/2006/relationships" xmlns:p="http://schemas.openxmlformats.org/presentationml/2006/main">
   <p:cSld name="Slide 4">
     <p:bg>
@@ -6239,6 +7938,10 @@
           </a:solidFill>
           <a:ln/>
         </p:spPr>
+        <p:txBody>
+          <a:bodyPr/>
+          <a:p/>
+        </p:txBody>
       </p:sp>
       <p:sp>
         <p:nvSpPr>
@@ -6342,83 +8045,9 @@
             <a:prstDash val="dash"/>
           </a:ln>
         </p:spPr>
-      </p:sp>
-      <p:sp>
-        <p:nvSpPr>
-          <p:cNvPr id="6" name="Text 4"/>
-          <p:cNvSpPr/>
-          <p:nvPr/>
-        </p:nvSpPr>
-        <p:spPr>
-          <a:xfrm>
-            <a:off x="457200" y="2363724"/>
-            <a:ext cx="5074920" cy="274320"/>
-          </a:xfrm>
-          <a:prstGeom prst="rect">
-            <a:avLst/>
-          </a:prstGeom>
-          <a:noFill/>
-          <a:ln/>
-        </p:spPr>
-        <p:txBody>
-          <a:bodyPr wrap="square" lIns="0" tIns="0" rIns="0" bIns="0" rtlCol="0" anchor="ctr"/>
-          <a:lstStyle/>
-          <a:p>
-            <a:pPr algn="ctr" indent="0" marL="0">
-              <a:buNone/>
-            </a:pPr>
-            <a:r>
-              <a:rPr lang="en-US" sz="1200" b="1" dirty="0">
-                <a:solidFill>
-                  <a:srgbClr val="6B7A72"/>
-                </a:solidFill>
-                <a:latin typeface="맑은 고딕" pitchFamily="34" charset="0"/>
-                <a:ea typeface="맑은 고딕" pitchFamily="34" charset="-122"/>
-                <a:cs typeface="맑은 고딕" pitchFamily="34" charset="-120"/>
-              </a:rPr>
-              <a:t>화면 캡처 삽입</a:t>
-            </a:r>
-            <a:endParaRPr lang="en-US" sz="1200" dirty="0"/>
-          </a:p>
-        </p:txBody>
-      </p:sp>
-      <p:sp>
-        <p:nvSpPr>
-          <p:cNvPr id="7" name="Text 5"/>
-          <p:cNvSpPr/>
-          <p:nvPr/>
-        </p:nvSpPr>
-        <p:spPr>
-          <a:xfrm>
-            <a:off x="640080" y="2656332"/>
-            <a:ext cx="4709160" cy="548640"/>
-          </a:xfrm>
-          <a:prstGeom prst="rect">
-            <a:avLst/>
-          </a:prstGeom>
-          <a:noFill/>
-          <a:ln/>
-        </p:spPr>
-        <p:txBody>
-          <a:bodyPr wrap="square" lIns="0" tIns="0" rIns="0" bIns="0" rtlCol="0" anchor="t"/>
-          <a:lstStyle/>
-          <a:p>
-            <a:pPr algn="ctr" indent="0" marL="0">
-              <a:buNone/>
-            </a:pPr>
-            <a:r>
-              <a:rPr lang="en-US" sz="900" dirty="0">
-                <a:solidFill>
-                  <a:srgbClr val="6B7A72"/>
-                </a:solidFill>
-                <a:latin typeface="맑은 고딕" pitchFamily="34" charset="0"/>
-                <a:ea typeface="맑은 고딕" pitchFamily="34" charset="-122"/>
-                <a:cs typeface="맑은 고딕" pitchFamily="34" charset="-120"/>
-              </a:rPr>
-              <a:t>PRO 월간·연간 요금이 모두 보이도록 캡처</a:t>
-            </a:r>
-            <a:endParaRPr lang="en-US" sz="900" dirty="0"/>
-          </a:p>
+        <p:txBody>
+          <a:bodyPr/>
+          <a:p/>
         </p:txBody>
       </p:sp>
       <p:sp>
@@ -6674,7 +8303,7 @@
                 <a:ea typeface="맑은 고딕" pitchFamily="34" charset="-122"/>
                 <a:cs typeface="맑은 고딕" pitchFamily="34" charset="-120"/>
               </a:rPr>
-              <a:t>[구독 시작] 버튼 클릭</a:t>
+              <a:t>[Pro 시작하기] 버튼 클릭</a:t>
             </a:r>
             <a:endParaRPr lang="en-US" sz="1000" dirty="0"/>
           </a:p>
@@ -6752,12 +8381,36 @@
                 <a:ea typeface="맑은 고딕" pitchFamily="34" charset="-122"/>
                 <a:cs typeface="맑은 고딕" pitchFamily="34" charset="-120"/>
               </a:rPr>
-              <a:t>6</a:t>
+              <a:t>7</a:t>
             </a:r>
             <a:endParaRPr lang="en-US" sz="800" dirty="0"/>
           </a:p>
         </p:txBody>
       </p:sp>
+      <p:pic>
+        <p:nvPicPr>
+          <p:cNvPr id="14" name="Picture 13" descr="step2-pricing-monthly.png"/>
+          <p:cNvPicPr>
+            <a:picLocks noChangeAspect="1"/>
+          </p:cNvPicPr>
+          <p:nvPr/>
+        </p:nvPicPr>
+        <p:blipFill>
+          <a:blip r:embed="rId3"/>
+          <a:stretch>
+            <a:fillRect/>
+          </a:stretch>
+        </p:blipFill>
+        <p:spPr>
+          <a:xfrm>
+            <a:off x="530352" y="1288447"/>
+            <a:ext cx="4928616" cy="2772346"/>
+          </a:xfrm>
+          <a:prstGeom prst="rect">
+            <a:avLst/>
+          </a:prstGeom>
+        </p:spPr>
+      </p:pic>
     </p:spTree>
   </p:cSld>
   <p:clrMapOvr>
@@ -6766,7 +8419,7 @@
 </p:sld>
 </file>
 
-<file path=ppt/slides/slide5.xml><?xml version="1.0" encoding="utf-8"?>
+<file path=ppt/slides/slide8.xml><?xml version="1.0" encoding="utf-8"?>
 <p:sld xmlns:a="http://schemas.openxmlformats.org/drawingml/2006/main" xmlns:r="http://schemas.openxmlformats.org/officeDocument/2006/relationships" xmlns:p="http://schemas.openxmlformats.org/presentationml/2006/main">
   <p:cSld name="Slide 5">
     <p:bg>
@@ -6811,6 +8464,10 @@
           </a:solidFill>
           <a:ln/>
         </p:spPr>
+        <p:txBody>
+          <a:bodyPr/>
+          <a:p/>
+        </p:txBody>
       </p:sp>
       <p:sp>
         <p:nvSpPr>
@@ -6914,83 +8571,9 @@
             <a:prstDash val="dash"/>
           </a:ln>
         </p:spPr>
-      </p:sp>
-      <p:sp>
-        <p:nvSpPr>
-          <p:cNvPr id="6" name="Text 4"/>
-          <p:cNvSpPr/>
-          <p:nvPr/>
-        </p:nvSpPr>
-        <p:spPr>
-          <a:xfrm>
-            <a:off x="457200" y="2363724"/>
-            <a:ext cx="5074920" cy="274320"/>
-          </a:xfrm>
-          <a:prstGeom prst="rect">
-            <a:avLst/>
-          </a:prstGeom>
-          <a:noFill/>
-          <a:ln/>
-        </p:spPr>
-        <p:txBody>
-          <a:bodyPr wrap="square" lIns="0" tIns="0" rIns="0" bIns="0" rtlCol="0" anchor="ctr"/>
-          <a:lstStyle/>
-          <a:p>
-            <a:pPr algn="ctr" indent="0" marL="0">
-              <a:buNone/>
-            </a:pPr>
-            <a:r>
-              <a:rPr lang="en-US" sz="1200" b="1" dirty="0">
-                <a:solidFill>
-                  <a:srgbClr val="6B7A72"/>
-                </a:solidFill>
-                <a:latin typeface="맑은 고딕" pitchFamily="34" charset="0"/>
-                <a:ea typeface="맑은 고딕" pitchFamily="34" charset="-122"/>
-                <a:cs typeface="맑은 고딕" pitchFamily="34" charset="-120"/>
-              </a:rPr>
-              <a:t>화면 캡처 삽입</a:t>
-            </a:r>
-            <a:endParaRPr lang="en-US" sz="1200" dirty="0"/>
-          </a:p>
-        </p:txBody>
-      </p:sp>
-      <p:sp>
-        <p:nvSpPr>
-          <p:cNvPr id="7" name="Text 5"/>
-          <p:cNvSpPr/>
-          <p:nvPr/>
-        </p:nvSpPr>
-        <p:spPr>
-          <a:xfrm>
-            <a:off x="640080" y="2656332"/>
-            <a:ext cx="4709160" cy="548640"/>
-          </a:xfrm>
-          <a:prstGeom prst="rect">
-            <a:avLst/>
-          </a:prstGeom>
-          <a:noFill/>
-          <a:ln/>
-        </p:spPr>
-        <p:txBody>
-          <a:bodyPr wrap="square" lIns="0" tIns="0" rIns="0" bIns="0" rtlCol="0" anchor="t"/>
-          <a:lstStyle/>
-          <a:p>
-            <a:pPr algn="ctr" indent="0" marL="0">
-              <a:buNone/>
-            </a:pPr>
-            <a:r>
-              <a:rPr lang="en-US" sz="900" dirty="0">
-                <a:solidFill>
-                  <a:srgbClr val="6B7A72"/>
-                </a:solidFill>
-                <a:latin typeface="맑은 고딕" pitchFamily="34" charset="0"/>
-                <a:ea typeface="맑은 고딕" pitchFamily="34" charset="-122"/>
-                <a:cs typeface="맑은 고딕" pitchFamily="34" charset="-120"/>
-              </a:rPr>
-              <a:t>로그인 화면 (소셜 로그인 버튼 포함)</a:t>
-            </a:r>
-            <a:endParaRPr lang="en-US" sz="900" dirty="0"/>
-          </a:p>
+        <p:txBody>
+          <a:bodyPr/>
+          <a:p/>
         </p:txBody>
       </p:sp>
       <p:sp>
@@ -7300,12 +8883,36 @@
                 <a:ea typeface="맑은 고딕" pitchFamily="34" charset="-122"/>
                 <a:cs typeface="맑은 고딕" pitchFamily="34" charset="-120"/>
               </a:rPr>
-              <a:t>7</a:t>
+              <a:t>8</a:t>
             </a:r>
             <a:endParaRPr lang="en-US" sz="800" dirty="0"/>
           </a:p>
         </p:txBody>
       </p:sp>
+      <p:pic>
+        <p:nvPicPr>
+          <p:cNvPr id="14" name="Picture 13" descr="step3-login.png"/>
+          <p:cNvPicPr>
+            <a:picLocks noChangeAspect="1"/>
+          </p:cNvPicPr>
+          <p:nvPr/>
+        </p:nvPicPr>
+        <p:blipFill>
+          <a:blip r:embed="rId3"/>
+          <a:stretch>
+            <a:fillRect/>
+          </a:stretch>
+        </p:blipFill>
+        <p:spPr>
+          <a:xfrm>
+            <a:off x="530352" y="1288447"/>
+            <a:ext cx="4928616" cy="2772346"/>
+          </a:xfrm>
+          <a:prstGeom prst="rect">
+            <a:avLst/>
+          </a:prstGeom>
+        </p:spPr>
+      </p:pic>
     </p:spTree>
   </p:cSld>
   <p:clrMapOvr>
@@ -7314,7 +8921,7 @@
 </p:sld>
 </file>
 
-<file path=ppt/slides/slide6.xml><?xml version="1.0" encoding="utf-8"?>
+<file path=ppt/slides/slide9.xml><?xml version="1.0" encoding="utf-8"?>
 <p:sld xmlns:a="http://schemas.openxmlformats.org/drawingml/2006/main" xmlns:r="http://schemas.openxmlformats.org/officeDocument/2006/relationships" xmlns:p="http://schemas.openxmlformats.org/presentationml/2006/main">
   <p:cSld name="Slide 6">
     <p:bg>
@@ -7359,6 +8966,10 @@
           </a:solidFill>
           <a:ln/>
         </p:spPr>
+        <p:txBody>
+          <a:bodyPr/>
+          <a:p/>
+        </p:txBody>
       </p:sp>
       <p:sp>
         <p:nvSpPr>
@@ -7462,83 +9073,9 @@
             <a:prstDash val="dash"/>
           </a:ln>
         </p:spPr>
-      </p:sp>
-      <p:sp>
-        <p:nvSpPr>
-          <p:cNvPr id="6" name="Text 4"/>
-          <p:cNvSpPr/>
-          <p:nvPr/>
-        </p:nvSpPr>
-        <p:spPr>
-          <a:xfrm>
-            <a:off x="457200" y="2363724"/>
-            <a:ext cx="5074920" cy="274320"/>
-          </a:xfrm>
-          <a:prstGeom prst="rect">
-            <a:avLst/>
-          </a:prstGeom>
-          <a:noFill/>
-          <a:ln/>
-        </p:spPr>
-        <p:txBody>
-          <a:bodyPr wrap="square" lIns="0" tIns="0" rIns="0" bIns="0" rtlCol="0" anchor="ctr"/>
-          <a:lstStyle/>
-          <a:p>
-            <a:pPr algn="ctr" indent="0" marL="0">
-              <a:buNone/>
-            </a:pPr>
-            <a:r>
-              <a:rPr lang="en-US" sz="1200" b="1" dirty="0">
-                <a:solidFill>
-                  <a:srgbClr val="6B7A72"/>
-                </a:solidFill>
-                <a:latin typeface="맑은 고딕" pitchFamily="34" charset="0"/>
-                <a:ea typeface="맑은 고딕" pitchFamily="34" charset="-122"/>
-                <a:cs typeface="맑은 고딕" pitchFamily="34" charset="-120"/>
-              </a:rPr>
-              <a:t>화면 캡처 삽입</a:t>
-            </a:r>
-            <a:endParaRPr lang="en-US" sz="1200" dirty="0"/>
-          </a:p>
-        </p:txBody>
-      </p:sp>
-      <p:sp>
-        <p:nvSpPr>
-          <p:cNvPr id="7" name="Text 5"/>
-          <p:cNvSpPr/>
-          <p:nvPr/>
-        </p:nvSpPr>
-        <p:spPr>
-          <a:xfrm>
-            <a:off x="640080" y="2656332"/>
-            <a:ext cx="4709160" cy="548640"/>
-          </a:xfrm>
-          <a:prstGeom prst="rect">
-            <a:avLst/>
-          </a:prstGeom>
-          <a:noFill/>
-          <a:ln/>
-        </p:spPr>
-        <p:txBody>
-          <a:bodyPr wrap="square" lIns="0" tIns="0" rIns="0" bIns="0" rtlCol="0" anchor="t"/>
-          <a:lstStyle/>
-          <a:p>
-            <a:pPr algn="ctr" indent="0" marL="0">
-              <a:buNone/>
-            </a:pPr>
-            <a:r>
-              <a:rPr lang="en-US" sz="900" dirty="0">
-                <a:solidFill>
-                  <a:srgbClr val="6B7A72"/>
-                </a:solidFill>
-                <a:latin typeface="맑은 고딕" pitchFamily="34" charset="0"/>
-                <a:ea typeface="맑은 고딕" pitchFamily="34" charset="-122"/>
-                <a:cs typeface="맑은 고딕" pitchFamily="34" charset="-120"/>
-              </a:rPr>
-              <a:t>최종 결제 금액과 주기가 표시된 확인 화면</a:t>
-            </a:r>
-            <a:endParaRPr lang="en-US" sz="900" dirty="0"/>
-          </a:p>
+        <p:txBody>
+          <a:bodyPr/>
+          <a:p/>
         </p:txBody>
       </p:sp>
       <p:sp>
@@ -7746,7 +9283,7 @@
                 <a:ea typeface="맑은 고딕" pitchFamily="34" charset="-122"/>
                 <a:cs typeface="맑은 고딕" pitchFamily="34" charset="-120"/>
               </a:rPr>
-              <a:t>[결제하기] 클릭 시 토스페이먼츠 결제창 호출</a:t>
+              <a:t>[Pro 시작하기] 클릭 시 토스페이먼츠 결제창 호출</a:t>
             </a:r>
             <a:endParaRPr lang="en-US" sz="1000" dirty="0"/>
           </a:p>
@@ -7824,1656 +9361,36 @@
                 <a:ea typeface="맑은 고딕" pitchFamily="34" charset="-122"/>
                 <a:cs typeface="맑은 고딕" pitchFamily="34" charset="-120"/>
               </a:rPr>
-              <a:t>8</a:t>
+              <a:t>9</a:t>
             </a:r>
             <a:endParaRPr lang="en-US" sz="800" dirty="0"/>
           </a:p>
         </p:txBody>
       </p:sp>
-    </p:spTree>
-  </p:cSld>
-  <p:clrMapOvr>
-    <a:masterClrMapping/>
-  </p:clrMapOvr>
-</p:sld>
-</file>
-
-<file path=ppt/slides/slide7.xml><?xml version="1.0" encoding="utf-8"?>
-<p:sld xmlns:a="http://schemas.openxmlformats.org/drawingml/2006/main" xmlns:r="http://schemas.openxmlformats.org/officeDocument/2006/relationships" xmlns:p="http://schemas.openxmlformats.org/presentationml/2006/main">
-  <p:cSld name="Slide 7">
-    <p:bg>
-      <p:bgPr>
-        <a:solidFill>
-          <a:srgbClr val="FFFFFF"/>
-        </a:solidFill>
-      </p:bgPr>
-    </p:bg>
-    <p:spTree>
-      <p:nvGrpSpPr>
-        <p:cNvPr id="1" name=""/>
-        <p:cNvGrpSpPr/>
-        <p:nvPr/>
-      </p:nvGrpSpPr>
-      <p:grpSpPr>
-        <a:xfrm>
-          <a:off x="0" y="0"/>
-          <a:ext cx="0" cy="0"/>
-          <a:chOff x="0" y="0"/>
-          <a:chExt cx="0" cy="0"/>
-        </a:xfrm>
-      </p:grpSpPr>
-      <p:sp>
-        <p:nvSpPr>
-          <p:cNvPr id="2" name="Shape 0"/>
-          <p:cNvSpPr/>
-          <p:nvPr/>
-        </p:nvSpPr>
-        <p:spPr>
-          <a:xfrm>
-            <a:off x="457200" y="329184"/>
-            <a:ext cx="914400" cy="310896"/>
-          </a:xfrm>
-          <a:prstGeom prst="roundRect">
-            <a:avLst>
-              <a:gd name="adj" fmla="val 47059"/>
-            </a:avLst>
-          </a:prstGeom>
-          <a:solidFill>
-            <a:srgbClr val="2F6B4F"/>
-          </a:solidFill>
-          <a:ln/>
-        </p:spPr>
-      </p:sp>
-      <p:sp>
-        <p:nvSpPr>
-          <p:cNvPr id="3" name="Text 1"/>
-          <p:cNvSpPr/>
-          <p:nvPr/>
-        </p:nvSpPr>
-        <p:spPr>
-          <a:xfrm>
-            <a:off x="457200" y="329184"/>
-            <a:ext cx="914400" cy="310896"/>
-          </a:xfrm>
-          <a:prstGeom prst="rect">
-            <a:avLst/>
-          </a:prstGeom>
-          <a:noFill/>
-          <a:ln/>
-        </p:spPr>
-        <p:txBody>
-          <a:bodyPr wrap="square" lIns="0" tIns="0" rIns="0" bIns="0" rtlCol="0" anchor="ctr"/>
-          <a:lstStyle/>
-          <a:p>
-            <a:pPr algn="ctr" indent="0" marL="0">
-              <a:buNone/>
-            </a:pPr>
-            <a:r>
-              <a:rPr lang="en-US" sz="1200" b="1" dirty="0">
-                <a:solidFill>
-                  <a:srgbClr val="FFFFFF"/>
-                </a:solidFill>
-                <a:latin typeface="맑은 고딕" pitchFamily="34" charset="0"/>
-                <a:ea typeface="맑은 고딕" pitchFamily="34" charset="-122"/>
-                <a:cs typeface="맑은 고딕" pitchFamily="34" charset="-120"/>
-              </a:rPr>
-              <a:t>STEP 5</a:t>
-            </a:r>
-            <a:endParaRPr lang="en-US" sz="1200" dirty="0"/>
-          </a:p>
-        </p:txBody>
-      </p:sp>
-      <p:sp>
-        <p:nvSpPr>
-          <p:cNvPr id="4" name="Text 2"/>
-          <p:cNvSpPr/>
-          <p:nvPr/>
-        </p:nvSpPr>
-        <p:spPr>
-          <a:xfrm>
-            <a:off x="1508760" y="292608"/>
-            <a:ext cx="7223760" cy="384048"/>
-          </a:xfrm>
-          <a:prstGeom prst="rect">
-            <a:avLst/>
-          </a:prstGeom>
-          <a:noFill/>
-          <a:ln/>
-        </p:spPr>
-        <p:txBody>
-          <a:bodyPr wrap="square" lIns="0" tIns="0" rIns="0" bIns="0" rtlCol="0" anchor="ctr"/>
-          <a:lstStyle/>
-          <a:p>
-            <a:pPr algn="l" indent="0" marL="0">
-              <a:buNone/>
-            </a:pPr>
-            <a:r>
-              <a:rPr lang="en-US" sz="2000" b="1" dirty="0">
-                <a:solidFill>
-                  <a:srgbClr val="1F2A24"/>
-                </a:solidFill>
-                <a:latin typeface="맑은 고딕" pitchFamily="34" charset="0"/>
-                <a:ea typeface="맑은 고딕" pitchFamily="34" charset="-122"/>
-                <a:cs typeface="맑은 고딕" pitchFamily="34" charset="-120"/>
-              </a:rPr>
-              <a:t>토스페이먼츠 카드 등록 (빌링 인증)</a:t>
-            </a:r>
-            <a:endParaRPr lang="en-US" sz="2000" dirty="0"/>
-          </a:p>
-        </p:txBody>
-      </p:sp>
-      <p:sp>
-        <p:nvSpPr>
-          <p:cNvPr id="5" name="Shape 3"/>
-          <p:cNvSpPr/>
-          <p:nvPr/>
-        </p:nvSpPr>
-        <p:spPr>
-          <a:xfrm>
-            <a:off x="457200" y="868680"/>
-            <a:ext cx="5074920" cy="3611880"/>
-          </a:xfrm>
-          <a:prstGeom prst="rect">
-            <a:avLst/>
-          </a:prstGeom>
-          <a:solidFill>
-            <a:srgbClr val="F1F5F2"/>
-          </a:solidFill>
-          <a:ln w="12700">
-            <a:solidFill>
-              <a:srgbClr val="D8E0DA"/>
-            </a:solidFill>
-            <a:prstDash val="dash"/>
-          </a:ln>
-        </p:spPr>
-      </p:sp>
-      <p:sp>
-        <p:nvSpPr>
-          <p:cNvPr id="6" name="Text 4"/>
-          <p:cNvSpPr/>
-          <p:nvPr/>
-        </p:nvSpPr>
-        <p:spPr>
-          <a:xfrm>
-            <a:off x="457200" y="2363724"/>
-            <a:ext cx="5074920" cy="274320"/>
-          </a:xfrm>
-          <a:prstGeom prst="rect">
-            <a:avLst/>
-          </a:prstGeom>
-          <a:noFill/>
-          <a:ln/>
-        </p:spPr>
-        <p:txBody>
-          <a:bodyPr wrap="square" lIns="0" tIns="0" rIns="0" bIns="0" rtlCol="0" anchor="ctr"/>
-          <a:lstStyle/>
-          <a:p>
-            <a:pPr algn="ctr" indent="0" marL="0">
-              <a:buNone/>
-            </a:pPr>
-            <a:r>
-              <a:rPr lang="en-US" sz="1200" b="1" dirty="0">
-                <a:solidFill>
-                  <a:srgbClr val="6B7A72"/>
-                </a:solidFill>
-                <a:latin typeface="맑은 고딕" pitchFamily="34" charset="0"/>
-                <a:ea typeface="맑은 고딕" pitchFamily="34" charset="-122"/>
-                <a:cs typeface="맑은 고딕" pitchFamily="34" charset="-120"/>
-              </a:rPr>
-              <a:t>화면 캡처 삽입</a:t>
-            </a:r>
-            <a:endParaRPr lang="en-US" sz="1200" dirty="0"/>
-          </a:p>
-        </p:txBody>
-      </p:sp>
-      <p:sp>
-        <p:nvSpPr>
-          <p:cNvPr id="7" name="Text 5"/>
-          <p:cNvSpPr/>
-          <p:nvPr/>
-        </p:nvSpPr>
-        <p:spPr>
-          <a:xfrm>
-            <a:off x="640080" y="2656332"/>
-            <a:ext cx="4709160" cy="548640"/>
-          </a:xfrm>
-          <a:prstGeom prst="rect">
-            <a:avLst/>
-          </a:prstGeom>
-          <a:noFill/>
-          <a:ln/>
-        </p:spPr>
-        <p:txBody>
-          <a:bodyPr wrap="square" lIns="0" tIns="0" rIns="0" bIns="0" rtlCol="0" anchor="t"/>
-          <a:lstStyle/>
-          <a:p>
-            <a:pPr algn="ctr" indent="0" marL="0">
-              <a:buNone/>
-            </a:pPr>
-            <a:r>
-              <a:rPr lang="en-US" sz="900" dirty="0">
-                <a:solidFill>
-                  <a:srgbClr val="6B7A72"/>
-                </a:solidFill>
-                <a:latin typeface="맑은 고딕" pitchFamily="34" charset="0"/>
-                <a:ea typeface="맑은 고딕" pitchFamily="34" charset="-122"/>
-                <a:cs typeface="맑은 고딕" pitchFamily="34" charset="-120"/>
-              </a:rPr>
-              <a:t>토스페이먼츠 결제창 (카드정보 입력 화면)</a:t>
-            </a:r>
-            <a:endParaRPr lang="en-US" sz="900" dirty="0"/>
-          </a:p>
-        </p:txBody>
-      </p:sp>
-      <p:sp>
-        <p:nvSpPr>
-          <p:cNvPr id="8" name="Text 6"/>
-          <p:cNvSpPr/>
-          <p:nvPr/>
-        </p:nvSpPr>
-        <p:spPr>
-          <a:xfrm>
-            <a:off x="5760720" y="868680"/>
-            <a:ext cx="2926080" cy="219456"/>
-          </a:xfrm>
-          <a:prstGeom prst="rect">
-            <a:avLst/>
-          </a:prstGeom>
-          <a:noFill/>
-          <a:ln/>
-        </p:spPr>
-        <p:txBody>
-          <a:bodyPr wrap="square" lIns="0" tIns="0" rIns="0" bIns="0" rtlCol="0" anchor="ctr"/>
-          <a:lstStyle/>
-          <a:p>
-            <a:pPr indent="0" marL="0">
-              <a:buNone/>
-            </a:pPr>
-            <a:r>
-              <a:rPr lang="en-US" sz="1000" b="1" dirty="0">
-                <a:solidFill>
-                  <a:srgbClr val="2F6B4F"/>
-                </a:solidFill>
-                <a:latin typeface="맑은 고딕" pitchFamily="34" charset="0"/>
-                <a:ea typeface="맑은 고딕" pitchFamily="34" charset="-122"/>
-                <a:cs typeface="맑은 고딕" pitchFamily="34" charset="-120"/>
-              </a:rPr>
-              <a:t>접속 경로</a:t>
-            </a:r>
-            <a:endParaRPr lang="en-US" sz="1000" dirty="0"/>
-          </a:p>
-        </p:txBody>
-      </p:sp>
-      <p:sp>
-        <p:nvSpPr>
-          <p:cNvPr id="9" name="Text 7"/>
-          <p:cNvSpPr/>
-          <p:nvPr/>
-        </p:nvSpPr>
-        <p:spPr>
-          <a:xfrm>
-            <a:off x="5760720" y="1106424"/>
-            <a:ext cx="2926080" cy="457200"/>
-          </a:xfrm>
-          <a:prstGeom prst="rect">
-            <a:avLst/>
-          </a:prstGeom>
-          <a:noFill/>
-          <a:ln/>
-        </p:spPr>
-        <p:txBody>
-          <a:bodyPr wrap="square" lIns="0" tIns="0" rIns="0" bIns="0" rtlCol="0" anchor="ctr"/>
-          <a:lstStyle/>
-          <a:p>
-            <a:pPr indent="0" marL="0">
-              <a:buNone/>
-            </a:pPr>
-            <a:r>
-              <a:rPr lang="en-US" sz="1000" dirty="0">
-                <a:solidFill>
-                  <a:srgbClr val="1F2A24"/>
-                </a:solidFill>
-                <a:latin typeface="맑은 고딕" pitchFamily="34" charset="0"/>
-                <a:ea typeface="맑은 고딕" pitchFamily="34" charset="-122"/>
-                <a:cs typeface="맑은 고딕" pitchFamily="34" charset="-120"/>
-              </a:rPr>
-              <a:t>토스페이먼츠 결제창 (js.tosspayments.com)</a:t>
-            </a:r>
-            <a:endParaRPr lang="en-US" sz="1000" dirty="0"/>
-          </a:p>
-        </p:txBody>
-      </p:sp>
-      <p:sp>
-        <p:nvSpPr>
-          <p:cNvPr id="10" name="Text 8"/>
-          <p:cNvSpPr/>
-          <p:nvPr/>
-        </p:nvSpPr>
-        <p:spPr>
-          <a:xfrm>
-            <a:off x="5760720" y="1673352"/>
-            <a:ext cx="2926080" cy="219456"/>
-          </a:xfrm>
-          <a:prstGeom prst="rect">
-            <a:avLst/>
-          </a:prstGeom>
-          <a:noFill/>
-          <a:ln/>
-        </p:spPr>
-        <p:txBody>
-          <a:bodyPr wrap="square" lIns="0" tIns="0" rIns="0" bIns="0" rtlCol="0" anchor="ctr"/>
-          <a:lstStyle/>
-          <a:p>
-            <a:pPr indent="0" marL="0">
-              <a:buNone/>
-            </a:pPr>
-            <a:r>
-              <a:rPr lang="en-US" sz="1000" b="1" dirty="0">
-                <a:solidFill>
-                  <a:srgbClr val="2F6B4F"/>
-                </a:solidFill>
-                <a:latin typeface="맑은 고딕" pitchFamily="34" charset="0"/>
-                <a:ea typeface="맑은 고딕" pitchFamily="34" charset="-122"/>
-                <a:cs typeface="맑은 고딕" pitchFamily="34" charset="-120"/>
-              </a:rPr>
-              <a:t>화면 설명</a:t>
-            </a:r>
-            <a:endParaRPr lang="en-US" sz="1000" dirty="0"/>
-          </a:p>
-        </p:txBody>
-      </p:sp>
-      <p:sp>
-        <p:nvSpPr>
-          <p:cNvPr id="11" name="Text 9"/>
-          <p:cNvSpPr/>
-          <p:nvPr/>
-        </p:nvSpPr>
-        <p:spPr>
-          <a:xfrm>
-            <a:off x="5760720" y="1929384"/>
-            <a:ext cx="2926080" cy="2377440"/>
-          </a:xfrm>
-          <a:prstGeom prst="rect">
-            <a:avLst/>
-          </a:prstGeom>
-          <a:noFill/>
-          <a:ln/>
-        </p:spPr>
-        <p:txBody>
-          <a:bodyPr wrap="square" lIns="0" tIns="0" rIns="0" bIns="0" rtlCol="0" anchor="t"/>
-          <a:lstStyle/>
-          <a:p>
-            <a:pPr marL="342900" indent="-342900">
-              <a:lnSpc>
-                <a:spcPct val="125000"/>
-              </a:lnSpc>
-              <a:spcAft>
-                <a:spcPts val="600"/>
-              </a:spcAft>
-              <a:buSzPct val="100000"/>
-              <a:buChar char="•"/>
-            </a:pPr>
-            <a:r>
-              <a:rPr lang="en-US" sz="1000" dirty="0">
-                <a:solidFill>
-                  <a:srgbClr val="1F2A24"/>
-                </a:solidFill>
-                <a:latin typeface="맑은 고딕" pitchFamily="34" charset="0"/>
-                <a:ea typeface="맑은 고딕" pitchFamily="34" charset="-122"/>
-                <a:cs typeface="맑은 고딕" pitchFamily="34" charset="-120"/>
-              </a:rPr>
-              <a:t>토스페이먼츠 JavaScript SDK를 통한 빌링 인증창 호출</a:t>
-            </a:r>
-            <a:endParaRPr lang="en-US" sz="1000" dirty="0"/>
-          </a:p>
-          <a:p>
-            <a:pPr marL="342900" indent="-342900">
-              <a:lnSpc>
-                <a:spcPct val="125000"/>
-              </a:lnSpc>
-              <a:spcAft>
-                <a:spcPts val="600"/>
-              </a:spcAft>
-              <a:buSzPct val="100000"/>
-              <a:buChar char="•"/>
-            </a:pPr>
-            <a:r>
-              <a:rPr lang="en-US" sz="1000" dirty="0">
-                <a:solidFill>
-                  <a:srgbClr val="1F2A24"/>
-                </a:solidFill>
-                <a:latin typeface="맑은 고딕" pitchFamily="34" charset="0"/>
-                <a:ea typeface="맑은 고딕" pitchFamily="34" charset="-122"/>
-                <a:cs typeface="맑은 고딕" pitchFamily="34" charset="-120"/>
-              </a:rPr>
-              <a:t>이용자가 카드 정보를 직접 입력하여 자동결제 카드 등록</a:t>
-            </a:r>
-            <a:endParaRPr lang="en-US" sz="1000" dirty="0"/>
-          </a:p>
-          <a:p>
-            <a:pPr marL="342900" indent="-342900">
-              <a:lnSpc>
-                <a:spcPct val="125000"/>
-              </a:lnSpc>
-              <a:spcAft>
-                <a:spcPts val="600"/>
-              </a:spcAft>
-              <a:buSzPct val="100000"/>
-              <a:buChar char="•"/>
-            </a:pPr>
-            <a:r>
-              <a:rPr lang="en-US" sz="1000" dirty="0">
-                <a:solidFill>
-                  <a:srgbClr val="1F2A24"/>
-                </a:solidFill>
-                <a:latin typeface="맑은 고딕" pitchFamily="34" charset="0"/>
-                <a:ea typeface="맑은 고딕" pitchFamily="34" charset="-122"/>
-                <a:cs typeface="맑은 고딕" pitchFamily="34" charset="-120"/>
-              </a:rPr>
-              <a:t>인증 완료 후 서버에서 빌링키 발급 및 최초 결제 승인</a:t>
-            </a:r>
-            <a:endParaRPr lang="en-US" sz="1000" dirty="0"/>
-          </a:p>
-          <a:p>
-            <a:pPr marL="342900" indent="-342900">
-              <a:lnSpc>
-                <a:spcPct val="125000"/>
-              </a:lnSpc>
-              <a:spcAft>
-                <a:spcPts val="600"/>
-              </a:spcAft>
-              <a:buSzPct val="100000"/>
-              <a:buChar char="•"/>
-            </a:pPr>
-            <a:r>
-              <a:rPr lang="en-US" sz="1000" dirty="0">
-                <a:solidFill>
-                  <a:srgbClr val="1F2A24"/>
-                </a:solidFill>
-                <a:latin typeface="맑은 고딕" pitchFamily="34" charset="0"/>
-                <a:ea typeface="맑은 고딕" pitchFamily="34" charset="-122"/>
-                <a:cs typeface="맑은 고딕" pitchFamily="34" charset="-120"/>
-              </a:rPr>
-              <a:t>카드정보는 당사 서버에 저장하지 않음</a:t>
-            </a:r>
-            <a:endParaRPr lang="en-US" sz="1000" dirty="0"/>
-          </a:p>
-        </p:txBody>
-      </p:sp>
-      <p:sp>
-        <p:nvSpPr>
-          <p:cNvPr id="12" name="Text 10"/>
-          <p:cNvSpPr/>
-          <p:nvPr/>
-        </p:nvSpPr>
-        <p:spPr>
-          <a:xfrm>
-            <a:off x="457200" y="4709160"/>
-            <a:ext cx="6400800" cy="256032"/>
-          </a:xfrm>
-          <a:prstGeom prst="rect">
-            <a:avLst/>
-          </a:prstGeom>
-          <a:noFill/>
-          <a:ln/>
-        </p:spPr>
-        <p:txBody>
-          <a:bodyPr wrap="square" lIns="0" tIns="0" rIns="0" bIns="0" rtlCol="0" anchor="ctr"/>
-          <a:lstStyle/>
-          <a:p>
-            <a:pPr algn="l" indent="0" marL="0">
-              <a:buNone/>
-            </a:pPr>
-            <a:r>
-              <a:rPr lang="en-US" sz="800" dirty="0">
-                <a:solidFill>
-                  <a:srgbClr val="6B7A72"/>
-                </a:solidFill>
-                <a:latin typeface="맑은 고딕" pitchFamily="34" charset="0"/>
-                <a:ea typeface="맑은 고딕" pitchFamily="34" charset="-122"/>
-                <a:cs typeface="맑은 고딕" pitchFamily="34" charset="-120"/>
-              </a:rPr>
-              <a:t>주식회사 구비드 · 바로씻(BaroSit) · MID bill_barosi69c</a:t>
-            </a:r>
-            <a:endParaRPr lang="en-US" sz="800" dirty="0"/>
-          </a:p>
-        </p:txBody>
-      </p:sp>
-      <p:sp>
-        <p:nvSpPr>
-          <p:cNvPr id="13" name="Text 11"/>
-          <p:cNvSpPr/>
-          <p:nvPr/>
-        </p:nvSpPr>
-        <p:spPr>
-          <a:xfrm>
-            <a:off x="8138160" y="4709160"/>
-            <a:ext cx="548640" cy="256032"/>
-          </a:xfrm>
-          <a:prstGeom prst="rect">
-            <a:avLst/>
-          </a:prstGeom>
-          <a:noFill/>
-          <a:ln/>
-        </p:spPr>
-        <p:txBody>
-          <a:bodyPr wrap="square" lIns="0" tIns="0" rIns="0" bIns="0" rtlCol="0" anchor="ctr"/>
-          <a:lstStyle/>
-          <a:p>
-            <a:pPr algn="r" indent="0" marL="0">
-              <a:buNone/>
-            </a:pPr>
-            <a:r>
-              <a:rPr lang="en-US" sz="800" dirty="0">
-                <a:solidFill>
-                  <a:srgbClr val="6B7A72"/>
-                </a:solidFill>
-                <a:latin typeface="맑은 고딕" pitchFamily="34" charset="0"/>
-                <a:ea typeface="맑은 고딕" pitchFamily="34" charset="-122"/>
-                <a:cs typeface="맑은 고딕" pitchFamily="34" charset="-120"/>
-              </a:rPr>
-              <a:t>9</a:t>
-            </a:r>
-            <a:endParaRPr lang="en-US" sz="800" dirty="0"/>
-          </a:p>
-        </p:txBody>
-      </p:sp>
-    </p:spTree>
-  </p:cSld>
-  <p:clrMapOvr>
-    <a:masterClrMapping/>
-  </p:clrMapOvr>
-</p:sld>
-</file>
-
-<file path=ppt/slides/slide8.xml><?xml version="1.0" encoding="utf-8"?>
-<p:sld xmlns:a="http://schemas.openxmlformats.org/drawingml/2006/main" xmlns:r="http://schemas.openxmlformats.org/officeDocument/2006/relationships" xmlns:p="http://schemas.openxmlformats.org/presentationml/2006/main">
-  <p:cSld name="Slide 8">
-    <p:bg>
-      <p:bgPr>
-        <a:solidFill>
-          <a:srgbClr val="FFFFFF"/>
-        </a:solidFill>
-      </p:bgPr>
-    </p:bg>
-    <p:spTree>
-      <p:nvGrpSpPr>
-        <p:cNvPr id="1" name=""/>
-        <p:cNvGrpSpPr/>
-        <p:nvPr/>
-      </p:nvGrpSpPr>
-      <p:grpSpPr>
-        <a:xfrm>
-          <a:off x="0" y="0"/>
-          <a:ext cx="0" cy="0"/>
-          <a:chOff x="0" y="0"/>
-          <a:chExt cx="0" cy="0"/>
-        </a:xfrm>
-      </p:grpSpPr>
-      <p:sp>
-        <p:nvSpPr>
-          <p:cNvPr id="2" name="Shape 0"/>
-          <p:cNvSpPr/>
-          <p:nvPr/>
-        </p:nvSpPr>
-        <p:spPr>
-          <a:xfrm>
-            <a:off x="457200" y="329184"/>
-            <a:ext cx="914400" cy="310896"/>
-          </a:xfrm>
-          <a:prstGeom prst="roundRect">
-            <a:avLst>
-              <a:gd name="adj" fmla="val 47059"/>
-            </a:avLst>
-          </a:prstGeom>
-          <a:solidFill>
-            <a:srgbClr val="2F6B4F"/>
-          </a:solidFill>
-          <a:ln/>
-        </p:spPr>
-      </p:sp>
-      <p:sp>
-        <p:nvSpPr>
-          <p:cNvPr id="3" name="Text 1"/>
-          <p:cNvSpPr/>
-          <p:nvPr/>
-        </p:nvSpPr>
-        <p:spPr>
-          <a:xfrm>
-            <a:off x="457200" y="329184"/>
-            <a:ext cx="914400" cy="310896"/>
-          </a:xfrm>
-          <a:prstGeom prst="rect">
-            <a:avLst/>
-          </a:prstGeom>
-          <a:noFill/>
-          <a:ln/>
-        </p:spPr>
-        <p:txBody>
-          <a:bodyPr wrap="square" lIns="0" tIns="0" rIns="0" bIns="0" rtlCol="0" anchor="ctr"/>
-          <a:lstStyle/>
-          <a:p>
-            <a:pPr algn="ctr" indent="0" marL="0">
-              <a:buNone/>
-            </a:pPr>
-            <a:r>
-              <a:rPr lang="en-US" sz="1200" b="1" dirty="0">
-                <a:solidFill>
-                  <a:srgbClr val="FFFFFF"/>
-                </a:solidFill>
-                <a:latin typeface="맑은 고딕" pitchFamily="34" charset="0"/>
-                <a:ea typeface="맑은 고딕" pitchFamily="34" charset="-122"/>
-                <a:cs typeface="맑은 고딕" pitchFamily="34" charset="-120"/>
-              </a:rPr>
-              <a:t>STEP 6</a:t>
-            </a:r>
-            <a:endParaRPr lang="en-US" sz="1200" dirty="0"/>
-          </a:p>
-        </p:txBody>
-      </p:sp>
-      <p:sp>
-        <p:nvSpPr>
-          <p:cNvPr id="4" name="Text 2"/>
-          <p:cNvSpPr/>
-          <p:nvPr/>
-        </p:nvSpPr>
-        <p:spPr>
-          <a:xfrm>
-            <a:off x="1508760" y="292608"/>
-            <a:ext cx="7223760" cy="384048"/>
-          </a:xfrm>
-          <a:prstGeom prst="rect">
-            <a:avLst/>
-          </a:prstGeom>
-          <a:noFill/>
-          <a:ln/>
-        </p:spPr>
-        <p:txBody>
-          <a:bodyPr wrap="square" lIns="0" tIns="0" rIns="0" bIns="0" rtlCol="0" anchor="ctr"/>
-          <a:lstStyle/>
-          <a:p>
-            <a:pPr algn="l" indent="0" marL="0">
-              <a:buNone/>
-            </a:pPr>
-            <a:r>
-              <a:rPr lang="en-US" sz="2000" b="1" dirty="0">
-                <a:solidFill>
-                  <a:srgbClr val="1F2A24"/>
-                </a:solidFill>
-                <a:latin typeface="맑은 고딕" pitchFamily="34" charset="0"/>
-                <a:ea typeface="맑은 고딕" pitchFamily="34" charset="-122"/>
-                <a:cs typeface="맑은 고딕" pitchFamily="34" charset="-120"/>
-              </a:rPr>
-              <a:t>결제 완료</a:t>
-            </a:r>
-            <a:endParaRPr lang="en-US" sz="2000" dirty="0"/>
-          </a:p>
-        </p:txBody>
-      </p:sp>
-      <p:sp>
-        <p:nvSpPr>
-          <p:cNvPr id="5" name="Shape 3"/>
-          <p:cNvSpPr/>
-          <p:nvPr/>
-        </p:nvSpPr>
-        <p:spPr>
-          <a:xfrm>
-            <a:off x="457200" y="868680"/>
-            <a:ext cx="5074920" cy="3611880"/>
-          </a:xfrm>
-          <a:prstGeom prst="rect">
-            <a:avLst/>
-          </a:prstGeom>
-          <a:solidFill>
-            <a:srgbClr val="F1F5F2"/>
-          </a:solidFill>
-          <a:ln w="12700">
-            <a:solidFill>
-              <a:srgbClr val="D8E0DA"/>
-            </a:solidFill>
-            <a:prstDash val="dash"/>
-          </a:ln>
-        </p:spPr>
-      </p:sp>
-      <p:sp>
-        <p:nvSpPr>
-          <p:cNvPr id="6" name="Text 4"/>
-          <p:cNvSpPr/>
-          <p:nvPr/>
-        </p:nvSpPr>
-        <p:spPr>
-          <a:xfrm>
-            <a:off x="457200" y="2363724"/>
-            <a:ext cx="5074920" cy="274320"/>
-          </a:xfrm>
-          <a:prstGeom prst="rect">
-            <a:avLst/>
-          </a:prstGeom>
-          <a:noFill/>
-          <a:ln/>
-        </p:spPr>
-        <p:txBody>
-          <a:bodyPr wrap="square" lIns="0" tIns="0" rIns="0" bIns="0" rtlCol="0" anchor="ctr"/>
-          <a:lstStyle/>
-          <a:p>
-            <a:pPr algn="ctr" indent="0" marL="0">
-              <a:buNone/>
-            </a:pPr>
-            <a:r>
-              <a:rPr lang="en-US" sz="1200" b="1" dirty="0">
-                <a:solidFill>
-                  <a:srgbClr val="6B7A72"/>
-                </a:solidFill>
-                <a:latin typeface="맑은 고딕" pitchFamily="34" charset="0"/>
-                <a:ea typeface="맑은 고딕" pitchFamily="34" charset="-122"/>
-                <a:cs typeface="맑은 고딕" pitchFamily="34" charset="-120"/>
-              </a:rPr>
-              <a:t>화면 캡처 삽입</a:t>
-            </a:r>
-            <a:endParaRPr lang="en-US" sz="1200" dirty="0"/>
-          </a:p>
-        </p:txBody>
-      </p:sp>
-      <p:sp>
-        <p:nvSpPr>
-          <p:cNvPr id="7" name="Text 5"/>
-          <p:cNvSpPr/>
-          <p:nvPr/>
-        </p:nvSpPr>
-        <p:spPr>
-          <a:xfrm>
-            <a:off x="640080" y="2656332"/>
-            <a:ext cx="4709160" cy="548640"/>
-          </a:xfrm>
-          <a:prstGeom prst="rect">
-            <a:avLst/>
-          </a:prstGeom>
-          <a:noFill/>
-          <a:ln/>
-        </p:spPr>
-        <p:txBody>
-          <a:bodyPr wrap="square" lIns="0" tIns="0" rIns="0" bIns="0" rtlCol="0" anchor="t"/>
-          <a:lstStyle/>
-          <a:p>
-            <a:pPr algn="ctr" indent="0" marL="0">
-              <a:buNone/>
-            </a:pPr>
-            <a:r>
-              <a:rPr lang="en-US" sz="900" dirty="0">
-                <a:solidFill>
-                  <a:srgbClr val="6B7A72"/>
-                </a:solidFill>
-                <a:latin typeface="맑은 고딕" pitchFamily="34" charset="0"/>
-                <a:ea typeface="맑은 고딕" pitchFamily="34" charset="-122"/>
-                <a:cs typeface="맑은 고딕" pitchFamily="34" charset="-120"/>
-              </a:rPr>
-              <a:t>결제 완료 안내 화면 (결제금액·다음 결제일 포함)</a:t>
-            </a:r>
-            <a:endParaRPr lang="en-US" sz="900" dirty="0"/>
-          </a:p>
-        </p:txBody>
-      </p:sp>
-      <p:sp>
-        <p:nvSpPr>
-          <p:cNvPr id="8" name="Text 6"/>
-          <p:cNvSpPr/>
-          <p:nvPr/>
-        </p:nvSpPr>
-        <p:spPr>
-          <a:xfrm>
-            <a:off x="5760720" y="868680"/>
-            <a:ext cx="2926080" cy="219456"/>
-          </a:xfrm>
-          <a:prstGeom prst="rect">
-            <a:avLst/>
-          </a:prstGeom>
-          <a:noFill/>
-          <a:ln/>
-        </p:spPr>
-        <p:txBody>
-          <a:bodyPr wrap="square" lIns="0" tIns="0" rIns="0" bIns="0" rtlCol="0" anchor="ctr"/>
-          <a:lstStyle/>
-          <a:p>
-            <a:pPr indent="0" marL="0">
-              <a:buNone/>
-            </a:pPr>
-            <a:r>
-              <a:rPr lang="en-US" sz="1000" b="1" dirty="0">
-                <a:solidFill>
-                  <a:srgbClr val="2F6B4F"/>
-                </a:solidFill>
-                <a:latin typeface="맑은 고딕" pitchFamily="34" charset="0"/>
-                <a:ea typeface="맑은 고딕" pitchFamily="34" charset="-122"/>
-                <a:cs typeface="맑은 고딕" pitchFamily="34" charset="-120"/>
-              </a:rPr>
-              <a:t>접속 경로</a:t>
-            </a:r>
-            <a:endParaRPr lang="en-US" sz="1000" dirty="0"/>
-          </a:p>
-        </p:txBody>
-      </p:sp>
-      <p:sp>
-        <p:nvSpPr>
-          <p:cNvPr id="9" name="Text 7"/>
-          <p:cNvSpPr/>
-          <p:nvPr/>
-        </p:nvSpPr>
-        <p:spPr>
-          <a:xfrm>
-            <a:off x="5760720" y="1106424"/>
-            <a:ext cx="2926080" cy="457200"/>
-          </a:xfrm>
-          <a:prstGeom prst="rect">
-            <a:avLst/>
-          </a:prstGeom>
-          <a:noFill/>
-          <a:ln/>
-        </p:spPr>
-        <p:txBody>
-          <a:bodyPr wrap="square" lIns="0" tIns="0" rIns="0" bIns="0" rtlCol="0" anchor="ctr"/>
-          <a:lstStyle/>
-          <a:p>
-            <a:pPr indent="0" marL="0">
-              <a:buNone/>
-            </a:pPr>
-            <a:r>
-              <a:rPr lang="en-US" sz="1000" dirty="0">
-                <a:solidFill>
-                  <a:srgbClr val="1F2A24"/>
-                </a:solidFill>
-                <a:latin typeface="맑은 고딕" pitchFamily="34" charset="0"/>
-                <a:ea typeface="맑은 고딕" pitchFamily="34" charset="-122"/>
-                <a:cs typeface="맑은 고딕" pitchFamily="34" charset="-120"/>
-              </a:rPr>
-              <a:t>https://barosit.com/?redirect_route=pricing&amp;payment=success</a:t>
-            </a:r>
-            <a:endParaRPr lang="en-US" sz="1000" dirty="0"/>
-          </a:p>
-        </p:txBody>
-      </p:sp>
-      <p:sp>
-        <p:nvSpPr>
-          <p:cNvPr id="10" name="Text 8"/>
-          <p:cNvSpPr/>
-          <p:nvPr/>
-        </p:nvSpPr>
-        <p:spPr>
-          <a:xfrm>
-            <a:off x="5760720" y="1673352"/>
-            <a:ext cx="2926080" cy="219456"/>
-          </a:xfrm>
-          <a:prstGeom prst="rect">
-            <a:avLst/>
-          </a:prstGeom>
-          <a:noFill/>
-          <a:ln/>
-        </p:spPr>
-        <p:txBody>
-          <a:bodyPr wrap="square" lIns="0" tIns="0" rIns="0" bIns="0" rtlCol="0" anchor="ctr"/>
-          <a:lstStyle/>
-          <a:p>
-            <a:pPr indent="0" marL="0">
-              <a:buNone/>
-            </a:pPr>
-            <a:r>
-              <a:rPr lang="en-US" sz="1000" b="1" dirty="0">
-                <a:solidFill>
-                  <a:srgbClr val="2F6B4F"/>
-                </a:solidFill>
-                <a:latin typeface="맑은 고딕" pitchFamily="34" charset="0"/>
-                <a:ea typeface="맑은 고딕" pitchFamily="34" charset="-122"/>
-                <a:cs typeface="맑은 고딕" pitchFamily="34" charset="-120"/>
-              </a:rPr>
-              <a:t>화면 설명</a:t>
-            </a:r>
-            <a:endParaRPr lang="en-US" sz="1000" dirty="0"/>
-          </a:p>
-        </p:txBody>
-      </p:sp>
-      <p:sp>
-        <p:nvSpPr>
-          <p:cNvPr id="11" name="Text 9"/>
-          <p:cNvSpPr/>
-          <p:nvPr/>
-        </p:nvSpPr>
-        <p:spPr>
-          <a:xfrm>
-            <a:off x="5760720" y="1929384"/>
-            <a:ext cx="2926080" cy="2377440"/>
-          </a:xfrm>
-          <a:prstGeom prst="rect">
-            <a:avLst/>
-          </a:prstGeom>
-          <a:noFill/>
-          <a:ln/>
-        </p:spPr>
-        <p:txBody>
-          <a:bodyPr wrap="square" lIns="0" tIns="0" rIns="0" bIns="0" rtlCol="0" anchor="t"/>
-          <a:lstStyle/>
-          <a:p>
-            <a:pPr marL="342900" indent="-342900">
-              <a:lnSpc>
-                <a:spcPct val="125000"/>
-              </a:lnSpc>
-              <a:spcAft>
-                <a:spcPts val="600"/>
-              </a:spcAft>
-              <a:buSzPct val="100000"/>
-              <a:buChar char="•"/>
-            </a:pPr>
-            <a:r>
-              <a:rPr lang="en-US" sz="1000" dirty="0">
-                <a:solidFill>
-                  <a:srgbClr val="1F2A24"/>
-                </a:solidFill>
-                <a:latin typeface="맑은 고딕" pitchFamily="34" charset="0"/>
-                <a:ea typeface="맑은 고딕" pitchFamily="34" charset="-122"/>
-                <a:cs typeface="맑은 고딕" pitchFamily="34" charset="-120"/>
-              </a:rPr>
-              <a:t>결제 완료 및 PRO 구독 활성화 안내</a:t>
-            </a:r>
-            <a:endParaRPr lang="en-US" sz="1000" dirty="0"/>
-          </a:p>
-          <a:p>
-            <a:pPr marL="342900" indent="-342900">
-              <a:lnSpc>
-                <a:spcPct val="125000"/>
-              </a:lnSpc>
-              <a:spcAft>
-                <a:spcPts val="600"/>
-              </a:spcAft>
-              <a:buSzPct val="100000"/>
-              <a:buChar char="•"/>
-            </a:pPr>
-            <a:r>
-              <a:rPr lang="en-US" sz="1000" dirty="0">
-                <a:solidFill>
-                  <a:srgbClr val="1F2A24"/>
-                </a:solidFill>
-                <a:latin typeface="맑은 고딕" pitchFamily="34" charset="0"/>
-                <a:ea typeface="맑은 고딕" pitchFamily="34" charset="-122"/>
-                <a:cs typeface="맑은 고딕" pitchFamily="34" charset="-120"/>
-              </a:rPr>
-              <a:t>결제 금액, 결제 수단, 다음 결제 예정일 표시</a:t>
-            </a:r>
-            <a:endParaRPr lang="en-US" sz="1000" dirty="0"/>
-          </a:p>
-          <a:p>
-            <a:pPr marL="342900" indent="-342900">
-              <a:lnSpc>
-                <a:spcPct val="125000"/>
-              </a:lnSpc>
-              <a:spcAft>
-                <a:spcPts val="600"/>
-              </a:spcAft>
-              <a:buSzPct val="100000"/>
-              <a:buChar char="•"/>
-            </a:pPr>
-            <a:r>
-              <a:rPr lang="en-US" sz="1000" dirty="0">
-                <a:solidFill>
-                  <a:srgbClr val="1F2A24"/>
-                </a:solidFill>
-                <a:latin typeface="맑은 고딕" pitchFamily="34" charset="0"/>
-                <a:ea typeface="맑은 고딕" pitchFamily="34" charset="-122"/>
-                <a:cs typeface="맑은 고딕" pitchFamily="34" charset="-120"/>
-              </a:rPr>
-              <a:t>데스크톱 앱 다운로드 안내로 연결</a:t>
-            </a:r>
-            <a:endParaRPr lang="en-US" sz="1000" dirty="0"/>
-          </a:p>
-          <a:p>
-            <a:pPr marL="342900" indent="-342900">
-              <a:lnSpc>
-                <a:spcPct val="125000"/>
-              </a:lnSpc>
-              <a:spcAft>
-                <a:spcPts val="600"/>
-              </a:spcAft>
-              <a:buSzPct val="100000"/>
-              <a:buChar char="•"/>
-            </a:pPr>
-            <a:r>
-              <a:rPr lang="en-US" sz="1000" dirty="0">
-                <a:solidFill>
-                  <a:srgbClr val="1F2A24"/>
-                </a:solidFill>
-                <a:latin typeface="맑은 고딕" pitchFamily="34" charset="0"/>
-                <a:ea typeface="맑은 고딕" pitchFamily="34" charset="-122"/>
-                <a:cs typeface="맑은 고딕" pitchFamily="34" charset="-120"/>
-              </a:rPr>
-              <a:t>결제 내역은 이메일로도 발송</a:t>
-            </a:r>
-            <a:endParaRPr lang="en-US" sz="1000" dirty="0"/>
-          </a:p>
-        </p:txBody>
-      </p:sp>
-      <p:sp>
-        <p:nvSpPr>
-          <p:cNvPr id="12" name="Text 10"/>
-          <p:cNvSpPr/>
-          <p:nvPr/>
-        </p:nvSpPr>
-        <p:spPr>
-          <a:xfrm>
-            <a:off x="457200" y="4709160"/>
-            <a:ext cx="6400800" cy="256032"/>
-          </a:xfrm>
-          <a:prstGeom prst="rect">
-            <a:avLst/>
-          </a:prstGeom>
-          <a:noFill/>
-          <a:ln/>
-        </p:spPr>
-        <p:txBody>
-          <a:bodyPr wrap="square" lIns="0" tIns="0" rIns="0" bIns="0" rtlCol="0" anchor="ctr"/>
-          <a:lstStyle/>
-          <a:p>
-            <a:pPr algn="l" indent="0" marL="0">
-              <a:buNone/>
-            </a:pPr>
-            <a:r>
-              <a:rPr lang="en-US" sz="800" dirty="0">
-                <a:solidFill>
-                  <a:srgbClr val="6B7A72"/>
-                </a:solidFill>
-                <a:latin typeface="맑은 고딕" pitchFamily="34" charset="0"/>
-                <a:ea typeface="맑은 고딕" pitchFamily="34" charset="-122"/>
-                <a:cs typeface="맑은 고딕" pitchFamily="34" charset="-120"/>
-              </a:rPr>
-              <a:t>주식회사 구비드 · 바로씻(BaroSit) · MID bill_barosi69c</a:t>
-            </a:r>
-            <a:endParaRPr lang="en-US" sz="800" dirty="0"/>
-          </a:p>
-        </p:txBody>
-      </p:sp>
-      <p:sp>
-        <p:nvSpPr>
-          <p:cNvPr id="13" name="Text 11"/>
-          <p:cNvSpPr/>
-          <p:nvPr/>
-        </p:nvSpPr>
-        <p:spPr>
-          <a:xfrm>
-            <a:off x="8138160" y="4709160"/>
-            <a:ext cx="548640" cy="256032"/>
-          </a:xfrm>
-          <a:prstGeom prst="rect">
-            <a:avLst/>
-          </a:prstGeom>
-          <a:noFill/>
-          <a:ln/>
-        </p:spPr>
-        <p:txBody>
-          <a:bodyPr wrap="square" lIns="0" tIns="0" rIns="0" bIns="0" rtlCol="0" anchor="ctr"/>
-          <a:lstStyle/>
-          <a:p>
-            <a:pPr algn="r" indent="0" marL="0">
-              <a:buNone/>
-            </a:pPr>
-            <a:r>
-              <a:rPr lang="en-US" sz="800" dirty="0">
-                <a:solidFill>
-                  <a:srgbClr val="6B7A72"/>
-                </a:solidFill>
-                <a:latin typeface="맑은 고딕" pitchFamily="34" charset="0"/>
-                <a:ea typeface="맑은 고딕" pitchFamily="34" charset="-122"/>
-                <a:cs typeface="맑은 고딕" pitchFamily="34" charset="-120"/>
-              </a:rPr>
-              <a:t>10</a:t>
-            </a:r>
-            <a:endParaRPr lang="en-US" sz="800" dirty="0"/>
-          </a:p>
-        </p:txBody>
-      </p:sp>
-    </p:spTree>
-  </p:cSld>
-  <p:clrMapOvr>
-    <a:masterClrMapping/>
-  </p:clrMapOvr>
-</p:sld>
-</file>
-
-<file path=ppt/slides/slide9.xml><?xml version="1.0" encoding="utf-8"?>
-<p:sld xmlns:a="http://schemas.openxmlformats.org/drawingml/2006/main" xmlns:r="http://schemas.openxmlformats.org/officeDocument/2006/relationships" xmlns:p="http://schemas.openxmlformats.org/presentationml/2006/main">
-  <p:cSld name="Slide 9">
-    <p:bg>
-      <p:bgPr>
-        <a:solidFill>
-          <a:srgbClr val="FFFFFF"/>
-        </a:solidFill>
-      </p:bgPr>
-    </p:bg>
-    <p:spTree>
-      <p:nvGrpSpPr>
-        <p:cNvPr id="1" name=""/>
-        <p:cNvGrpSpPr/>
-        <p:nvPr/>
-      </p:nvGrpSpPr>
-      <p:grpSpPr>
-        <a:xfrm>
-          <a:off x="0" y="0"/>
-          <a:ext cx="0" cy="0"/>
-          <a:chOff x="0" y="0"/>
-          <a:chExt cx="0" cy="0"/>
-        </a:xfrm>
-      </p:grpSpPr>
-      <p:sp>
-        <p:nvSpPr>
-          <p:cNvPr id="2" name="Shape 0"/>
-          <p:cNvSpPr/>
-          <p:nvPr/>
-        </p:nvSpPr>
-        <p:spPr>
-          <a:xfrm>
-            <a:off x="457200" y="329184"/>
-            <a:ext cx="914400" cy="310896"/>
-          </a:xfrm>
-          <a:prstGeom prst="roundRect">
-            <a:avLst>
-              <a:gd name="adj" fmla="val 47059"/>
-            </a:avLst>
-          </a:prstGeom>
-          <a:solidFill>
-            <a:srgbClr val="2F6B4F"/>
-          </a:solidFill>
-          <a:ln/>
-        </p:spPr>
-      </p:sp>
-      <p:sp>
-        <p:nvSpPr>
-          <p:cNvPr id="3" name="Text 1"/>
-          <p:cNvSpPr/>
-          <p:nvPr/>
-        </p:nvSpPr>
-        <p:spPr>
-          <a:xfrm>
-            <a:off x="457200" y="329184"/>
-            <a:ext cx="914400" cy="310896"/>
-          </a:xfrm>
-          <a:prstGeom prst="rect">
-            <a:avLst/>
-          </a:prstGeom>
-          <a:noFill/>
-          <a:ln/>
-        </p:spPr>
-        <p:txBody>
-          <a:bodyPr wrap="square" lIns="0" tIns="0" rIns="0" bIns="0" rtlCol="0" anchor="ctr"/>
-          <a:lstStyle/>
-          <a:p>
-            <a:pPr algn="ctr" indent="0" marL="0">
-              <a:buNone/>
-            </a:pPr>
-            <a:r>
-              <a:rPr lang="en-US" sz="1200" b="1" dirty="0">
-                <a:solidFill>
-                  <a:srgbClr val="FFFFFF"/>
-                </a:solidFill>
-                <a:latin typeface="맑은 고딕" pitchFamily="34" charset="0"/>
-                <a:ea typeface="맑은 고딕" pitchFamily="34" charset="-122"/>
-                <a:cs typeface="맑은 고딕" pitchFamily="34" charset="-120"/>
-              </a:rPr>
-              <a:t>STEP 7</a:t>
-            </a:r>
-            <a:endParaRPr lang="en-US" sz="1200" dirty="0"/>
-          </a:p>
-        </p:txBody>
-      </p:sp>
-      <p:sp>
-        <p:nvSpPr>
-          <p:cNvPr id="4" name="Text 2"/>
-          <p:cNvSpPr/>
-          <p:nvPr/>
-        </p:nvSpPr>
-        <p:spPr>
-          <a:xfrm>
-            <a:off x="1508760" y="292608"/>
-            <a:ext cx="7223760" cy="384048"/>
-          </a:xfrm>
-          <a:prstGeom prst="rect">
-            <a:avLst/>
-          </a:prstGeom>
-          <a:noFill/>
-          <a:ln/>
-        </p:spPr>
-        <p:txBody>
-          <a:bodyPr wrap="square" lIns="0" tIns="0" rIns="0" bIns="0" rtlCol="0" anchor="ctr"/>
-          <a:lstStyle/>
-          <a:p>
-            <a:pPr algn="l" indent="0" marL="0">
-              <a:buNone/>
-            </a:pPr>
-            <a:r>
-              <a:rPr lang="en-US" sz="2000" b="1" dirty="0">
-                <a:solidFill>
-                  <a:srgbClr val="1F2A24"/>
-                </a:solidFill>
-                <a:latin typeface="맑은 고딕" pitchFamily="34" charset="0"/>
-                <a:ea typeface="맑은 고딕" pitchFamily="34" charset="-122"/>
-                <a:cs typeface="맑은 고딕" pitchFamily="34" charset="-120"/>
-              </a:rPr>
-              <a:t>구독 관리 · 해지 · 환불 신청</a:t>
-            </a:r>
-            <a:endParaRPr lang="en-US" sz="2000" dirty="0"/>
-          </a:p>
-        </p:txBody>
-      </p:sp>
-      <p:sp>
-        <p:nvSpPr>
-          <p:cNvPr id="5" name="Shape 3"/>
-          <p:cNvSpPr/>
-          <p:nvPr/>
-        </p:nvSpPr>
-        <p:spPr>
-          <a:xfrm>
-            <a:off x="457200" y="868680"/>
-            <a:ext cx="5074920" cy="3611880"/>
-          </a:xfrm>
-          <a:prstGeom prst="rect">
-            <a:avLst/>
-          </a:prstGeom>
-          <a:solidFill>
-            <a:srgbClr val="F1F5F2"/>
-          </a:solidFill>
-          <a:ln w="12700">
-            <a:solidFill>
-              <a:srgbClr val="D8E0DA"/>
-            </a:solidFill>
-            <a:prstDash val="dash"/>
-          </a:ln>
-        </p:spPr>
-      </p:sp>
-      <p:sp>
-        <p:nvSpPr>
-          <p:cNvPr id="6" name="Text 4"/>
-          <p:cNvSpPr/>
-          <p:nvPr/>
-        </p:nvSpPr>
-        <p:spPr>
-          <a:xfrm>
-            <a:off x="457200" y="2363724"/>
-            <a:ext cx="5074920" cy="274320"/>
-          </a:xfrm>
-          <a:prstGeom prst="rect">
-            <a:avLst/>
-          </a:prstGeom>
-          <a:noFill/>
-          <a:ln/>
-        </p:spPr>
-        <p:txBody>
-          <a:bodyPr wrap="square" lIns="0" tIns="0" rIns="0" bIns="0" rtlCol="0" anchor="ctr"/>
-          <a:lstStyle/>
-          <a:p>
-            <a:pPr algn="ctr" indent="0" marL="0">
-              <a:buNone/>
-            </a:pPr>
-            <a:r>
-              <a:rPr lang="en-US" sz="1200" b="1" dirty="0">
-                <a:solidFill>
-                  <a:srgbClr val="6B7A72"/>
-                </a:solidFill>
-                <a:latin typeface="맑은 고딕" pitchFamily="34" charset="0"/>
-                <a:ea typeface="맑은 고딕" pitchFamily="34" charset="-122"/>
-                <a:cs typeface="맑은 고딕" pitchFamily="34" charset="-120"/>
-              </a:rPr>
-              <a:t>화면 캡처 삽입</a:t>
-            </a:r>
-            <a:endParaRPr lang="en-US" sz="1200" dirty="0"/>
-          </a:p>
-        </p:txBody>
-      </p:sp>
-      <p:sp>
-        <p:nvSpPr>
-          <p:cNvPr id="7" name="Text 5"/>
-          <p:cNvSpPr/>
-          <p:nvPr/>
-        </p:nvSpPr>
-        <p:spPr>
-          <a:xfrm>
-            <a:off x="640080" y="2656332"/>
-            <a:ext cx="4709160" cy="548640"/>
-          </a:xfrm>
-          <a:prstGeom prst="rect">
-            <a:avLst/>
-          </a:prstGeom>
-          <a:noFill/>
-          <a:ln/>
-        </p:spPr>
-        <p:txBody>
-          <a:bodyPr wrap="square" lIns="0" tIns="0" rIns="0" bIns="0" rtlCol="0" anchor="t"/>
-          <a:lstStyle/>
-          <a:p>
-            <a:pPr algn="ctr" indent="0" marL="0">
-              <a:buNone/>
-            </a:pPr>
-            <a:r>
-              <a:rPr lang="en-US" sz="900" dirty="0">
-                <a:solidFill>
-                  <a:srgbClr val="6B7A72"/>
-                </a:solidFill>
-                <a:latin typeface="맑은 고딕" pitchFamily="34" charset="0"/>
-                <a:ea typeface="맑은 고딕" pitchFamily="34" charset="-122"/>
-                <a:cs typeface="맑은 고딕" pitchFamily="34" charset="-120"/>
-              </a:rPr>
-              <a:t>[프로필 &gt; 구독 관리] 화면</a:t>
-            </a:r>
-            <a:endParaRPr lang="en-US" sz="900" dirty="0"/>
-          </a:p>
-        </p:txBody>
-      </p:sp>
-      <p:sp>
-        <p:nvSpPr>
-          <p:cNvPr id="8" name="Text 6"/>
-          <p:cNvSpPr/>
-          <p:nvPr/>
-        </p:nvSpPr>
-        <p:spPr>
-          <a:xfrm>
-            <a:off x="5760720" y="868680"/>
-            <a:ext cx="2926080" cy="219456"/>
-          </a:xfrm>
-          <a:prstGeom prst="rect">
-            <a:avLst/>
-          </a:prstGeom>
-          <a:noFill/>
-          <a:ln/>
-        </p:spPr>
-        <p:txBody>
-          <a:bodyPr wrap="square" lIns="0" tIns="0" rIns="0" bIns="0" rtlCol="0" anchor="ctr"/>
-          <a:lstStyle/>
-          <a:p>
-            <a:pPr indent="0" marL="0">
-              <a:buNone/>
-            </a:pPr>
-            <a:r>
-              <a:rPr lang="en-US" sz="1000" b="1" dirty="0">
-                <a:solidFill>
-                  <a:srgbClr val="2F6B4F"/>
-                </a:solidFill>
-                <a:latin typeface="맑은 고딕" pitchFamily="34" charset="0"/>
-                <a:ea typeface="맑은 고딕" pitchFamily="34" charset="-122"/>
-                <a:cs typeface="맑은 고딕" pitchFamily="34" charset="-120"/>
-              </a:rPr>
-              <a:t>접속 경로</a:t>
-            </a:r>
-            <a:endParaRPr lang="en-US" sz="1000" dirty="0"/>
-          </a:p>
-        </p:txBody>
-      </p:sp>
-      <p:sp>
-        <p:nvSpPr>
-          <p:cNvPr id="9" name="Text 7"/>
-          <p:cNvSpPr/>
-          <p:nvPr/>
-        </p:nvSpPr>
-        <p:spPr>
-          <a:xfrm>
-            <a:off x="5760720" y="1106424"/>
-            <a:ext cx="2926080" cy="457200"/>
-          </a:xfrm>
-          <a:prstGeom prst="rect">
-            <a:avLst/>
-          </a:prstGeom>
-          <a:noFill/>
-          <a:ln/>
-        </p:spPr>
-        <p:txBody>
-          <a:bodyPr wrap="square" lIns="0" tIns="0" rIns="0" bIns="0" rtlCol="0" anchor="ctr"/>
-          <a:lstStyle/>
-          <a:p>
-            <a:pPr indent="0" marL="0">
-              <a:buNone/>
-            </a:pPr>
-            <a:r>
-              <a:rPr lang="en-US" sz="1000" dirty="0">
-                <a:solidFill>
-                  <a:srgbClr val="1F2A24"/>
-                </a:solidFill>
-                <a:latin typeface="맑은 고딕" pitchFamily="34" charset="0"/>
-                <a:ea typeface="맑은 고딕" pitchFamily="34" charset="-122"/>
-                <a:cs typeface="맑은 고딕" pitchFamily="34" charset="-120"/>
-              </a:rPr>
-              <a:t>https://barosit.com/#/account</a:t>
-            </a:r>
-            <a:endParaRPr lang="en-US" sz="1000" dirty="0"/>
-          </a:p>
-        </p:txBody>
-      </p:sp>
-      <p:sp>
-        <p:nvSpPr>
-          <p:cNvPr id="10" name="Text 8"/>
-          <p:cNvSpPr/>
-          <p:nvPr/>
-        </p:nvSpPr>
-        <p:spPr>
-          <a:xfrm>
-            <a:off x="5760720" y="1673352"/>
-            <a:ext cx="2926080" cy="219456"/>
-          </a:xfrm>
-          <a:prstGeom prst="rect">
-            <a:avLst/>
-          </a:prstGeom>
-          <a:noFill/>
-          <a:ln/>
-        </p:spPr>
-        <p:txBody>
-          <a:bodyPr wrap="square" lIns="0" tIns="0" rIns="0" bIns="0" rtlCol="0" anchor="ctr"/>
-          <a:lstStyle/>
-          <a:p>
-            <a:pPr indent="0" marL="0">
-              <a:buNone/>
-            </a:pPr>
-            <a:r>
-              <a:rPr lang="en-US" sz="1000" b="1" dirty="0">
-                <a:solidFill>
-                  <a:srgbClr val="2F6B4F"/>
-                </a:solidFill>
-                <a:latin typeface="맑은 고딕" pitchFamily="34" charset="0"/>
-                <a:ea typeface="맑은 고딕" pitchFamily="34" charset="-122"/>
-                <a:cs typeface="맑은 고딕" pitchFamily="34" charset="-120"/>
-              </a:rPr>
-              <a:t>화면 설명</a:t>
-            </a:r>
-            <a:endParaRPr lang="en-US" sz="1000" dirty="0"/>
-          </a:p>
-        </p:txBody>
-      </p:sp>
-      <p:sp>
-        <p:nvSpPr>
-          <p:cNvPr id="11" name="Text 9"/>
-          <p:cNvSpPr/>
-          <p:nvPr/>
-        </p:nvSpPr>
-        <p:spPr>
-          <a:xfrm>
-            <a:off x="5760720" y="1929384"/>
-            <a:ext cx="2926080" cy="2377440"/>
-          </a:xfrm>
-          <a:prstGeom prst="rect">
-            <a:avLst/>
-          </a:prstGeom>
-          <a:noFill/>
-          <a:ln/>
-        </p:spPr>
-        <p:txBody>
-          <a:bodyPr wrap="square" lIns="0" tIns="0" rIns="0" bIns="0" rtlCol="0" anchor="t"/>
-          <a:lstStyle/>
-          <a:p>
-            <a:pPr marL="342900" indent="-342900">
-              <a:lnSpc>
-                <a:spcPct val="125000"/>
-              </a:lnSpc>
-              <a:spcAft>
-                <a:spcPts val="600"/>
-              </a:spcAft>
-              <a:buSzPct val="100000"/>
-              <a:buChar char="•"/>
-            </a:pPr>
-            <a:r>
-              <a:rPr lang="en-US" sz="1000" dirty="0">
-                <a:solidFill>
-                  <a:srgbClr val="1F2A24"/>
-                </a:solidFill>
-                <a:latin typeface="맑은 고딕" pitchFamily="34" charset="0"/>
-                <a:ea typeface="맑은 고딕" pitchFamily="34" charset="-122"/>
-                <a:cs typeface="맑은 고딕" pitchFamily="34" charset="-120"/>
-              </a:rPr>
-              <a:t>현재 구독 상품, 결제 주기, 다음 결제 예정일 확인</a:t>
-            </a:r>
-            <a:endParaRPr lang="en-US" sz="1000" dirty="0"/>
-          </a:p>
-          <a:p>
-            <a:pPr marL="342900" indent="-342900">
-              <a:lnSpc>
-                <a:spcPct val="125000"/>
-              </a:lnSpc>
-              <a:spcAft>
-                <a:spcPts val="600"/>
-              </a:spcAft>
-              <a:buSzPct val="100000"/>
-              <a:buChar char="•"/>
-            </a:pPr>
-            <a:r>
-              <a:rPr lang="en-US" sz="1000" dirty="0">
-                <a:solidFill>
-                  <a:srgbClr val="1F2A24"/>
-                </a:solidFill>
-                <a:latin typeface="맑은 고딕" pitchFamily="34" charset="0"/>
-                <a:ea typeface="맑은 고딕" pitchFamily="34" charset="-122"/>
-                <a:cs typeface="맑은 고딕" pitchFamily="34" charset="-120"/>
-              </a:rPr>
-              <a:t>[구독 해지]로 자동결제 즉시 해지 가능</a:t>
-            </a:r>
-            <a:endParaRPr lang="en-US" sz="1000" dirty="0"/>
-          </a:p>
-          <a:p>
-            <a:pPr marL="342900" indent="-342900">
-              <a:lnSpc>
-                <a:spcPct val="125000"/>
-              </a:lnSpc>
-              <a:spcAft>
-                <a:spcPts val="600"/>
-              </a:spcAft>
-              <a:buSzPct val="100000"/>
-              <a:buChar char="•"/>
-            </a:pPr>
-            <a:r>
-              <a:rPr lang="en-US" sz="1000" dirty="0">
-                <a:solidFill>
-                  <a:srgbClr val="1F2A24"/>
-                </a:solidFill>
-                <a:latin typeface="맑은 고딕" pitchFamily="34" charset="0"/>
-                <a:ea typeface="맑은 고딕" pitchFamily="34" charset="-122"/>
-                <a:cs typeface="맑은 고딕" pitchFamily="34" charset="-120"/>
-              </a:rPr>
-              <a:t>해지 시 결제된 주기 만료까지 이용 후 FREE 전환</a:t>
-            </a:r>
-            <a:endParaRPr lang="en-US" sz="1000" dirty="0"/>
-          </a:p>
-          <a:p>
-            <a:pPr marL="342900" indent="-342900">
-              <a:lnSpc>
-                <a:spcPct val="125000"/>
-              </a:lnSpc>
-              <a:spcAft>
-                <a:spcPts val="600"/>
-              </a:spcAft>
-              <a:buSzPct val="100000"/>
-              <a:buChar char="•"/>
-            </a:pPr>
-            <a:r>
-              <a:rPr lang="en-US" sz="1000" dirty="0">
-                <a:solidFill>
-                  <a:srgbClr val="1F2A24"/>
-                </a:solidFill>
-                <a:latin typeface="맑은 고딕" pitchFamily="34" charset="0"/>
-                <a:ea typeface="맑은 고딕" pitchFamily="34" charset="-122"/>
-                <a:cs typeface="맑은 고딕" pitchFamily="34" charset="-120"/>
-              </a:rPr>
-              <a:t>[환불 신청] 메뉴에서 환불 접수 가능</a:t>
-            </a:r>
-            <a:endParaRPr lang="en-US" sz="1000" dirty="0"/>
-          </a:p>
-        </p:txBody>
-      </p:sp>
-      <p:sp>
-        <p:nvSpPr>
-          <p:cNvPr id="12" name="Text 10"/>
-          <p:cNvSpPr/>
-          <p:nvPr/>
-        </p:nvSpPr>
-        <p:spPr>
-          <a:xfrm>
-            <a:off x="457200" y="4709160"/>
-            <a:ext cx="6400800" cy="256032"/>
-          </a:xfrm>
-          <a:prstGeom prst="rect">
-            <a:avLst/>
-          </a:prstGeom>
-          <a:noFill/>
-          <a:ln/>
-        </p:spPr>
-        <p:txBody>
-          <a:bodyPr wrap="square" lIns="0" tIns="0" rIns="0" bIns="0" rtlCol="0" anchor="ctr"/>
-          <a:lstStyle/>
-          <a:p>
-            <a:pPr algn="l" indent="0" marL="0">
-              <a:buNone/>
-            </a:pPr>
-            <a:r>
-              <a:rPr lang="en-US" sz="800" dirty="0">
-                <a:solidFill>
-                  <a:srgbClr val="6B7A72"/>
-                </a:solidFill>
-                <a:latin typeface="맑은 고딕" pitchFamily="34" charset="0"/>
-                <a:ea typeface="맑은 고딕" pitchFamily="34" charset="-122"/>
-                <a:cs typeface="맑은 고딕" pitchFamily="34" charset="-120"/>
-              </a:rPr>
-              <a:t>주식회사 구비드 · 바로씻(BaroSit) · MID bill_barosi69c</a:t>
-            </a:r>
-            <a:endParaRPr lang="en-US" sz="800" dirty="0"/>
-          </a:p>
-        </p:txBody>
-      </p:sp>
-      <p:sp>
-        <p:nvSpPr>
-          <p:cNvPr id="13" name="Text 11"/>
-          <p:cNvSpPr/>
-          <p:nvPr/>
-        </p:nvSpPr>
-        <p:spPr>
-          <a:xfrm>
-            <a:off x="8138160" y="4709160"/>
-            <a:ext cx="548640" cy="256032"/>
-          </a:xfrm>
-          <a:prstGeom prst="rect">
-            <a:avLst/>
-          </a:prstGeom>
-          <a:noFill/>
-          <a:ln/>
-        </p:spPr>
-        <p:txBody>
-          <a:bodyPr wrap="square" lIns="0" tIns="0" rIns="0" bIns="0" rtlCol="0" anchor="ctr"/>
-          <a:lstStyle/>
-          <a:p>
-            <a:pPr algn="r" indent="0" marL="0">
-              <a:buNone/>
-            </a:pPr>
-            <a:r>
-              <a:rPr lang="en-US" sz="800" dirty="0">
-                <a:solidFill>
-                  <a:srgbClr val="6B7A72"/>
-                </a:solidFill>
-                <a:latin typeface="맑은 고딕" pitchFamily="34" charset="0"/>
-                <a:ea typeface="맑은 고딕" pitchFamily="34" charset="-122"/>
-                <a:cs typeface="맑은 고딕" pitchFamily="34" charset="-120"/>
-              </a:rPr>
-              <a:t>11</a:t>
-            </a:r>
-            <a:endParaRPr lang="en-US" sz="800" dirty="0"/>
-          </a:p>
-        </p:txBody>
-      </p:sp>
+      <p:pic>
+        <p:nvPicPr>
+          <p:cNvPr id="14" name="Picture 13" descr="step4-pricing-yearly.png"/>
+          <p:cNvPicPr>
+            <a:picLocks noChangeAspect="1"/>
+          </p:cNvPicPr>
+          <p:nvPr/>
+        </p:nvPicPr>
+        <p:blipFill>
+          <a:blip r:embed="rId3"/>
+          <a:stretch>
+            <a:fillRect/>
+          </a:stretch>
+        </p:blipFill>
+        <p:spPr>
+          <a:xfrm>
+            <a:off x="530352" y="1288447"/>
+            <a:ext cx="4928616" cy="2772346"/>
+          </a:xfrm>
+          <a:prstGeom prst="rect">
+            <a:avLst/>
+          </a:prstGeom>
+        </p:spPr>
+      </p:pic>
     </p:spTree>
   </p:cSld>
   <p:clrMapOvr>
